--- a/madd-decks/dagger-alif/15-waw.pptx
+++ b/madd-decks/dagger-alif/15-waw.pptx
@@ -2708,7 +2708,7 @@
         </p:nvSpPr>
         <p:spPr>
           <a:xfrm>
-            <a:off x="3017520" y="1005840"/>
+            <a:off x="3516782" y="1005840"/>
             <a:ext cx="3108960" cy="3108960"/>
           </a:xfrm>
           <a:prstGeom prst="rect">
@@ -2725,7 +2725,7 @@
               <a:buNone/>
             </a:pPr>
             <a:r>
-              <a:rPr lang="ar-SA" altLang="en-US" sz="15000" dirty="0">
+              <a:rPr lang="ar-SA" altLang="en-US" sz="13000" dirty="0">
                 <a:solidFill>
                   <a:srgbClr val="16213E"/>
                 </a:solidFill>
@@ -2735,7 +2735,7 @@
               </a:rPr>
               <a:t>و</a:t>
             </a:r>
-            <a:endParaRPr lang="ar-SA" sz="15000" dirty="0"/>
+            <a:endParaRPr lang="ar-SA" sz="13000" dirty="0"/>
           </a:p>
         </p:txBody>
       </p:sp>
@@ -2747,7 +2747,7 @@
         </p:nvSpPr>
         <p:spPr>
           <a:xfrm>
-            <a:off x="3017520" y="1005840"/>
+            <a:off x="3516782" y="1005840"/>
             <a:ext cx="3108960" cy="3108960"/>
           </a:xfrm>
           <a:prstGeom prst="rect">
@@ -2764,7 +2764,7 @@
               <a:buNone/>
             </a:pPr>
             <a:r>
-              <a:rPr lang="ar-SA" altLang="en-US" sz="15000" dirty="0">
+              <a:rPr lang="ar-SA" altLang="en-US" sz="13000" dirty="0">
                 <a:solidFill>
                   <a:srgbClr val="16213E"/>
                 </a:solidFill>
@@ -2774,19 +2774,19 @@
               </a:rPr>
               <a:t>وَ</a:t>
             </a:r>
-            <a:endParaRPr lang="ar-SA" sz="15000" dirty="0"/>
+            <a:endParaRPr lang="ar-SA" sz="13000" dirty="0"/>
           </a:p>
         </p:txBody>
       </p:sp>
       <p:sp>
         <p:nvSpPr>
-          <p:cNvPr id="27" name="M1 dagger"/>
+          <p:cNvPr id="27" name="M1 alif"/>
           <p:cNvSpPr txBox="1"/>
           <p:nvPr/>
         </p:nvSpPr>
         <p:spPr>
           <a:xfrm>
-            <a:off x="3017520" y="1005840"/>
+            <a:off x="2209190" y="1196530"/>
             <a:ext cx="3108960" cy="3108960"/>
           </a:xfrm>
           <a:prstGeom prst="rect">
@@ -2803,7 +2803,7 @@
               <a:buNone/>
             </a:pPr>
             <a:r>
-              <a:rPr lang="ar-SA" altLang="en-US" sz="15000" dirty="0">
+              <a:rPr lang="ar-SA" altLang="en-US" sz="8450" dirty="0">
                 <a:solidFill>
                   <a:srgbClr val="16213E"/>
                 </a:solidFill>
@@ -2811,9 +2811,9 @@
                 <a:ea typeface="Arial" pitchFamily="34" charset="-122"/>
                 <a:cs typeface="Arial" pitchFamily="34" charset="-120"/>
               </a:rPr>
-              <a:t>وَٰ</a:t>
+              <a:t>ا</a:t>
             </a:r>
-            <a:endParaRPr lang="ar-SA" sz="15000" dirty="0"/>
+            <a:endParaRPr lang="ar-SA" sz="8450" dirty="0"/>
           </a:p>
         </p:txBody>
       </p:sp>
@@ -3799,7 +3799,7 @@
               <a:buNone/>
             </a:pPr>
             <a:r>
-              <a:rPr lang="ar-SA" altLang="en-US" sz="6600" dirty="0">
+              <a:rPr lang="ar-SA" altLang="en-US" sz="6000" dirty="0">
                 <a:solidFill>
                   <a:srgbClr val="16213E"/>
                 </a:solidFill>
@@ -3809,7 +3809,7 @@
               </a:rPr>
               <a:t>ت</a:t>
             </a:r>
-            <a:endParaRPr lang="ar-SA" sz="6600" dirty="0"/>
+            <a:endParaRPr lang="ar-SA" sz="6000" dirty="0"/>
           </a:p>
         </p:txBody>
       </p:sp>
@@ -3835,6 +3835,240 @@
           <a:lstStyle/>
           <a:p>
             <a:pPr rtl="1" algn="ctr" indent="0" marL="0">
+              <a:buNone/>
+            </a:pPr>
+            <a:r>
+              <a:rPr lang="ar-SA" altLang="en-US" sz="6000" dirty="0">
+                <a:solidFill>
+                  <a:srgbClr val="16213E"/>
+                </a:solidFill>
+                <a:latin typeface="Arial" pitchFamily="34" charset="0"/>
+                <a:ea typeface="Arial" pitchFamily="34" charset="-122"/>
+                <a:cs typeface="Arial" pitchFamily="34" charset="-120"/>
+              </a:rPr>
+              <a:t>تَ</a:t>
+            </a:r>
+            <a:endParaRPr lang="ar-SA" sz="6000" dirty="0"/>
+          </a:p>
+        </p:txBody>
+      </p:sp>
+      <p:sp>
+        <p:nvSpPr>
+          <p:cNvPr id="33" name="L2 letter"/>
+          <p:cNvSpPr txBox="1"/>
+          <p:nvPr/>
+        </p:nvSpPr>
+        <p:spPr>
+          <a:xfrm>
+            <a:off x="5486400" y="1920240"/>
+            <a:ext cx="1280160" cy="1280160"/>
+          </a:xfrm>
+          <a:prstGeom prst="rect">
+            <a:avLst/>
+          </a:prstGeom>
+          <a:noFill/>
+          <a:ln/>
+        </p:spPr>
+        <p:txBody>
+          <a:bodyPr wrap="square" lIns="0" tIns="0" rIns="0" bIns="0" rtlCol="0" anchor="ctr"/>
+          <a:lstStyle/>
+          <a:p>
+            <a:pPr rtl="1" algn="ctr" indent="0" marL="0">
+              <a:buNone/>
+            </a:pPr>
+            <a:r>
+              <a:rPr lang="ar-SA" altLang="en-US" sz="6000" dirty="0">
+                <a:solidFill>
+                  <a:srgbClr val="16213E"/>
+                </a:solidFill>
+                <a:latin typeface="Arial" pitchFamily="34" charset="0"/>
+                <a:ea typeface="Arial" pitchFamily="34" charset="-122"/>
+                <a:cs typeface="Arial" pitchFamily="34" charset="-120"/>
+              </a:rPr>
+              <a:t>ب</a:t>
+            </a:r>
+            <a:endParaRPr lang="ar-SA" sz="6000" dirty="0"/>
+          </a:p>
+        </p:txBody>
+      </p:sp>
+      <p:sp>
+        <p:nvSpPr>
+          <p:cNvPr id="34" name="F2 fathah"/>
+          <p:cNvSpPr txBox="1"/>
+          <p:nvPr/>
+        </p:nvSpPr>
+        <p:spPr>
+          <a:xfrm>
+            <a:off x="5486400" y="1920240"/>
+            <a:ext cx="1280160" cy="1280160"/>
+          </a:xfrm>
+          <a:prstGeom prst="rect">
+            <a:avLst/>
+          </a:prstGeom>
+          <a:noFill/>
+          <a:ln/>
+        </p:spPr>
+        <p:txBody>
+          <a:bodyPr wrap="square" lIns="0" tIns="0" rIns="0" bIns="0" rtlCol="0" anchor="ctr"/>
+          <a:lstStyle/>
+          <a:p>
+            <a:pPr rtl="1" algn="ctr" indent="0" marL="0">
+              <a:buNone/>
+            </a:pPr>
+            <a:r>
+              <a:rPr lang="ar-SA" altLang="en-US" sz="6000" dirty="0">
+                <a:solidFill>
+                  <a:srgbClr val="16213E"/>
+                </a:solidFill>
+                <a:latin typeface="Arial" pitchFamily="34" charset="0"/>
+                <a:ea typeface="Arial" pitchFamily="34" charset="-122"/>
+                <a:cs typeface="Arial" pitchFamily="34" charset="-120"/>
+              </a:rPr>
+              <a:t>بَ</a:t>
+            </a:r>
+            <a:endParaRPr lang="ar-SA" sz="6000" dirty="0"/>
+          </a:p>
+        </p:txBody>
+      </p:sp>
+      <p:sp>
+        <p:nvSpPr>
+          <p:cNvPr id="35" name="L3 letter"/>
+          <p:cNvSpPr txBox="1"/>
+          <p:nvPr/>
+        </p:nvSpPr>
+        <p:spPr>
+          <a:xfrm>
+            <a:off x="3933749" y="1920240"/>
+            <a:ext cx="1280160" cy="1280160"/>
+          </a:xfrm>
+          <a:prstGeom prst="rect">
+            <a:avLst/>
+          </a:prstGeom>
+          <a:noFill/>
+          <a:ln/>
+        </p:spPr>
+        <p:txBody>
+          <a:bodyPr wrap="square" lIns="0" tIns="0" rIns="0" bIns="0" rtlCol="0" anchor="ctr"/>
+          <a:lstStyle/>
+          <a:p>
+            <a:pPr rtl="1" algn="ctr" indent="0" marL="0">
+              <a:buNone/>
+            </a:pPr>
+            <a:r>
+              <a:rPr lang="ar-SA" altLang="en-US" sz="6000" dirty="0">
+                <a:solidFill>
+                  <a:srgbClr val="16213E"/>
+                </a:solidFill>
+                <a:latin typeface="Arial" pitchFamily="34" charset="0"/>
+                <a:ea typeface="Arial" pitchFamily="34" charset="-122"/>
+                <a:cs typeface="Arial" pitchFamily="34" charset="-120"/>
+              </a:rPr>
+              <a:t>و</a:t>
+            </a:r>
+            <a:endParaRPr lang="ar-SA" sz="6000" dirty="0"/>
+          </a:p>
+        </p:txBody>
+      </p:sp>
+      <p:sp>
+        <p:nvSpPr>
+          <p:cNvPr id="36" name="F3 fathah"/>
+          <p:cNvSpPr txBox="1"/>
+          <p:nvPr/>
+        </p:nvSpPr>
+        <p:spPr>
+          <a:xfrm>
+            <a:off x="3933749" y="1920240"/>
+            <a:ext cx="1280160" cy="1280160"/>
+          </a:xfrm>
+          <a:prstGeom prst="rect">
+            <a:avLst/>
+          </a:prstGeom>
+          <a:noFill/>
+          <a:ln/>
+        </p:spPr>
+        <p:txBody>
+          <a:bodyPr wrap="square" lIns="0" tIns="0" rIns="0" bIns="0" rtlCol="0" anchor="ctr"/>
+          <a:lstStyle/>
+          <a:p>
+            <a:pPr rtl="1" algn="ctr" indent="0" marL="0">
+              <a:buNone/>
+            </a:pPr>
+            <a:r>
+              <a:rPr lang="ar-SA" altLang="en-US" sz="6000" dirty="0">
+                <a:solidFill>
+                  <a:srgbClr val="16213E"/>
+                </a:solidFill>
+                <a:latin typeface="Arial" pitchFamily="34" charset="0"/>
+                <a:ea typeface="Arial" pitchFamily="34" charset="-122"/>
+                <a:cs typeface="Arial" pitchFamily="34" charset="-120"/>
+              </a:rPr>
+              <a:t>وَ</a:t>
+            </a:r>
+            <a:endParaRPr lang="ar-SA" sz="6000" dirty="0"/>
+          </a:p>
+        </p:txBody>
+      </p:sp>
+      <p:sp>
+        <p:nvSpPr>
+          <p:cNvPr id="37" name="M3 alif"/>
+          <p:cNvSpPr txBox="1"/>
+          <p:nvPr/>
+        </p:nvSpPr>
+        <p:spPr>
+          <a:xfrm>
+            <a:off x="3330245" y="2008251"/>
+            <a:ext cx="1280160" cy="1280160"/>
+          </a:xfrm>
+          <a:prstGeom prst="rect">
+            <a:avLst/>
+          </a:prstGeom>
+          <a:noFill/>
+          <a:ln/>
+        </p:spPr>
+        <p:txBody>
+          <a:bodyPr wrap="square" lIns="0" tIns="0" rIns="0" bIns="0" rtlCol="0" anchor="ctr"/>
+          <a:lstStyle/>
+          <a:p>
+            <a:pPr rtl="1" algn="ctr" indent="0" marL="0">
+              <a:buNone/>
+            </a:pPr>
+            <a:r>
+              <a:rPr lang="ar-SA" altLang="en-US" sz="3900" dirty="0">
+                <a:solidFill>
+                  <a:srgbClr val="16213E"/>
+                </a:solidFill>
+                <a:latin typeface="Arial" pitchFamily="34" charset="0"/>
+                <a:ea typeface="Arial" pitchFamily="34" charset="-122"/>
+                <a:cs typeface="Arial" pitchFamily="34" charset="-120"/>
+              </a:rPr>
+              <a:t>ا</a:t>
+            </a:r>
+            <a:endParaRPr lang="ar-SA" sz="3900" dirty="0"/>
+          </a:p>
+        </p:txBody>
+      </p:sp>
+      <p:sp>
+        <p:nvSpPr>
+          <p:cNvPr id="38" name="R result"/>
+          <p:cNvSpPr txBox="1"/>
+          <p:nvPr/>
+        </p:nvSpPr>
+        <p:spPr>
+          <a:xfrm>
+            <a:off x="594360" y="1645920"/>
+            <a:ext cx="2331720" cy="1828800"/>
+          </a:xfrm>
+          <a:prstGeom prst="rect">
+            <a:avLst/>
+          </a:prstGeom>
+          <a:noFill/>
+          <a:ln/>
+        </p:spPr>
+        <p:txBody>
+          <a:bodyPr wrap="square" lIns="0" tIns="0" rIns="0" bIns="0" rtlCol="0" anchor="ctr"/>
+          <a:lstStyle/>
+          <a:p>
+            <a:pPr algn="ctr" indent="0" marL="0">
               <a:buNone/>
             </a:pPr>
             <a:r>
@@ -3846,38 +4080,13 @@
                 <a:ea typeface="Arial" pitchFamily="34" charset="-122"/>
                 <a:cs typeface="Arial" pitchFamily="34" charset="-120"/>
               </a:rPr>
-              <a:t>تَ</a:t>
+              <a:t>تَبَوَ</a:t>
             </a:r>
-            <a:endParaRPr lang="ar-SA" sz="6600" dirty="0"/>
-          </a:p>
-        </p:txBody>
-      </p:sp>
-      <p:sp>
-        <p:nvSpPr>
-          <p:cNvPr id="33" name="L2 letter"/>
-          <p:cNvSpPr txBox="1"/>
-          <p:nvPr/>
-        </p:nvSpPr>
-        <p:spPr>
-          <a:xfrm>
-            <a:off x="5486400" y="1920240"/>
-            <a:ext cx="1280160" cy="1280160"/>
-          </a:xfrm>
-          <a:prstGeom prst="rect">
-            <a:avLst/>
-          </a:prstGeom>
-          <a:noFill/>
-          <a:ln/>
-        </p:spPr>
-        <p:txBody>
-          <a:bodyPr wrap="square" lIns="0" tIns="0" rIns="0" bIns="0" rtlCol="0" anchor="ctr"/>
-          <a:lstStyle/>
-          <a:p>
-            <a:pPr rtl="1" algn="ctr" indent="0" marL="0">
+            <a:pPr algn="ctr" indent="0" marL="0">
               <a:buNone/>
             </a:pPr>
             <a:r>
-              <a:rPr lang="ar-SA" altLang="en-US" sz="6600" dirty="0">
+              <a:rPr lang="ar-SA" altLang="en-US" sz="4290" dirty="0">
                 <a:solidFill>
                   <a:srgbClr val="16213E"/>
                 </a:solidFill>
@@ -3885,202 +4094,7 @@
                 <a:ea typeface="Arial" pitchFamily="34" charset="-122"/>
                 <a:cs typeface="Arial" pitchFamily="34" charset="-120"/>
               </a:rPr>
-              <a:t>ب</a:t>
-            </a:r>
-            <a:endParaRPr lang="ar-SA" sz="6600" dirty="0"/>
-          </a:p>
-        </p:txBody>
-      </p:sp>
-      <p:sp>
-        <p:nvSpPr>
-          <p:cNvPr id="34" name="F2 fathah"/>
-          <p:cNvSpPr txBox="1"/>
-          <p:nvPr/>
-        </p:nvSpPr>
-        <p:spPr>
-          <a:xfrm>
-            <a:off x="5486400" y="1920240"/>
-            <a:ext cx="1280160" cy="1280160"/>
-          </a:xfrm>
-          <a:prstGeom prst="rect">
-            <a:avLst/>
-          </a:prstGeom>
-          <a:noFill/>
-          <a:ln/>
-        </p:spPr>
-        <p:txBody>
-          <a:bodyPr wrap="square" lIns="0" tIns="0" rIns="0" bIns="0" rtlCol="0" anchor="ctr"/>
-          <a:lstStyle/>
-          <a:p>
-            <a:pPr rtl="1" algn="ctr" indent="0" marL="0">
-              <a:buNone/>
-            </a:pPr>
-            <a:r>
-              <a:rPr lang="ar-SA" altLang="en-US" sz="6600" dirty="0">
-                <a:solidFill>
-                  <a:srgbClr val="16213E"/>
-                </a:solidFill>
-                <a:latin typeface="Arial" pitchFamily="34" charset="0"/>
-                <a:ea typeface="Arial" pitchFamily="34" charset="-122"/>
-                <a:cs typeface="Arial" pitchFamily="34" charset="-120"/>
-              </a:rPr>
-              <a:t>بَ</a:t>
-            </a:r>
-            <a:endParaRPr lang="ar-SA" sz="6600" dirty="0"/>
-          </a:p>
-        </p:txBody>
-      </p:sp>
-      <p:sp>
-        <p:nvSpPr>
-          <p:cNvPr id="35" name="L3 letter"/>
-          <p:cNvSpPr txBox="1"/>
-          <p:nvPr/>
-        </p:nvSpPr>
-        <p:spPr>
-          <a:xfrm>
-            <a:off x="3703320" y="1920240"/>
-            <a:ext cx="1280160" cy="1280160"/>
-          </a:xfrm>
-          <a:prstGeom prst="rect">
-            <a:avLst/>
-          </a:prstGeom>
-          <a:noFill/>
-          <a:ln/>
-        </p:spPr>
-        <p:txBody>
-          <a:bodyPr wrap="square" lIns="0" tIns="0" rIns="0" bIns="0" rtlCol="0" anchor="ctr"/>
-          <a:lstStyle/>
-          <a:p>
-            <a:pPr rtl="1" algn="ctr" indent="0" marL="0">
-              <a:buNone/>
-            </a:pPr>
-            <a:r>
-              <a:rPr lang="ar-SA" altLang="en-US" sz="6600" dirty="0">
-                <a:solidFill>
-                  <a:srgbClr val="16213E"/>
-                </a:solidFill>
-                <a:latin typeface="Arial" pitchFamily="34" charset="0"/>
-                <a:ea typeface="Arial" pitchFamily="34" charset="-122"/>
-                <a:cs typeface="Arial" pitchFamily="34" charset="-120"/>
-              </a:rPr>
-              <a:t>و</a:t>
-            </a:r>
-            <a:endParaRPr lang="ar-SA" sz="6600" dirty="0"/>
-          </a:p>
-        </p:txBody>
-      </p:sp>
-      <p:sp>
-        <p:nvSpPr>
-          <p:cNvPr id="36" name="F3 fathah"/>
-          <p:cNvSpPr txBox="1"/>
-          <p:nvPr/>
-        </p:nvSpPr>
-        <p:spPr>
-          <a:xfrm>
-            <a:off x="3703320" y="1920240"/>
-            <a:ext cx="1280160" cy="1280160"/>
-          </a:xfrm>
-          <a:prstGeom prst="rect">
-            <a:avLst/>
-          </a:prstGeom>
-          <a:noFill/>
-          <a:ln/>
-        </p:spPr>
-        <p:txBody>
-          <a:bodyPr wrap="square" lIns="0" tIns="0" rIns="0" bIns="0" rtlCol="0" anchor="ctr"/>
-          <a:lstStyle/>
-          <a:p>
-            <a:pPr rtl="1" algn="ctr" indent="0" marL="0">
-              <a:buNone/>
-            </a:pPr>
-            <a:r>
-              <a:rPr lang="ar-SA" altLang="en-US" sz="6600" dirty="0">
-                <a:solidFill>
-                  <a:srgbClr val="16213E"/>
-                </a:solidFill>
-                <a:latin typeface="Arial" pitchFamily="34" charset="0"/>
-                <a:ea typeface="Arial" pitchFamily="34" charset="-122"/>
-                <a:cs typeface="Arial" pitchFamily="34" charset="-120"/>
-              </a:rPr>
-              <a:t>وَ</a:t>
-            </a:r>
-            <a:endParaRPr lang="ar-SA" sz="6600" dirty="0"/>
-          </a:p>
-        </p:txBody>
-      </p:sp>
-      <p:sp>
-        <p:nvSpPr>
-          <p:cNvPr id="37" name="M3 dagger"/>
-          <p:cNvSpPr txBox="1"/>
-          <p:nvPr/>
-        </p:nvSpPr>
-        <p:spPr>
-          <a:xfrm>
-            <a:off x="3703320" y="1920240"/>
-            <a:ext cx="1280160" cy="1280160"/>
-          </a:xfrm>
-          <a:prstGeom prst="rect">
-            <a:avLst/>
-          </a:prstGeom>
-          <a:noFill/>
-          <a:ln/>
-        </p:spPr>
-        <p:txBody>
-          <a:bodyPr wrap="square" lIns="0" tIns="0" rIns="0" bIns="0" rtlCol="0" anchor="ctr"/>
-          <a:lstStyle/>
-          <a:p>
-            <a:pPr rtl="1" algn="ctr" indent="0" marL="0">
-              <a:buNone/>
-            </a:pPr>
-            <a:r>
-              <a:rPr lang="ar-SA" altLang="en-US" sz="6600" dirty="0">
-                <a:solidFill>
-                  <a:srgbClr val="16213E"/>
-                </a:solidFill>
-                <a:latin typeface="Arial" pitchFamily="34" charset="0"/>
-                <a:ea typeface="Arial" pitchFamily="34" charset="-122"/>
-                <a:cs typeface="Arial" pitchFamily="34" charset="-120"/>
-              </a:rPr>
-              <a:t>وَٰ</a:t>
-            </a:r>
-            <a:endParaRPr lang="ar-SA" sz="6600" dirty="0"/>
-          </a:p>
-        </p:txBody>
-      </p:sp>
-      <p:sp>
-        <p:nvSpPr>
-          <p:cNvPr id="38" name="R result"/>
-          <p:cNvSpPr txBox="1"/>
-          <p:nvPr/>
-        </p:nvSpPr>
-        <p:spPr>
-          <a:xfrm>
-            <a:off x="594360" y="1645920"/>
-            <a:ext cx="2331720" cy="1828800"/>
-          </a:xfrm>
-          <a:prstGeom prst="rect">
-            <a:avLst/>
-          </a:prstGeom>
-          <a:noFill/>
-          <a:ln/>
-        </p:spPr>
-        <p:txBody>
-          <a:bodyPr wrap="square" lIns="0" tIns="0" rIns="0" bIns="0" rtlCol="0" anchor="ctr"/>
-          <a:lstStyle/>
-          <a:p>
-            <a:pPr rtl="1" algn="ctr" indent="0" marL="0">
-              <a:buNone/>
-            </a:pPr>
-            <a:r>
-              <a:rPr lang="ar-SA" altLang="en-US" sz="6600" dirty="0">
-                <a:solidFill>
-                  <a:srgbClr val="16213E"/>
-                </a:solidFill>
-                <a:latin typeface="Arial" pitchFamily="34" charset="0"/>
-                <a:ea typeface="Arial" pitchFamily="34" charset="-122"/>
-                <a:cs typeface="Arial" pitchFamily="34" charset="-120"/>
-              </a:rPr>
-              <a:t>تَبَوَٰ</a:t>
+              <a:t>ا</a:t>
             </a:r>
             <a:endParaRPr lang="ar-SA" sz="6600" dirty="0"/>
           </a:p>
@@ -5500,7 +5514,7 @@
               <a:buNone/>
             </a:pPr>
             <a:r>
-              <a:rPr lang="ar-SA" altLang="en-US" sz="6600" dirty="0">
+              <a:rPr lang="ar-SA" altLang="en-US" sz="6000" dirty="0">
                 <a:solidFill>
                   <a:srgbClr val="16213E"/>
                 </a:solidFill>
@@ -5510,7 +5524,7 @@
               </a:rPr>
               <a:t>ث</a:t>
             </a:r>
-            <a:endParaRPr lang="ar-SA" sz="6600" dirty="0"/>
+            <a:endParaRPr lang="ar-SA" sz="6000" dirty="0"/>
           </a:p>
         </p:txBody>
       </p:sp>
@@ -5536,6 +5550,240 @@
           <a:lstStyle/>
           <a:p>
             <a:pPr rtl="1" algn="ctr" indent="0" marL="0">
+              <a:buNone/>
+            </a:pPr>
+            <a:r>
+              <a:rPr lang="ar-SA" altLang="en-US" sz="6000" dirty="0">
+                <a:solidFill>
+                  <a:srgbClr val="16213E"/>
+                </a:solidFill>
+                <a:latin typeface="Arial" pitchFamily="34" charset="0"/>
+                <a:ea typeface="Arial" pitchFamily="34" charset="-122"/>
+                <a:cs typeface="Arial" pitchFamily="34" charset="-120"/>
+              </a:rPr>
+              <a:t>ثَ</a:t>
+            </a:r>
+            <a:endParaRPr lang="ar-SA" sz="6000" dirty="0"/>
+          </a:p>
+        </p:txBody>
+      </p:sp>
+      <p:sp>
+        <p:nvSpPr>
+          <p:cNvPr id="33" name="L2 letter"/>
+          <p:cNvSpPr txBox="1"/>
+          <p:nvPr/>
+        </p:nvSpPr>
+        <p:spPr>
+          <a:xfrm>
+            <a:off x="5486400" y="1920240"/>
+            <a:ext cx="1280160" cy="1280160"/>
+          </a:xfrm>
+          <a:prstGeom prst="rect">
+            <a:avLst/>
+          </a:prstGeom>
+          <a:noFill/>
+          <a:ln/>
+        </p:spPr>
+        <p:txBody>
+          <a:bodyPr wrap="square" lIns="0" tIns="0" rIns="0" bIns="0" rtlCol="0" anchor="ctr"/>
+          <a:lstStyle/>
+          <a:p>
+            <a:pPr rtl="1" algn="ctr" indent="0" marL="0">
+              <a:buNone/>
+            </a:pPr>
+            <a:r>
+              <a:rPr lang="ar-SA" altLang="en-US" sz="6000" dirty="0">
+                <a:solidFill>
+                  <a:srgbClr val="16213E"/>
+                </a:solidFill>
+                <a:latin typeface="Arial" pitchFamily="34" charset="0"/>
+                <a:ea typeface="Arial" pitchFamily="34" charset="-122"/>
+                <a:cs typeface="Arial" pitchFamily="34" charset="-120"/>
+              </a:rPr>
+              <a:t>ب</a:t>
+            </a:r>
+            <a:endParaRPr lang="ar-SA" sz="6000" dirty="0"/>
+          </a:p>
+        </p:txBody>
+      </p:sp>
+      <p:sp>
+        <p:nvSpPr>
+          <p:cNvPr id="34" name="F2 fathah"/>
+          <p:cNvSpPr txBox="1"/>
+          <p:nvPr/>
+        </p:nvSpPr>
+        <p:spPr>
+          <a:xfrm>
+            <a:off x="5486400" y="1920240"/>
+            <a:ext cx="1280160" cy="1280160"/>
+          </a:xfrm>
+          <a:prstGeom prst="rect">
+            <a:avLst/>
+          </a:prstGeom>
+          <a:noFill/>
+          <a:ln/>
+        </p:spPr>
+        <p:txBody>
+          <a:bodyPr wrap="square" lIns="0" tIns="0" rIns="0" bIns="0" rtlCol="0" anchor="ctr"/>
+          <a:lstStyle/>
+          <a:p>
+            <a:pPr rtl="1" algn="ctr" indent="0" marL="0">
+              <a:buNone/>
+            </a:pPr>
+            <a:r>
+              <a:rPr lang="ar-SA" altLang="en-US" sz="6000" dirty="0">
+                <a:solidFill>
+                  <a:srgbClr val="16213E"/>
+                </a:solidFill>
+                <a:latin typeface="Arial" pitchFamily="34" charset="0"/>
+                <a:ea typeface="Arial" pitchFamily="34" charset="-122"/>
+                <a:cs typeface="Arial" pitchFamily="34" charset="-120"/>
+              </a:rPr>
+              <a:t>بَ</a:t>
+            </a:r>
+            <a:endParaRPr lang="ar-SA" sz="6000" dirty="0"/>
+          </a:p>
+        </p:txBody>
+      </p:sp>
+      <p:sp>
+        <p:nvSpPr>
+          <p:cNvPr id="35" name="L3 letter"/>
+          <p:cNvSpPr txBox="1"/>
+          <p:nvPr/>
+        </p:nvSpPr>
+        <p:spPr>
+          <a:xfrm>
+            <a:off x="3933749" y="1920240"/>
+            <a:ext cx="1280160" cy="1280160"/>
+          </a:xfrm>
+          <a:prstGeom prst="rect">
+            <a:avLst/>
+          </a:prstGeom>
+          <a:noFill/>
+          <a:ln/>
+        </p:spPr>
+        <p:txBody>
+          <a:bodyPr wrap="square" lIns="0" tIns="0" rIns="0" bIns="0" rtlCol="0" anchor="ctr"/>
+          <a:lstStyle/>
+          <a:p>
+            <a:pPr rtl="1" algn="ctr" indent="0" marL="0">
+              <a:buNone/>
+            </a:pPr>
+            <a:r>
+              <a:rPr lang="ar-SA" altLang="en-US" sz="6000" dirty="0">
+                <a:solidFill>
+                  <a:srgbClr val="16213E"/>
+                </a:solidFill>
+                <a:latin typeface="Arial" pitchFamily="34" charset="0"/>
+                <a:ea typeface="Arial" pitchFamily="34" charset="-122"/>
+                <a:cs typeface="Arial" pitchFamily="34" charset="-120"/>
+              </a:rPr>
+              <a:t>و</a:t>
+            </a:r>
+            <a:endParaRPr lang="ar-SA" sz="6000" dirty="0"/>
+          </a:p>
+        </p:txBody>
+      </p:sp>
+      <p:sp>
+        <p:nvSpPr>
+          <p:cNvPr id="36" name="F3 fathah"/>
+          <p:cNvSpPr txBox="1"/>
+          <p:nvPr/>
+        </p:nvSpPr>
+        <p:spPr>
+          <a:xfrm>
+            <a:off x="3933749" y="1920240"/>
+            <a:ext cx="1280160" cy="1280160"/>
+          </a:xfrm>
+          <a:prstGeom prst="rect">
+            <a:avLst/>
+          </a:prstGeom>
+          <a:noFill/>
+          <a:ln/>
+        </p:spPr>
+        <p:txBody>
+          <a:bodyPr wrap="square" lIns="0" tIns="0" rIns="0" bIns="0" rtlCol="0" anchor="ctr"/>
+          <a:lstStyle/>
+          <a:p>
+            <a:pPr rtl="1" algn="ctr" indent="0" marL="0">
+              <a:buNone/>
+            </a:pPr>
+            <a:r>
+              <a:rPr lang="ar-SA" altLang="en-US" sz="6000" dirty="0">
+                <a:solidFill>
+                  <a:srgbClr val="16213E"/>
+                </a:solidFill>
+                <a:latin typeface="Arial" pitchFamily="34" charset="0"/>
+                <a:ea typeface="Arial" pitchFamily="34" charset="-122"/>
+                <a:cs typeface="Arial" pitchFamily="34" charset="-120"/>
+              </a:rPr>
+              <a:t>وَ</a:t>
+            </a:r>
+            <a:endParaRPr lang="ar-SA" sz="6000" dirty="0"/>
+          </a:p>
+        </p:txBody>
+      </p:sp>
+      <p:sp>
+        <p:nvSpPr>
+          <p:cNvPr id="37" name="M3 alif"/>
+          <p:cNvSpPr txBox="1"/>
+          <p:nvPr/>
+        </p:nvSpPr>
+        <p:spPr>
+          <a:xfrm>
+            <a:off x="3330245" y="2008251"/>
+            <a:ext cx="1280160" cy="1280160"/>
+          </a:xfrm>
+          <a:prstGeom prst="rect">
+            <a:avLst/>
+          </a:prstGeom>
+          <a:noFill/>
+          <a:ln/>
+        </p:spPr>
+        <p:txBody>
+          <a:bodyPr wrap="square" lIns="0" tIns="0" rIns="0" bIns="0" rtlCol="0" anchor="ctr"/>
+          <a:lstStyle/>
+          <a:p>
+            <a:pPr rtl="1" algn="ctr" indent="0" marL="0">
+              <a:buNone/>
+            </a:pPr>
+            <a:r>
+              <a:rPr lang="ar-SA" altLang="en-US" sz="3900" dirty="0">
+                <a:solidFill>
+                  <a:srgbClr val="16213E"/>
+                </a:solidFill>
+                <a:latin typeface="Arial" pitchFamily="34" charset="0"/>
+                <a:ea typeface="Arial" pitchFamily="34" charset="-122"/>
+                <a:cs typeface="Arial" pitchFamily="34" charset="-120"/>
+              </a:rPr>
+              <a:t>ا</a:t>
+            </a:r>
+            <a:endParaRPr lang="ar-SA" sz="3900" dirty="0"/>
+          </a:p>
+        </p:txBody>
+      </p:sp>
+      <p:sp>
+        <p:nvSpPr>
+          <p:cNvPr id="38" name="R result"/>
+          <p:cNvSpPr txBox="1"/>
+          <p:nvPr/>
+        </p:nvSpPr>
+        <p:spPr>
+          <a:xfrm>
+            <a:off x="594360" y="1645920"/>
+            <a:ext cx="2331720" cy="1828800"/>
+          </a:xfrm>
+          <a:prstGeom prst="rect">
+            <a:avLst/>
+          </a:prstGeom>
+          <a:noFill/>
+          <a:ln/>
+        </p:spPr>
+        <p:txBody>
+          <a:bodyPr wrap="square" lIns="0" tIns="0" rIns="0" bIns="0" rtlCol="0" anchor="ctr"/>
+          <a:lstStyle/>
+          <a:p>
+            <a:pPr algn="ctr" indent="0" marL="0">
               <a:buNone/>
             </a:pPr>
             <a:r>
@@ -5547,38 +5795,13 @@
                 <a:ea typeface="Arial" pitchFamily="34" charset="-122"/>
                 <a:cs typeface="Arial" pitchFamily="34" charset="-120"/>
               </a:rPr>
-              <a:t>ثَ</a:t>
+              <a:t>ثَبَوَ</a:t>
             </a:r>
-            <a:endParaRPr lang="ar-SA" sz="6600" dirty="0"/>
-          </a:p>
-        </p:txBody>
-      </p:sp>
-      <p:sp>
-        <p:nvSpPr>
-          <p:cNvPr id="33" name="L2 letter"/>
-          <p:cNvSpPr txBox="1"/>
-          <p:nvPr/>
-        </p:nvSpPr>
-        <p:spPr>
-          <a:xfrm>
-            <a:off x="5486400" y="1920240"/>
-            <a:ext cx="1280160" cy="1280160"/>
-          </a:xfrm>
-          <a:prstGeom prst="rect">
-            <a:avLst/>
-          </a:prstGeom>
-          <a:noFill/>
-          <a:ln/>
-        </p:spPr>
-        <p:txBody>
-          <a:bodyPr wrap="square" lIns="0" tIns="0" rIns="0" bIns="0" rtlCol="0" anchor="ctr"/>
-          <a:lstStyle/>
-          <a:p>
-            <a:pPr rtl="1" algn="ctr" indent="0" marL="0">
+            <a:pPr algn="ctr" indent="0" marL="0">
               <a:buNone/>
             </a:pPr>
             <a:r>
-              <a:rPr lang="ar-SA" altLang="en-US" sz="6600" dirty="0">
+              <a:rPr lang="ar-SA" altLang="en-US" sz="4290" dirty="0">
                 <a:solidFill>
                   <a:srgbClr val="16213E"/>
                 </a:solidFill>
@@ -5586,202 +5809,7 @@
                 <a:ea typeface="Arial" pitchFamily="34" charset="-122"/>
                 <a:cs typeface="Arial" pitchFamily="34" charset="-120"/>
               </a:rPr>
-              <a:t>ب</a:t>
-            </a:r>
-            <a:endParaRPr lang="ar-SA" sz="6600" dirty="0"/>
-          </a:p>
-        </p:txBody>
-      </p:sp>
-      <p:sp>
-        <p:nvSpPr>
-          <p:cNvPr id="34" name="F2 fathah"/>
-          <p:cNvSpPr txBox="1"/>
-          <p:nvPr/>
-        </p:nvSpPr>
-        <p:spPr>
-          <a:xfrm>
-            <a:off x="5486400" y="1920240"/>
-            <a:ext cx="1280160" cy="1280160"/>
-          </a:xfrm>
-          <a:prstGeom prst="rect">
-            <a:avLst/>
-          </a:prstGeom>
-          <a:noFill/>
-          <a:ln/>
-        </p:spPr>
-        <p:txBody>
-          <a:bodyPr wrap="square" lIns="0" tIns="0" rIns="0" bIns="0" rtlCol="0" anchor="ctr"/>
-          <a:lstStyle/>
-          <a:p>
-            <a:pPr rtl="1" algn="ctr" indent="0" marL="0">
-              <a:buNone/>
-            </a:pPr>
-            <a:r>
-              <a:rPr lang="ar-SA" altLang="en-US" sz="6600" dirty="0">
-                <a:solidFill>
-                  <a:srgbClr val="16213E"/>
-                </a:solidFill>
-                <a:latin typeface="Arial" pitchFamily="34" charset="0"/>
-                <a:ea typeface="Arial" pitchFamily="34" charset="-122"/>
-                <a:cs typeface="Arial" pitchFamily="34" charset="-120"/>
-              </a:rPr>
-              <a:t>بَ</a:t>
-            </a:r>
-            <a:endParaRPr lang="ar-SA" sz="6600" dirty="0"/>
-          </a:p>
-        </p:txBody>
-      </p:sp>
-      <p:sp>
-        <p:nvSpPr>
-          <p:cNvPr id="35" name="L3 letter"/>
-          <p:cNvSpPr txBox="1"/>
-          <p:nvPr/>
-        </p:nvSpPr>
-        <p:spPr>
-          <a:xfrm>
-            <a:off x="3703320" y="1920240"/>
-            <a:ext cx="1280160" cy="1280160"/>
-          </a:xfrm>
-          <a:prstGeom prst="rect">
-            <a:avLst/>
-          </a:prstGeom>
-          <a:noFill/>
-          <a:ln/>
-        </p:spPr>
-        <p:txBody>
-          <a:bodyPr wrap="square" lIns="0" tIns="0" rIns="0" bIns="0" rtlCol="0" anchor="ctr"/>
-          <a:lstStyle/>
-          <a:p>
-            <a:pPr rtl="1" algn="ctr" indent="0" marL="0">
-              <a:buNone/>
-            </a:pPr>
-            <a:r>
-              <a:rPr lang="ar-SA" altLang="en-US" sz="6600" dirty="0">
-                <a:solidFill>
-                  <a:srgbClr val="16213E"/>
-                </a:solidFill>
-                <a:latin typeface="Arial" pitchFamily="34" charset="0"/>
-                <a:ea typeface="Arial" pitchFamily="34" charset="-122"/>
-                <a:cs typeface="Arial" pitchFamily="34" charset="-120"/>
-              </a:rPr>
-              <a:t>و</a:t>
-            </a:r>
-            <a:endParaRPr lang="ar-SA" sz="6600" dirty="0"/>
-          </a:p>
-        </p:txBody>
-      </p:sp>
-      <p:sp>
-        <p:nvSpPr>
-          <p:cNvPr id="36" name="F3 fathah"/>
-          <p:cNvSpPr txBox="1"/>
-          <p:nvPr/>
-        </p:nvSpPr>
-        <p:spPr>
-          <a:xfrm>
-            <a:off x="3703320" y="1920240"/>
-            <a:ext cx="1280160" cy="1280160"/>
-          </a:xfrm>
-          <a:prstGeom prst="rect">
-            <a:avLst/>
-          </a:prstGeom>
-          <a:noFill/>
-          <a:ln/>
-        </p:spPr>
-        <p:txBody>
-          <a:bodyPr wrap="square" lIns="0" tIns="0" rIns="0" bIns="0" rtlCol="0" anchor="ctr"/>
-          <a:lstStyle/>
-          <a:p>
-            <a:pPr rtl="1" algn="ctr" indent="0" marL="0">
-              <a:buNone/>
-            </a:pPr>
-            <a:r>
-              <a:rPr lang="ar-SA" altLang="en-US" sz="6600" dirty="0">
-                <a:solidFill>
-                  <a:srgbClr val="16213E"/>
-                </a:solidFill>
-                <a:latin typeface="Arial" pitchFamily="34" charset="0"/>
-                <a:ea typeface="Arial" pitchFamily="34" charset="-122"/>
-                <a:cs typeface="Arial" pitchFamily="34" charset="-120"/>
-              </a:rPr>
-              <a:t>وَ</a:t>
-            </a:r>
-            <a:endParaRPr lang="ar-SA" sz="6600" dirty="0"/>
-          </a:p>
-        </p:txBody>
-      </p:sp>
-      <p:sp>
-        <p:nvSpPr>
-          <p:cNvPr id="37" name="M3 dagger"/>
-          <p:cNvSpPr txBox="1"/>
-          <p:nvPr/>
-        </p:nvSpPr>
-        <p:spPr>
-          <a:xfrm>
-            <a:off x="3703320" y="1920240"/>
-            <a:ext cx="1280160" cy="1280160"/>
-          </a:xfrm>
-          <a:prstGeom prst="rect">
-            <a:avLst/>
-          </a:prstGeom>
-          <a:noFill/>
-          <a:ln/>
-        </p:spPr>
-        <p:txBody>
-          <a:bodyPr wrap="square" lIns="0" tIns="0" rIns="0" bIns="0" rtlCol="0" anchor="ctr"/>
-          <a:lstStyle/>
-          <a:p>
-            <a:pPr rtl="1" algn="ctr" indent="0" marL="0">
-              <a:buNone/>
-            </a:pPr>
-            <a:r>
-              <a:rPr lang="ar-SA" altLang="en-US" sz="6600" dirty="0">
-                <a:solidFill>
-                  <a:srgbClr val="16213E"/>
-                </a:solidFill>
-                <a:latin typeface="Arial" pitchFamily="34" charset="0"/>
-                <a:ea typeface="Arial" pitchFamily="34" charset="-122"/>
-                <a:cs typeface="Arial" pitchFamily="34" charset="-120"/>
-              </a:rPr>
-              <a:t>وَٰ</a:t>
-            </a:r>
-            <a:endParaRPr lang="ar-SA" sz="6600" dirty="0"/>
-          </a:p>
-        </p:txBody>
-      </p:sp>
-      <p:sp>
-        <p:nvSpPr>
-          <p:cNvPr id="38" name="R result"/>
-          <p:cNvSpPr txBox="1"/>
-          <p:nvPr/>
-        </p:nvSpPr>
-        <p:spPr>
-          <a:xfrm>
-            <a:off x="594360" y="1645920"/>
-            <a:ext cx="2331720" cy="1828800"/>
-          </a:xfrm>
-          <a:prstGeom prst="rect">
-            <a:avLst/>
-          </a:prstGeom>
-          <a:noFill/>
-          <a:ln/>
-        </p:spPr>
-        <p:txBody>
-          <a:bodyPr wrap="square" lIns="0" tIns="0" rIns="0" bIns="0" rtlCol="0" anchor="ctr"/>
-          <a:lstStyle/>
-          <a:p>
-            <a:pPr rtl="1" algn="ctr" indent="0" marL="0">
-              <a:buNone/>
-            </a:pPr>
-            <a:r>
-              <a:rPr lang="ar-SA" altLang="en-US" sz="6600" dirty="0">
-                <a:solidFill>
-                  <a:srgbClr val="16213E"/>
-                </a:solidFill>
-                <a:latin typeface="Arial" pitchFamily="34" charset="0"/>
-                <a:ea typeface="Arial" pitchFamily="34" charset="-122"/>
-                <a:cs typeface="Arial" pitchFamily="34" charset="-120"/>
-              </a:rPr>
-              <a:t>ثَبَوَٰ</a:t>
+              <a:t>ا</a:t>
             </a:r>
             <a:endParaRPr lang="ar-SA" sz="6600" dirty="0"/>
           </a:p>
@@ -7201,7 +7229,7 @@
               <a:buNone/>
             </a:pPr>
             <a:r>
-              <a:rPr lang="ar-SA" altLang="en-US" sz="6600" dirty="0">
+              <a:rPr lang="ar-SA" altLang="en-US" sz="6000" dirty="0">
                 <a:solidFill>
                   <a:srgbClr val="16213E"/>
                 </a:solidFill>
@@ -7211,7 +7239,7 @@
               </a:rPr>
               <a:t>ج</a:t>
             </a:r>
-            <a:endParaRPr lang="ar-SA" sz="6600" dirty="0"/>
+            <a:endParaRPr lang="ar-SA" sz="6000" dirty="0"/>
           </a:p>
         </p:txBody>
       </p:sp>
@@ -7237,6 +7265,240 @@
           <a:lstStyle/>
           <a:p>
             <a:pPr rtl="1" algn="ctr" indent="0" marL="0">
+              <a:buNone/>
+            </a:pPr>
+            <a:r>
+              <a:rPr lang="ar-SA" altLang="en-US" sz="6000" dirty="0">
+                <a:solidFill>
+                  <a:srgbClr val="16213E"/>
+                </a:solidFill>
+                <a:latin typeface="Arial" pitchFamily="34" charset="0"/>
+                <a:ea typeface="Arial" pitchFamily="34" charset="-122"/>
+                <a:cs typeface="Arial" pitchFamily="34" charset="-120"/>
+              </a:rPr>
+              <a:t>جَ</a:t>
+            </a:r>
+            <a:endParaRPr lang="ar-SA" sz="6000" dirty="0"/>
+          </a:p>
+        </p:txBody>
+      </p:sp>
+      <p:sp>
+        <p:nvSpPr>
+          <p:cNvPr id="33" name="L2 letter"/>
+          <p:cNvSpPr txBox="1"/>
+          <p:nvPr/>
+        </p:nvSpPr>
+        <p:spPr>
+          <a:xfrm>
+            <a:off x="5486400" y="1920240"/>
+            <a:ext cx="1280160" cy="1280160"/>
+          </a:xfrm>
+          <a:prstGeom prst="rect">
+            <a:avLst/>
+          </a:prstGeom>
+          <a:noFill/>
+          <a:ln/>
+        </p:spPr>
+        <p:txBody>
+          <a:bodyPr wrap="square" lIns="0" tIns="0" rIns="0" bIns="0" rtlCol="0" anchor="ctr"/>
+          <a:lstStyle/>
+          <a:p>
+            <a:pPr rtl="1" algn="ctr" indent="0" marL="0">
+              <a:buNone/>
+            </a:pPr>
+            <a:r>
+              <a:rPr lang="ar-SA" altLang="en-US" sz="6000" dirty="0">
+                <a:solidFill>
+                  <a:srgbClr val="16213E"/>
+                </a:solidFill>
+                <a:latin typeface="Arial" pitchFamily="34" charset="0"/>
+                <a:ea typeface="Arial" pitchFamily="34" charset="-122"/>
+                <a:cs typeface="Arial" pitchFamily="34" charset="-120"/>
+              </a:rPr>
+              <a:t>ب</a:t>
+            </a:r>
+            <a:endParaRPr lang="ar-SA" sz="6000" dirty="0"/>
+          </a:p>
+        </p:txBody>
+      </p:sp>
+      <p:sp>
+        <p:nvSpPr>
+          <p:cNvPr id="34" name="F2 fathah"/>
+          <p:cNvSpPr txBox="1"/>
+          <p:nvPr/>
+        </p:nvSpPr>
+        <p:spPr>
+          <a:xfrm>
+            <a:off x="5486400" y="1920240"/>
+            <a:ext cx="1280160" cy="1280160"/>
+          </a:xfrm>
+          <a:prstGeom prst="rect">
+            <a:avLst/>
+          </a:prstGeom>
+          <a:noFill/>
+          <a:ln/>
+        </p:spPr>
+        <p:txBody>
+          <a:bodyPr wrap="square" lIns="0" tIns="0" rIns="0" bIns="0" rtlCol="0" anchor="ctr"/>
+          <a:lstStyle/>
+          <a:p>
+            <a:pPr rtl="1" algn="ctr" indent="0" marL="0">
+              <a:buNone/>
+            </a:pPr>
+            <a:r>
+              <a:rPr lang="ar-SA" altLang="en-US" sz="6000" dirty="0">
+                <a:solidFill>
+                  <a:srgbClr val="16213E"/>
+                </a:solidFill>
+                <a:latin typeface="Arial" pitchFamily="34" charset="0"/>
+                <a:ea typeface="Arial" pitchFamily="34" charset="-122"/>
+                <a:cs typeface="Arial" pitchFamily="34" charset="-120"/>
+              </a:rPr>
+              <a:t>بَ</a:t>
+            </a:r>
+            <a:endParaRPr lang="ar-SA" sz="6000" dirty="0"/>
+          </a:p>
+        </p:txBody>
+      </p:sp>
+      <p:sp>
+        <p:nvSpPr>
+          <p:cNvPr id="35" name="L3 letter"/>
+          <p:cNvSpPr txBox="1"/>
+          <p:nvPr/>
+        </p:nvSpPr>
+        <p:spPr>
+          <a:xfrm>
+            <a:off x="3933749" y="1920240"/>
+            <a:ext cx="1280160" cy="1280160"/>
+          </a:xfrm>
+          <a:prstGeom prst="rect">
+            <a:avLst/>
+          </a:prstGeom>
+          <a:noFill/>
+          <a:ln/>
+        </p:spPr>
+        <p:txBody>
+          <a:bodyPr wrap="square" lIns="0" tIns="0" rIns="0" bIns="0" rtlCol="0" anchor="ctr"/>
+          <a:lstStyle/>
+          <a:p>
+            <a:pPr rtl="1" algn="ctr" indent="0" marL="0">
+              <a:buNone/>
+            </a:pPr>
+            <a:r>
+              <a:rPr lang="ar-SA" altLang="en-US" sz="6000" dirty="0">
+                <a:solidFill>
+                  <a:srgbClr val="16213E"/>
+                </a:solidFill>
+                <a:latin typeface="Arial" pitchFamily="34" charset="0"/>
+                <a:ea typeface="Arial" pitchFamily="34" charset="-122"/>
+                <a:cs typeface="Arial" pitchFamily="34" charset="-120"/>
+              </a:rPr>
+              <a:t>و</a:t>
+            </a:r>
+            <a:endParaRPr lang="ar-SA" sz="6000" dirty="0"/>
+          </a:p>
+        </p:txBody>
+      </p:sp>
+      <p:sp>
+        <p:nvSpPr>
+          <p:cNvPr id="36" name="F3 fathah"/>
+          <p:cNvSpPr txBox="1"/>
+          <p:nvPr/>
+        </p:nvSpPr>
+        <p:spPr>
+          <a:xfrm>
+            <a:off x="3933749" y="1920240"/>
+            <a:ext cx="1280160" cy="1280160"/>
+          </a:xfrm>
+          <a:prstGeom prst="rect">
+            <a:avLst/>
+          </a:prstGeom>
+          <a:noFill/>
+          <a:ln/>
+        </p:spPr>
+        <p:txBody>
+          <a:bodyPr wrap="square" lIns="0" tIns="0" rIns="0" bIns="0" rtlCol="0" anchor="ctr"/>
+          <a:lstStyle/>
+          <a:p>
+            <a:pPr rtl="1" algn="ctr" indent="0" marL="0">
+              <a:buNone/>
+            </a:pPr>
+            <a:r>
+              <a:rPr lang="ar-SA" altLang="en-US" sz="6000" dirty="0">
+                <a:solidFill>
+                  <a:srgbClr val="16213E"/>
+                </a:solidFill>
+                <a:latin typeface="Arial" pitchFamily="34" charset="0"/>
+                <a:ea typeface="Arial" pitchFamily="34" charset="-122"/>
+                <a:cs typeface="Arial" pitchFamily="34" charset="-120"/>
+              </a:rPr>
+              <a:t>وَ</a:t>
+            </a:r>
+            <a:endParaRPr lang="ar-SA" sz="6000" dirty="0"/>
+          </a:p>
+        </p:txBody>
+      </p:sp>
+      <p:sp>
+        <p:nvSpPr>
+          <p:cNvPr id="37" name="M3 alif"/>
+          <p:cNvSpPr txBox="1"/>
+          <p:nvPr/>
+        </p:nvSpPr>
+        <p:spPr>
+          <a:xfrm>
+            <a:off x="3330245" y="2008251"/>
+            <a:ext cx="1280160" cy="1280160"/>
+          </a:xfrm>
+          <a:prstGeom prst="rect">
+            <a:avLst/>
+          </a:prstGeom>
+          <a:noFill/>
+          <a:ln/>
+        </p:spPr>
+        <p:txBody>
+          <a:bodyPr wrap="square" lIns="0" tIns="0" rIns="0" bIns="0" rtlCol="0" anchor="ctr"/>
+          <a:lstStyle/>
+          <a:p>
+            <a:pPr rtl="1" algn="ctr" indent="0" marL="0">
+              <a:buNone/>
+            </a:pPr>
+            <a:r>
+              <a:rPr lang="ar-SA" altLang="en-US" sz="3900" dirty="0">
+                <a:solidFill>
+                  <a:srgbClr val="16213E"/>
+                </a:solidFill>
+                <a:latin typeface="Arial" pitchFamily="34" charset="0"/>
+                <a:ea typeface="Arial" pitchFamily="34" charset="-122"/>
+                <a:cs typeface="Arial" pitchFamily="34" charset="-120"/>
+              </a:rPr>
+              <a:t>ا</a:t>
+            </a:r>
+            <a:endParaRPr lang="ar-SA" sz="3900" dirty="0"/>
+          </a:p>
+        </p:txBody>
+      </p:sp>
+      <p:sp>
+        <p:nvSpPr>
+          <p:cNvPr id="38" name="R result"/>
+          <p:cNvSpPr txBox="1"/>
+          <p:nvPr/>
+        </p:nvSpPr>
+        <p:spPr>
+          <a:xfrm>
+            <a:off x="594360" y="1645920"/>
+            <a:ext cx="2331720" cy="1828800"/>
+          </a:xfrm>
+          <a:prstGeom prst="rect">
+            <a:avLst/>
+          </a:prstGeom>
+          <a:noFill/>
+          <a:ln/>
+        </p:spPr>
+        <p:txBody>
+          <a:bodyPr wrap="square" lIns="0" tIns="0" rIns="0" bIns="0" rtlCol="0" anchor="ctr"/>
+          <a:lstStyle/>
+          <a:p>
+            <a:pPr algn="ctr" indent="0" marL="0">
               <a:buNone/>
             </a:pPr>
             <a:r>
@@ -7248,38 +7510,13 @@
                 <a:ea typeface="Arial" pitchFamily="34" charset="-122"/>
                 <a:cs typeface="Arial" pitchFamily="34" charset="-120"/>
               </a:rPr>
-              <a:t>جَ</a:t>
+              <a:t>جَبَوَ</a:t>
             </a:r>
-            <a:endParaRPr lang="ar-SA" sz="6600" dirty="0"/>
-          </a:p>
-        </p:txBody>
-      </p:sp>
-      <p:sp>
-        <p:nvSpPr>
-          <p:cNvPr id="33" name="L2 letter"/>
-          <p:cNvSpPr txBox="1"/>
-          <p:nvPr/>
-        </p:nvSpPr>
-        <p:spPr>
-          <a:xfrm>
-            <a:off x="5486400" y="1920240"/>
-            <a:ext cx="1280160" cy="1280160"/>
-          </a:xfrm>
-          <a:prstGeom prst="rect">
-            <a:avLst/>
-          </a:prstGeom>
-          <a:noFill/>
-          <a:ln/>
-        </p:spPr>
-        <p:txBody>
-          <a:bodyPr wrap="square" lIns="0" tIns="0" rIns="0" bIns="0" rtlCol="0" anchor="ctr"/>
-          <a:lstStyle/>
-          <a:p>
-            <a:pPr rtl="1" algn="ctr" indent="0" marL="0">
+            <a:pPr algn="ctr" indent="0" marL="0">
               <a:buNone/>
             </a:pPr>
             <a:r>
-              <a:rPr lang="ar-SA" altLang="en-US" sz="6600" dirty="0">
+              <a:rPr lang="ar-SA" altLang="en-US" sz="4290" dirty="0">
                 <a:solidFill>
                   <a:srgbClr val="16213E"/>
                 </a:solidFill>
@@ -7287,202 +7524,7 @@
                 <a:ea typeface="Arial" pitchFamily="34" charset="-122"/>
                 <a:cs typeface="Arial" pitchFamily="34" charset="-120"/>
               </a:rPr>
-              <a:t>ب</a:t>
-            </a:r>
-            <a:endParaRPr lang="ar-SA" sz="6600" dirty="0"/>
-          </a:p>
-        </p:txBody>
-      </p:sp>
-      <p:sp>
-        <p:nvSpPr>
-          <p:cNvPr id="34" name="F2 fathah"/>
-          <p:cNvSpPr txBox="1"/>
-          <p:nvPr/>
-        </p:nvSpPr>
-        <p:spPr>
-          <a:xfrm>
-            <a:off x="5486400" y="1920240"/>
-            <a:ext cx="1280160" cy="1280160"/>
-          </a:xfrm>
-          <a:prstGeom prst="rect">
-            <a:avLst/>
-          </a:prstGeom>
-          <a:noFill/>
-          <a:ln/>
-        </p:spPr>
-        <p:txBody>
-          <a:bodyPr wrap="square" lIns="0" tIns="0" rIns="0" bIns="0" rtlCol="0" anchor="ctr"/>
-          <a:lstStyle/>
-          <a:p>
-            <a:pPr rtl="1" algn="ctr" indent="0" marL="0">
-              <a:buNone/>
-            </a:pPr>
-            <a:r>
-              <a:rPr lang="ar-SA" altLang="en-US" sz="6600" dirty="0">
-                <a:solidFill>
-                  <a:srgbClr val="16213E"/>
-                </a:solidFill>
-                <a:latin typeface="Arial" pitchFamily="34" charset="0"/>
-                <a:ea typeface="Arial" pitchFamily="34" charset="-122"/>
-                <a:cs typeface="Arial" pitchFamily="34" charset="-120"/>
-              </a:rPr>
-              <a:t>بَ</a:t>
-            </a:r>
-            <a:endParaRPr lang="ar-SA" sz="6600" dirty="0"/>
-          </a:p>
-        </p:txBody>
-      </p:sp>
-      <p:sp>
-        <p:nvSpPr>
-          <p:cNvPr id="35" name="L3 letter"/>
-          <p:cNvSpPr txBox="1"/>
-          <p:nvPr/>
-        </p:nvSpPr>
-        <p:spPr>
-          <a:xfrm>
-            <a:off x="3703320" y="1920240"/>
-            <a:ext cx="1280160" cy="1280160"/>
-          </a:xfrm>
-          <a:prstGeom prst="rect">
-            <a:avLst/>
-          </a:prstGeom>
-          <a:noFill/>
-          <a:ln/>
-        </p:spPr>
-        <p:txBody>
-          <a:bodyPr wrap="square" lIns="0" tIns="0" rIns="0" bIns="0" rtlCol="0" anchor="ctr"/>
-          <a:lstStyle/>
-          <a:p>
-            <a:pPr rtl="1" algn="ctr" indent="0" marL="0">
-              <a:buNone/>
-            </a:pPr>
-            <a:r>
-              <a:rPr lang="ar-SA" altLang="en-US" sz="6600" dirty="0">
-                <a:solidFill>
-                  <a:srgbClr val="16213E"/>
-                </a:solidFill>
-                <a:latin typeface="Arial" pitchFamily="34" charset="0"/>
-                <a:ea typeface="Arial" pitchFamily="34" charset="-122"/>
-                <a:cs typeface="Arial" pitchFamily="34" charset="-120"/>
-              </a:rPr>
-              <a:t>و</a:t>
-            </a:r>
-            <a:endParaRPr lang="ar-SA" sz="6600" dirty="0"/>
-          </a:p>
-        </p:txBody>
-      </p:sp>
-      <p:sp>
-        <p:nvSpPr>
-          <p:cNvPr id="36" name="F3 fathah"/>
-          <p:cNvSpPr txBox="1"/>
-          <p:nvPr/>
-        </p:nvSpPr>
-        <p:spPr>
-          <a:xfrm>
-            <a:off x="3703320" y="1920240"/>
-            <a:ext cx="1280160" cy="1280160"/>
-          </a:xfrm>
-          <a:prstGeom prst="rect">
-            <a:avLst/>
-          </a:prstGeom>
-          <a:noFill/>
-          <a:ln/>
-        </p:spPr>
-        <p:txBody>
-          <a:bodyPr wrap="square" lIns="0" tIns="0" rIns="0" bIns="0" rtlCol="0" anchor="ctr"/>
-          <a:lstStyle/>
-          <a:p>
-            <a:pPr rtl="1" algn="ctr" indent="0" marL="0">
-              <a:buNone/>
-            </a:pPr>
-            <a:r>
-              <a:rPr lang="ar-SA" altLang="en-US" sz="6600" dirty="0">
-                <a:solidFill>
-                  <a:srgbClr val="16213E"/>
-                </a:solidFill>
-                <a:latin typeface="Arial" pitchFamily="34" charset="0"/>
-                <a:ea typeface="Arial" pitchFamily="34" charset="-122"/>
-                <a:cs typeface="Arial" pitchFamily="34" charset="-120"/>
-              </a:rPr>
-              <a:t>وَ</a:t>
-            </a:r>
-            <a:endParaRPr lang="ar-SA" sz="6600" dirty="0"/>
-          </a:p>
-        </p:txBody>
-      </p:sp>
-      <p:sp>
-        <p:nvSpPr>
-          <p:cNvPr id="37" name="M3 dagger"/>
-          <p:cNvSpPr txBox="1"/>
-          <p:nvPr/>
-        </p:nvSpPr>
-        <p:spPr>
-          <a:xfrm>
-            <a:off x="3703320" y="1920240"/>
-            <a:ext cx="1280160" cy="1280160"/>
-          </a:xfrm>
-          <a:prstGeom prst="rect">
-            <a:avLst/>
-          </a:prstGeom>
-          <a:noFill/>
-          <a:ln/>
-        </p:spPr>
-        <p:txBody>
-          <a:bodyPr wrap="square" lIns="0" tIns="0" rIns="0" bIns="0" rtlCol="0" anchor="ctr"/>
-          <a:lstStyle/>
-          <a:p>
-            <a:pPr rtl="1" algn="ctr" indent="0" marL="0">
-              <a:buNone/>
-            </a:pPr>
-            <a:r>
-              <a:rPr lang="ar-SA" altLang="en-US" sz="6600" dirty="0">
-                <a:solidFill>
-                  <a:srgbClr val="16213E"/>
-                </a:solidFill>
-                <a:latin typeface="Arial" pitchFamily="34" charset="0"/>
-                <a:ea typeface="Arial" pitchFamily="34" charset="-122"/>
-                <a:cs typeface="Arial" pitchFamily="34" charset="-120"/>
-              </a:rPr>
-              <a:t>وَٰ</a:t>
-            </a:r>
-            <a:endParaRPr lang="ar-SA" sz="6600" dirty="0"/>
-          </a:p>
-        </p:txBody>
-      </p:sp>
-      <p:sp>
-        <p:nvSpPr>
-          <p:cNvPr id="38" name="R result"/>
-          <p:cNvSpPr txBox="1"/>
-          <p:nvPr/>
-        </p:nvSpPr>
-        <p:spPr>
-          <a:xfrm>
-            <a:off x="594360" y="1645920"/>
-            <a:ext cx="2331720" cy="1828800"/>
-          </a:xfrm>
-          <a:prstGeom prst="rect">
-            <a:avLst/>
-          </a:prstGeom>
-          <a:noFill/>
-          <a:ln/>
-        </p:spPr>
-        <p:txBody>
-          <a:bodyPr wrap="square" lIns="0" tIns="0" rIns="0" bIns="0" rtlCol="0" anchor="ctr"/>
-          <a:lstStyle/>
-          <a:p>
-            <a:pPr rtl="1" algn="ctr" indent="0" marL="0">
-              <a:buNone/>
-            </a:pPr>
-            <a:r>
-              <a:rPr lang="ar-SA" altLang="en-US" sz="6600" dirty="0">
-                <a:solidFill>
-                  <a:srgbClr val="16213E"/>
-                </a:solidFill>
-                <a:latin typeface="Arial" pitchFamily="34" charset="0"/>
-                <a:ea typeface="Arial" pitchFamily="34" charset="-122"/>
-                <a:cs typeface="Arial" pitchFamily="34" charset="-120"/>
-              </a:rPr>
-              <a:t>جَبَوَٰ</a:t>
+              <a:t>ا</a:t>
             </a:r>
             <a:endParaRPr lang="ar-SA" sz="6600" dirty="0"/>
           </a:p>
@@ -8902,7 +8944,7 @@
               <a:buNone/>
             </a:pPr>
             <a:r>
-              <a:rPr lang="ar-SA" altLang="en-US" sz="6600" dirty="0">
+              <a:rPr lang="ar-SA" altLang="en-US" sz="6000" dirty="0">
                 <a:solidFill>
                   <a:srgbClr val="16213E"/>
                 </a:solidFill>
@@ -8912,7 +8954,7 @@
               </a:rPr>
               <a:t>ح</a:t>
             </a:r>
-            <a:endParaRPr lang="ar-SA" sz="6600" dirty="0"/>
+            <a:endParaRPr lang="ar-SA" sz="6000" dirty="0"/>
           </a:p>
         </p:txBody>
       </p:sp>
@@ -8938,6 +8980,240 @@
           <a:lstStyle/>
           <a:p>
             <a:pPr rtl="1" algn="ctr" indent="0" marL="0">
+              <a:buNone/>
+            </a:pPr>
+            <a:r>
+              <a:rPr lang="ar-SA" altLang="en-US" sz="6000" dirty="0">
+                <a:solidFill>
+                  <a:srgbClr val="16213E"/>
+                </a:solidFill>
+                <a:latin typeface="Arial" pitchFamily="34" charset="0"/>
+                <a:ea typeface="Arial" pitchFamily="34" charset="-122"/>
+                <a:cs typeface="Arial" pitchFamily="34" charset="-120"/>
+              </a:rPr>
+              <a:t>حَ</a:t>
+            </a:r>
+            <a:endParaRPr lang="ar-SA" sz="6000" dirty="0"/>
+          </a:p>
+        </p:txBody>
+      </p:sp>
+      <p:sp>
+        <p:nvSpPr>
+          <p:cNvPr id="33" name="L2 letter"/>
+          <p:cNvSpPr txBox="1"/>
+          <p:nvPr/>
+        </p:nvSpPr>
+        <p:spPr>
+          <a:xfrm>
+            <a:off x="5486400" y="1920240"/>
+            <a:ext cx="1280160" cy="1280160"/>
+          </a:xfrm>
+          <a:prstGeom prst="rect">
+            <a:avLst/>
+          </a:prstGeom>
+          <a:noFill/>
+          <a:ln/>
+        </p:spPr>
+        <p:txBody>
+          <a:bodyPr wrap="square" lIns="0" tIns="0" rIns="0" bIns="0" rtlCol="0" anchor="ctr"/>
+          <a:lstStyle/>
+          <a:p>
+            <a:pPr rtl="1" algn="ctr" indent="0" marL="0">
+              <a:buNone/>
+            </a:pPr>
+            <a:r>
+              <a:rPr lang="ar-SA" altLang="en-US" sz="6000" dirty="0">
+                <a:solidFill>
+                  <a:srgbClr val="16213E"/>
+                </a:solidFill>
+                <a:latin typeface="Arial" pitchFamily="34" charset="0"/>
+                <a:ea typeface="Arial" pitchFamily="34" charset="-122"/>
+                <a:cs typeface="Arial" pitchFamily="34" charset="-120"/>
+              </a:rPr>
+              <a:t>ب</a:t>
+            </a:r>
+            <a:endParaRPr lang="ar-SA" sz="6000" dirty="0"/>
+          </a:p>
+        </p:txBody>
+      </p:sp>
+      <p:sp>
+        <p:nvSpPr>
+          <p:cNvPr id="34" name="F2 fathah"/>
+          <p:cNvSpPr txBox="1"/>
+          <p:nvPr/>
+        </p:nvSpPr>
+        <p:spPr>
+          <a:xfrm>
+            <a:off x="5486400" y="1920240"/>
+            <a:ext cx="1280160" cy="1280160"/>
+          </a:xfrm>
+          <a:prstGeom prst="rect">
+            <a:avLst/>
+          </a:prstGeom>
+          <a:noFill/>
+          <a:ln/>
+        </p:spPr>
+        <p:txBody>
+          <a:bodyPr wrap="square" lIns="0" tIns="0" rIns="0" bIns="0" rtlCol="0" anchor="ctr"/>
+          <a:lstStyle/>
+          <a:p>
+            <a:pPr rtl="1" algn="ctr" indent="0" marL="0">
+              <a:buNone/>
+            </a:pPr>
+            <a:r>
+              <a:rPr lang="ar-SA" altLang="en-US" sz="6000" dirty="0">
+                <a:solidFill>
+                  <a:srgbClr val="16213E"/>
+                </a:solidFill>
+                <a:latin typeface="Arial" pitchFamily="34" charset="0"/>
+                <a:ea typeface="Arial" pitchFamily="34" charset="-122"/>
+                <a:cs typeface="Arial" pitchFamily="34" charset="-120"/>
+              </a:rPr>
+              <a:t>بَ</a:t>
+            </a:r>
+            <a:endParaRPr lang="ar-SA" sz="6000" dirty="0"/>
+          </a:p>
+        </p:txBody>
+      </p:sp>
+      <p:sp>
+        <p:nvSpPr>
+          <p:cNvPr id="35" name="L3 letter"/>
+          <p:cNvSpPr txBox="1"/>
+          <p:nvPr/>
+        </p:nvSpPr>
+        <p:spPr>
+          <a:xfrm>
+            <a:off x="3933749" y="1920240"/>
+            <a:ext cx="1280160" cy="1280160"/>
+          </a:xfrm>
+          <a:prstGeom prst="rect">
+            <a:avLst/>
+          </a:prstGeom>
+          <a:noFill/>
+          <a:ln/>
+        </p:spPr>
+        <p:txBody>
+          <a:bodyPr wrap="square" lIns="0" tIns="0" rIns="0" bIns="0" rtlCol="0" anchor="ctr"/>
+          <a:lstStyle/>
+          <a:p>
+            <a:pPr rtl="1" algn="ctr" indent="0" marL="0">
+              <a:buNone/>
+            </a:pPr>
+            <a:r>
+              <a:rPr lang="ar-SA" altLang="en-US" sz="6000" dirty="0">
+                <a:solidFill>
+                  <a:srgbClr val="16213E"/>
+                </a:solidFill>
+                <a:latin typeface="Arial" pitchFamily="34" charset="0"/>
+                <a:ea typeface="Arial" pitchFamily="34" charset="-122"/>
+                <a:cs typeface="Arial" pitchFamily="34" charset="-120"/>
+              </a:rPr>
+              <a:t>و</a:t>
+            </a:r>
+            <a:endParaRPr lang="ar-SA" sz="6000" dirty="0"/>
+          </a:p>
+        </p:txBody>
+      </p:sp>
+      <p:sp>
+        <p:nvSpPr>
+          <p:cNvPr id="36" name="F3 fathah"/>
+          <p:cNvSpPr txBox="1"/>
+          <p:nvPr/>
+        </p:nvSpPr>
+        <p:spPr>
+          <a:xfrm>
+            <a:off x="3933749" y="1920240"/>
+            <a:ext cx="1280160" cy="1280160"/>
+          </a:xfrm>
+          <a:prstGeom prst="rect">
+            <a:avLst/>
+          </a:prstGeom>
+          <a:noFill/>
+          <a:ln/>
+        </p:spPr>
+        <p:txBody>
+          <a:bodyPr wrap="square" lIns="0" tIns="0" rIns="0" bIns="0" rtlCol="0" anchor="ctr"/>
+          <a:lstStyle/>
+          <a:p>
+            <a:pPr rtl="1" algn="ctr" indent="0" marL="0">
+              <a:buNone/>
+            </a:pPr>
+            <a:r>
+              <a:rPr lang="ar-SA" altLang="en-US" sz="6000" dirty="0">
+                <a:solidFill>
+                  <a:srgbClr val="16213E"/>
+                </a:solidFill>
+                <a:latin typeface="Arial" pitchFamily="34" charset="0"/>
+                <a:ea typeface="Arial" pitchFamily="34" charset="-122"/>
+                <a:cs typeface="Arial" pitchFamily="34" charset="-120"/>
+              </a:rPr>
+              <a:t>وَ</a:t>
+            </a:r>
+            <a:endParaRPr lang="ar-SA" sz="6000" dirty="0"/>
+          </a:p>
+        </p:txBody>
+      </p:sp>
+      <p:sp>
+        <p:nvSpPr>
+          <p:cNvPr id="37" name="M3 alif"/>
+          <p:cNvSpPr txBox="1"/>
+          <p:nvPr/>
+        </p:nvSpPr>
+        <p:spPr>
+          <a:xfrm>
+            <a:off x="3330245" y="2008251"/>
+            <a:ext cx="1280160" cy="1280160"/>
+          </a:xfrm>
+          <a:prstGeom prst="rect">
+            <a:avLst/>
+          </a:prstGeom>
+          <a:noFill/>
+          <a:ln/>
+        </p:spPr>
+        <p:txBody>
+          <a:bodyPr wrap="square" lIns="0" tIns="0" rIns="0" bIns="0" rtlCol="0" anchor="ctr"/>
+          <a:lstStyle/>
+          <a:p>
+            <a:pPr rtl="1" algn="ctr" indent="0" marL="0">
+              <a:buNone/>
+            </a:pPr>
+            <a:r>
+              <a:rPr lang="ar-SA" altLang="en-US" sz="3900" dirty="0">
+                <a:solidFill>
+                  <a:srgbClr val="16213E"/>
+                </a:solidFill>
+                <a:latin typeface="Arial" pitchFamily="34" charset="0"/>
+                <a:ea typeface="Arial" pitchFamily="34" charset="-122"/>
+                <a:cs typeface="Arial" pitchFamily="34" charset="-120"/>
+              </a:rPr>
+              <a:t>ا</a:t>
+            </a:r>
+            <a:endParaRPr lang="ar-SA" sz="3900" dirty="0"/>
+          </a:p>
+        </p:txBody>
+      </p:sp>
+      <p:sp>
+        <p:nvSpPr>
+          <p:cNvPr id="38" name="R result"/>
+          <p:cNvSpPr txBox="1"/>
+          <p:nvPr/>
+        </p:nvSpPr>
+        <p:spPr>
+          <a:xfrm>
+            <a:off x="594360" y="1645920"/>
+            <a:ext cx="2331720" cy="1828800"/>
+          </a:xfrm>
+          <a:prstGeom prst="rect">
+            <a:avLst/>
+          </a:prstGeom>
+          <a:noFill/>
+          <a:ln/>
+        </p:spPr>
+        <p:txBody>
+          <a:bodyPr wrap="square" lIns="0" tIns="0" rIns="0" bIns="0" rtlCol="0" anchor="ctr"/>
+          <a:lstStyle/>
+          <a:p>
+            <a:pPr algn="ctr" indent="0" marL="0">
               <a:buNone/>
             </a:pPr>
             <a:r>
@@ -8949,38 +9225,13 @@
                 <a:ea typeface="Arial" pitchFamily="34" charset="-122"/>
                 <a:cs typeface="Arial" pitchFamily="34" charset="-120"/>
               </a:rPr>
-              <a:t>حَ</a:t>
+              <a:t>حَبَوَ</a:t>
             </a:r>
-            <a:endParaRPr lang="ar-SA" sz="6600" dirty="0"/>
-          </a:p>
-        </p:txBody>
-      </p:sp>
-      <p:sp>
-        <p:nvSpPr>
-          <p:cNvPr id="33" name="L2 letter"/>
-          <p:cNvSpPr txBox="1"/>
-          <p:nvPr/>
-        </p:nvSpPr>
-        <p:spPr>
-          <a:xfrm>
-            <a:off x="5486400" y="1920240"/>
-            <a:ext cx="1280160" cy="1280160"/>
-          </a:xfrm>
-          <a:prstGeom prst="rect">
-            <a:avLst/>
-          </a:prstGeom>
-          <a:noFill/>
-          <a:ln/>
-        </p:spPr>
-        <p:txBody>
-          <a:bodyPr wrap="square" lIns="0" tIns="0" rIns="0" bIns="0" rtlCol="0" anchor="ctr"/>
-          <a:lstStyle/>
-          <a:p>
-            <a:pPr rtl="1" algn="ctr" indent="0" marL="0">
+            <a:pPr algn="ctr" indent="0" marL="0">
               <a:buNone/>
             </a:pPr>
             <a:r>
-              <a:rPr lang="ar-SA" altLang="en-US" sz="6600" dirty="0">
+              <a:rPr lang="ar-SA" altLang="en-US" sz="4290" dirty="0">
                 <a:solidFill>
                   <a:srgbClr val="16213E"/>
                 </a:solidFill>
@@ -8988,202 +9239,7 @@
                 <a:ea typeface="Arial" pitchFamily="34" charset="-122"/>
                 <a:cs typeface="Arial" pitchFamily="34" charset="-120"/>
               </a:rPr>
-              <a:t>ب</a:t>
-            </a:r>
-            <a:endParaRPr lang="ar-SA" sz="6600" dirty="0"/>
-          </a:p>
-        </p:txBody>
-      </p:sp>
-      <p:sp>
-        <p:nvSpPr>
-          <p:cNvPr id="34" name="F2 fathah"/>
-          <p:cNvSpPr txBox="1"/>
-          <p:nvPr/>
-        </p:nvSpPr>
-        <p:spPr>
-          <a:xfrm>
-            <a:off x="5486400" y="1920240"/>
-            <a:ext cx="1280160" cy="1280160"/>
-          </a:xfrm>
-          <a:prstGeom prst="rect">
-            <a:avLst/>
-          </a:prstGeom>
-          <a:noFill/>
-          <a:ln/>
-        </p:spPr>
-        <p:txBody>
-          <a:bodyPr wrap="square" lIns="0" tIns="0" rIns="0" bIns="0" rtlCol="0" anchor="ctr"/>
-          <a:lstStyle/>
-          <a:p>
-            <a:pPr rtl="1" algn="ctr" indent="0" marL="0">
-              <a:buNone/>
-            </a:pPr>
-            <a:r>
-              <a:rPr lang="ar-SA" altLang="en-US" sz="6600" dirty="0">
-                <a:solidFill>
-                  <a:srgbClr val="16213E"/>
-                </a:solidFill>
-                <a:latin typeface="Arial" pitchFamily="34" charset="0"/>
-                <a:ea typeface="Arial" pitchFamily="34" charset="-122"/>
-                <a:cs typeface="Arial" pitchFamily="34" charset="-120"/>
-              </a:rPr>
-              <a:t>بَ</a:t>
-            </a:r>
-            <a:endParaRPr lang="ar-SA" sz="6600" dirty="0"/>
-          </a:p>
-        </p:txBody>
-      </p:sp>
-      <p:sp>
-        <p:nvSpPr>
-          <p:cNvPr id="35" name="L3 letter"/>
-          <p:cNvSpPr txBox="1"/>
-          <p:nvPr/>
-        </p:nvSpPr>
-        <p:spPr>
-          <a:xfrm>
-            <a:off x="3703320" y="1920240"/>
-            <a:ext cx="1280160" cy="1280160"/>
-          </a:xfrm>
-          <a:prstGeom prst="rect">
-            <a:avLst/>
-          </a:prstGeom>
-          <a:noFill/>
-          <a:ln/>
-        </p:spPr>
-        <p:txBody>
-          <a:bodyPr wrap="square" lIns="0" tIns="0" rIns="0" bIns="0" rtlCol="0" anchor="ctr"/>
-          <a:lstStyle/>
-          <a:p>
-            <a:pPr rtl="1" algn="ctr" indent="0" marL="0">
-              <a:buNone/>
-            </a:pPr>
-            <a:r>
-              <a:rPr lang="ar-SA" altLang="en-US" sz="6600" dirty="0">
-                <a:solidFill>
-                  <a:srgbClr val="16213E"/>
-                </a:solidFill>
-                <a:latin typeface="Arial" pitchFamily="34" charset="0"/>
-                <a:ea typeface="Arial" pitchFamily="34" charset="-122"/>
-                <a:cs typeface="Arial" pitchFamily="34" charset="-120"/>
-              </a:rPr>
-              <a:t>و</a:t>
-            </a:r>
-            <a:endParaRPr lang="ar-SA" sz="6600" dirty="0"/>
-          </a:p>
-        </p:txBody>
-      </p:sp>
-      <p:sp>
-        <p:nvSpPr>
-          <p:cNvPr id="36" name="F3 fathah"/>
-          <p:cNvSpPr txBox="1"/>
-          <p:nvPr/>
-        </p:nvSpPr>
-        <p:spPr>
-          <a:xfrm>
-            <a:off x="3703320" y="1920240"/>
-            <a:ext cx="1280160" cy="1280160"/>
-          </a:xfrm>
-          <a:prstGeom prst="rect">
-            <a:avLst/>
-          </a:prstGeom>
-          <a:noFill/>
-          <a:ln/>
-        </p:spPr>
-        <p:txBody>
-          <a:bodyPr wrap="square" lIns="0" tIns="0" rIns="0" bIns="0" rtlCol="0" anchor="ctr"/>
-          <a:lstStyle/>
-          <a:p>
-            <a:pPr rtl="1" algn="ctr" indent="0" marL="0">
-              <a:buNone/>
-            </a:pPr>
-            <a:r>
-              <a:rPr lang="ar-SA" altLang="en-US" sz="6600" dirty="0">
-                <a:solidFill>
-                  <a:srgbClr val="16213E"/>
-                </a:solidFill>
-                <a:latin typeface="Arial" pitchFamily="34" charset="0"/>
-                <a:ea typeface="Arial" pitchFamily="34" charset="-122"/>
-                <a:cs typeface="Arial" pitchFamily="34" charset="-120"/>
-              </a:rPr>
-              <a:t>وَ</a:t>
-            </a:r>
-            <a:endParaRPr lang="ar-SA" sz="6600" dirty="0"/>
-          </a:p>
-        </p:txBody>
-      </p:sp>
-      <p:sp>
-        <p:nvSpPr>
-          <p:cNvPr id="37" name="M3 dagger"/>
-          <p:cNvSpPr txBox="1"/>
-          <p:nvPr/>
-        </p:nvSpPr>
-        <p:spPr>
-          <a:xfrm>
-            <a:off x="3703320" y="1920240"/>
-            <a:ext cx="1280160" cy="1280160"/>
-          </a:xfrm>
-          <a:prstGeom prst="rect">
-            <a:avLst/>
-          </a:prstGeom>
-          <a:noFill/>
-          <a:ln/>
-        </p:spPr>
-        <p:txBody>
-          <a:bodyPr wrap="square" lIns="0" tIns="0" rIns="0" bIns="0" rtlCol="0" anchor="ctr"/>
-          <a:lstStyle/>
-          <a:p>
-            <a:pPr rtl="1" algn="ctr" indent="0" marL="0">
-              <a:buNone/>
-            </a:pPr>
-            <a:r>
-              <a:rPr lang="ar-SA" altLang="en-US" sz="6600" dirty="0">
-                <a:solidFill>
-                  <a:srgbClr val="16213E"/>
-                </a:solidFill>
-                <a:latin typeface="Arial" pitchFamily="34" charset="0"/>
-                <a:ea typeface="Arial" pitchFamily="34" charset="-122"/>
-                <a:cs typeface="Arial" pitchFamily="34" charset="-120"/>
-              </a:rPr>
-              <a:t>وَٰ</a:t>
-            </a:r>
-            <a:endParaRPr lang="ar-SA" sz="6600" dirty="0"/>
-          </a:p>
-        </p:txBody>
-      </p:sp>
-      <p:sp>
-        <p:nvSpPr>
-          <p:cNvPr id="38" name="R result"/>
-          <p:cNvSpPr txBox="1"/>
-          <p:nvPr/>
-        </p:nvSpPr>
-        <p:spPr>
-          <a:xfrm>
-            <a:off x="594360" y="1645920"/>
-            <a:ext cx="2331720" cy="1828800"/>
-          </a:xfrm>
-          <a:prstGeom prst="rect">
-            <a:avLst/>
-          </a:prstGeom>
-          <a:noFill/>
-          <a:ln/>
-        </p:spPr>
-        <p:txBody>
-          <a:bodyPr wrap="square" lIns="0" tIns="0" rIns="0" bIns="0" rtlCol="0" anchor="ctr"/>
-          <a:lstStyle/>
-          <a:p>
-            <a:pPr rtl="1" algn="ctr" indent="0" marL="0">
-              <a:buNone/>
-            </a:pPr>
-            <a:r>
-              <a:rPr lang="ar-SA" altLang="en-US" sz="6600" dirty="0">
-                <a:solidFill>
-                  <a:srgbClr val="16213E"/>
-                </a:solidFill>
-                <a:latin typeface="Arial" pitchFamily="34" charset="0"/>
-                <a:ea typeface="Arial" pitchFamily="34" charset="-122"/>
-                <a:cs typeface="Arial" pitchFamily="34" charset="-120"/>
-              </a:rPr>
-              <a:t>حَبَوَٰ</a:t>
+              <a:t>ا</a:t>
             </a:r>
             <a:endParaRPr lang="ar-SA" sz="6600" dirty="0"/>
           </a:p>
@@ -10603,7 +10659,7 @@
               <a:buNone/>
             </a:pPr>
             <a:r>
-              <a:rPr lang="ar-SA" altLang="en-US" sz="6600" dirty="0">
+              <a:rPr lang="ar-SA" altLang="en-US" sz="6000" dirty="0">
                 <a:solidFill>
                   <a:srgbClr val="16213E"/>
                 </a:solidFill>
@@ -10613,7 +10669,7 @@
               </a:rPr>
               <a:t>خ</a:t>
             </a:r>
-            <a:endParaRPr lang="ar-SA" sz="6600" dirty="0"/>
+            <a:endParaRPr lang="ar-SA" sz="6000" dirty="0"/>
           </a:p>
         </p:txBody>
       </p:sp>
@@ -10639,6 +10695,240 @@
           <a:lstStyle/>
           <a:p>
             <a:pPr rtl="1" algn="ctr" indent="0" marL="0">
+              <a:buNone/>
+            </a:pPr>
+            <a:r>
+              <a:rPr lang="ar-SA" altLang="en-US" sz="6000" dirty="0">
+                <a:solidFill>
+                  <a:srgbClr val="16213E"/>
+                </a:solidFill>
+                <a:latin typeface="Arial" pitchFamily="34" charset="0"/>
+                <a:ea typeface="Arial" pitchFamily="34" charset="-122"/>
+                <a:cs typeface="Arial" pitchFamily="34" charset="-120"/>
+              </a:rPr>
+              <a:t>خَ</a:t>
+            </a:r>
+            <a:endParaRPr lang="ar-SA" sz="6000" dirty="0"/>
+          </a:p>
+        </p:txBody>
+      </p:sp>
+      <p:sp>
+        <p:nvSpPr>
+          <p:cNvPr id="33" name="L2 letter"/>
+          <p:cNvSpPr txBox="1"/>
+          <p:nvPr/>
+        </p:nvSpPr>
+        <p:spPr>
+          <a:xfrm>
+            <a:off x="5486400" y="1920240"/>
+            <a:ext cx="1280160" cy="1280160"/>
+          </a:xfrm>
+          <a:prstGeom prst="rect">
+            <a:avLst/>
+          </a:prstGeom>
+          <a:noFill/>
+          <a:ln/>
+        </p:spPr>
+        <p:txBody>
+          <a:bodyPr wrap="square" lIns="0" tIns="0" rIns="0" bIns="0" rtlCol="0" anchor="ctr"/>
+          <a:lstStyle/>
+          <a:p>
+            <a:pPr rtl="1" algn="ctr" indent="0" marL="0">
+              <a:buNone/>
+            </a:pPr>
+            <a:r>
+              <a:rPr lang="ar-SA" altLang="en-US" sz="6000" dirty="0">
+                <a:solidFill>
+                  <a:srgbClr val="16213E"/>
+                </a:solidFill>
+                <a:latin typeface="Arial" pitchFamily="34" charset="0"/>
+                <a:ea typeface="Arial" pitchFamily="34" charset="-122"/>
+                <a:cs typeface="Arial" pitchFamily="34" charset="-120"/>
+              </a:rPr>
+              <a:t>ب</a:t>
+            </a:r>
+            <a:endParaRPr lang="ar-SA" sz="6000" dirty="0"/>
+          </a:p>
+        </p:txBody>
+      </p:sp>
+      <p:sp>
+        <p:nvSpPr>
+          <p:cNvPr id="34" name="F2 fathah"/>
+          <p:cNvSpPr txBox="1"/>
+          <p:nvPr/>
+        </p:nvSpPr>
+        <p:spPr>
+          <a:xfrm>
+            <a:off x="5486400" y="1920240"/>
+            <a:ext cx="1280160" cy="1280160"/>
+          </a:xfrm>
+          <a:prstGeom prst="rect">
+            <a:avLst/>
+          </a:prstGeom>
+          <a:noFill/>
+          <a:ln/>
+        </p:spPr>
+        <p:txBody>
+          <a:bodyPr wrap="square" lIns="0" tIns="0" rIns="0" bIns="0" rtlCol="0" anchor="ctr"/>
+          <a:lstStyle/>
+          <a:p>
+            <a:pPr rtl="1" algn="ctr" indent="0" marL="0">
+              <a:buNone/>
+            </a:pPr>
+            <a:r>
+              <a:rPr lang="ar-SA" altLang="en-US" sz="6000" dirty="0">
+                <a:solidFill>
+                  <a:srgbClr val="16213E"/>
+                </a:solidFill>
+                <a:latin typeface="Arial" pitchFamily="34" charset="0"/>
+                <a:ea typeface="Arial" pitchFamily="34" charset="-122"/>
+                <a:cs typeface="Arial" pitchFamily="34" charset="-120"/>
+              </a:rPr>
+              <a:t>بَ</a:t>
+            </a:r>
+            <a:endParaRPr lang="ar-SA" sz="6000" dirty="0"/>
+          </a:p>
+        </p:txBody>
+      </p:sp>
+      <p:sp>
+        <p:nvSpPr>
+          <p:cNvPr id="35" name="L3 letter"/>
+          <p:cNvSpPr txBox="1"/>
+          <p:nvPr/>
+        </p:nvSpPr>
+        <p:spPr>
+          <a:xfrm>
+            <a:off x="3933749" y="1920240"/>
+            <a:ext cx="1280160" cy="1280160"/>
+          </a:xfrm>
+          <a:prstGeom prst="rect">
+            <a:avLst/>
+          </a:prstGeom>
+          <a:noFill/>
+          <a:ln/>
+        </p:spPr>
+        <p:txBody>
+          <a:bodyPr wrap="square" lIns="0" tIns="0" rIns="0" bIns="0" rtlCol="0" anchor="ctr"/>
+          <a:lstStyle/>
+          <a:p>
+            <a:pPr rtl="1" algn="ctr" indent="0" marL="0">
+              <a:buNone/>
+            </a:pPr>
+            <a:r>
+              <a:rPr lang="ar-SA" altLang="en-US" sz="6000" dirty="0">
+                <a:solidFill>
+                  <a:srgbClr val="16213E"/>
+                </a:solidFill>
+                <a:latin typeface="Arial" pitchFamily="34" charset="0"/>
+                <a:ea typeface="Arial" pitchFamily="34" charset="-122"/>
+                <a:cs typeface="Arial" pitchFamily="34" charset="-120"/>
+              </a:rPr>
+              <a:t>و</a:t>
+            </a:r>
+            <a:endParaRPr lang="ar-SA" sz="6000" dirty="0"/>
+          </a:p>
+        </p:txBody>
+      </p:sp>
+      <p:sp>
+        <p:nvSpPr>
+          <p:cNvPr id="36" name="F3 fathah"/>
+          <p:cNvSpPr txBox="1"/>
+          <p:nvPr/>
+        </p:nvSpPr>
+        <p:spPr>
+          <a:xfrm>
+            <a:off x="3933749" y="1920240"/>
+            <a:ext cx="1280160" cy="1280160"/>
+          </a:xfrm>
+          <a:prstGeom prst="rect">
+            <a:avLst/>
+          </a:prstGeom>
+          <a:noFill/>
+          <a:ln/>
+        </p:spPr>
+        <p:txBody>
+          <a:bodyPr wrap="square" lIns="0" tIns="0" rIns="0" bIns="0" rtlCol="0" anchor="ctr"/>
+          <a:lstStyle/>
+          <a:p>
+            <a:pPr rtl="1" algn="ctr" indent="0" marL="0">
+              <a:buNone/>
+            </a:pPr>
+            <a:r>
+              <a:rPr lang="ar-SA" altLang="en-US" sz="6000" dirty="0">
+                <a:solidFill>
+                  <a:srgbClr val="16213E"/>
+                </a:solidFill>
+                <a:latin typeface="Arial" pitchFamily="34" charset="0"/>
+                <a:ea typeface="Arial" pitchFamily="34" charset="-122"/>
+                <a:cs typeface="Arial" pitchFamily="34" charset="-120"/>
+              </a:rPr>
+              <a:t>وَ</a:t>
+            </a:r>
+            <a:endParaRPr lang="ar-SA" sz="6000" dirty="0"/>
+          </a:p>
+        </p:txBody>
+      </p:sp>
+      <p:sp>
+        <p:nvSpPr>
+          <p:cNvPr id="37" name="M3 alif"/>
+          <p:cNvSpPr txBox="1"/>
+          <p:nvPr/>
+        </p:nvSpPr>
+        <p:spPr>
+          <a:xfrm>
+            <a:off x="3330245" y="2008251"/>
+            <a:ext cx="1280160" cy="1280160"/>
+          </a:xfrm>
+          <a:prstGeom prst="rect">
+            <a:avLst/>
+          </a:prstGeom>
+          <a:noFill/>
+          <a:ln/>
+        </p:spPr>
+        <p:txBody>
+          <a:bodyPr wrap="square" lIns="0" tIns="0" rIns="0" bIns="0" rtlCol="0" anchor="ctr"/>
+          <a:lstStyle/>
+          <a:p>
+            <a:pPr rtl="1" algn="ctr" indent="0" marL="0">
+              <a:buNone/>
+            </a:pPr>
+            <a:r>
+              <a:rPr lang="ar-SA" altLang="en-US" sz="3900" dirty="0">
+                <a:solidFill>
+                  <a:srgbClr val="16213E"/>
+                </a:solidFill>
+                <a:latin typeface="Arial" pitchFamily="34" charset="0"/>
+                <a:ea typeface="Arial" pitchFamily="34" charset="-122"/>
+                <a:cs typeface="Arial" pitchFamily="34" charset="-120"/>
+              </a:rPr>
+              <a:t>ا</a:t>
+            </a:r>
+            <a:endParaRPr lang="ar-SA" sz="3900" dirty="0"/>
+          </a:p>
+        </p:txBody>
+      </p:sp>
+      <p:sp>
+        <p:nvSpPr>
+          <p:cNvPr id="38" name="R result"/>
+          <p:cNvSpPr txBox="1"/>
+          <p:nvPr/>
+        </p:nvSpPr>
+        <p:spPr>
+          <a:xfrm>
+            <a:off x="594360" y="1645920"/>
+            <a:ext cx="2331720" cy="1828800"/>
+          </a:xfrm>
+          <a:prstGeom prst="rect">
+            <a:avLst/>
+          </a:prstGeom>
+          <a:noFill/>
+          <a:ln/>
+        </p:spPr>
+        <p:txBody>
+          <a:bodyPr wrap="square" lIns="0" tIns="0" rIns="0" bIns="0" rtlCol="0" anchor="ctr"/>
+          <a:lstStyle/>
+          <a:p>
+            <a:pPr algn="ctr" indent="0" marL="0">
               <a:buNone/>
             </a:pPr>
             <a:r>
@@ -10650,38 +10940,13 @@
                 <a:ea typeface="Arial" pitchFamily="34" charset="-122"/>
                 <a:cs typeface="Arial" pitchFamily="34" charset="-120"/>
               </a:rPr>
-              <a:t>خَ</a:t>
+              <a:t>خَبَوَ</a:t>
             </a:r>
-            <a:endParaRPr lang="ar-SA" sz="6600" dirty="0"/>
-          </a:p>
-        </p:txBody>
-      </p:sp>
-      <p:sp>
-        <p:nvSpPr>
-          <p:cNvPr id="33" name="L2 letter"/>
-          <p:cNvSpPr txBox="1"/>
-          <p:nvPr/>
-        </p:nvSpPr>
-        <p:spPr>
-          <a:xfrm>
-            <a:off x="5486400" y="1920240"/>
-            <a:ext cx="1280160" cy="1280160"/>
-          </a:xfrm>
-          <a:prstGeom prst="rect">
-            <a:avLst/>
-          </a:prstGeom>
-          <a:noFill/>
-          <a:ln/>
-        </p:spPr>
-        <p:txBody>
-          <a:bodyPr wrap="square" lIns="0" tIns="0" rIns="0" bIns="0" rtlCol="0" anchor="ctr"/>
-          <a:lstStyle/>
-          <a:p>
-            <a:pPr rtl="1" algn="ctr" indent="0" marL="0">
+            <a:pPr algn="ctr" indent="0" marL="0">
               <a:buNone/>
             </a:pPr>
             <a:r>
-              <a:rPr lang="ar-SA" altLang="en-US" sz="6600" dirty="0">
+              <a:rPr lang="ar-SA" altLang="en-US" sz="4290" dirty="0">
                 <a:solidFill>
                   <a:srgbClr val="16213E"/>
                 </a:solidFill>
@@ -10689,202 +10954,7 @@
                 <a:ea typeface="Arial" pitchFamily="34" charset="-122"/>
                 <a:cs typeface="Arial" pitchFamily="34" charset="-120"/>
               </a:rPr>
-              <a:t>ب</a:t>
-            </a:r>
-            <a:endParaRPr lang="ar-SA" sz="6600" dirty="0"/>
-          </a:p>
-        </p:txBody>
-      </p:sp>
-      <p:sp>
-        <p:nvSpPr>
-          <p:cNvPr id="34" name="F2 fathah"/>
-          <p:cNvSpPr txBox="1"/>
-          <p:nvPr/>
-        </p:nvSpPr>
-        <p:spPr>
-          <a:xfrm>
-            <a:off x="5486400" y="1920240"/>
-            <a:ext cx="1280160" cy="1280160"/>
-          </a:xfrm>
-          <a:prstGeom prst="rect">
-            <a:avLst/>
-          </a:prstGeom>
-          <a:noFill/>
-          <a:ln/>
-        </p:spPr>
-        <p:txBody>
-          <a:bodyPr wrap="square" lIns="0" tIns="0" rIns="0" bIns="0" rtlCol="0" anchor="ctr"/>
-          <a:lstStyle/>
-          <a:p>
-            <a:pPr rtl="1" algn="ctr" indent="0" marL="0">
-              <a:buNone/>
-            </a:pPr>
-            <a:r>
-              <a:rPr lang="ar-SA" altLang="en-US" sz="6600" dirty="0">
-                <a:solidFill>
-                  <a:srgbClr val="16213E"/>
-                </a:solidFill>
-                <a:latin typeface="Arial" pitchFamily="34" charset="0"/>
-                <a:ea typeface="Arial" pitchFamily="34" charset="-122"/>
-                <a:cs typeface="Arial" pitchFamily="34" charset="-120"/>
-              </a:rPr>
-              <a:t>بَ</a:t>
-            </a:r>
-            <a:endParaRPr lang="ar-SA" sz="6600" dirty="0"/>
-          </a:p>
-        </p:txBody>
-      </p:sp>
-      <p:sp>
-        <p:nvSpPr>
-          <p:cNvPr id="35" name="L3 letter"/>
-          <p:cNvSpPr txBox="1"/>
-          <p:nvPr/>
-        </p:nvSpPr>
-        <p:spPr>
-          <a:xfrm>
-            <a:off x="3703320" y="1920240"/>
-            <a:ext cx="1280160" cy="1280160"/>
-          </a:xfrm>
-          <a:prstGeom prst="rect">
-            <a:avLst/>
-          </a:prstGeom>
-          <a:noFill/>
-          <a:ln/>
-        </p:spPr>
-        <p:txBody>
-          <a:bodyPr wrap="square" lIns="0" tIns="0" rIns="0" bIns="0" rtlCol="0" anchor="ctr"/>
-          <a:lstStyle/>
-          <a:p>
-            <a:pPr rtl="1" algn="ctr" indent="0" marL="0">
-              <a:buNone/>
-            </a:pPr>
-            <a:r>
-              <a:rPr lang="ar-SA" altLang="en-US" sz="6600" dirty="0">
-                <a:solidFill>
-                  <a:srgbClr val="16213E"/>
-                </a:solidFill>
-                <a:latin typeface="Arial" pitchFamily="34" charset="0"/>
-                <a:ea typeface="Arial" pitchFamily="34" charset="-122"/>
-                <a:cs typeface="Arial" pitchFamily="34" charset="-120"/>
-              </a:rPr>
-              <a:t>و</a:t>
-            </a:r>
-            <a:endParaRPr lang="ar-SA" sz="6600" dirty="0"/>
-          </a:p>
-        </p:txBody>
-      </p:sp>
-      <p:sp>
-        <p:nvSpPr>
-          <p:cNvPr id="36" name="F3 fathah"/>
-          <p:cNvSpPr txBox="1"/>
-          <p:nvPr/>
-        </p:nvSpPr>
-        <p:spPr>
-          <a:xfrm>
-            <a:off x="3703320" y="1920240"/>
-            <a:ext cx="1280160" cy="1280160"/>
-          </a:xfrm>
-          <a:prstGeom prst="rect">
-            <a:avLst/>
-          </a:prstGeom>
-          <a:noFill/>
-          <a:ln/>
-        </p:spPr>
-        <p:txBody>
-          <a:bodyPr wrap="square" lIns="0" tIns="0" rIns="0" bIns="0" rtlCol="0" anchor="ctr"/>
-          <a:lstStyle/>
-          <a:p>
-            <a:pPr rtl="1" algn="ctr" indent="0" marL="0">
-              <a:buNone/>
-            </a:pPr>
-            <a:r>
-              <a:rPr lang="ar-SA" altLang="en-US" sz="6600" dirty="0">
-                <a:solidFill>
-                  <a:srgbClr val="16213E"/>
-                </a:solidFill>
-                <a:latin typeface="Arial" pitchFamily="34" charset="0"/>
-                <a:ea typeface="Arial" pitchFamily="34" charset="-122"/>
-                <a:cs typeface="Arial" pitchFamily="34" charset="-120"/>
-              </a:rPr>
-              <a:t>وَ</a:t>
-            </a:r>
-            <a:endParaRPr lang="ar-SA" sz="6600" dirty="0"/>
-          </a:p>
-        </p:txBody>
-      </p:sp>
-      <p:sp>
-        <p:nvSpPr>
-          <p:cNvPr id="37" name="M3 dagger"/>
-          <p:cNvSpPr txBox="1"/>
-          <p:nvPr/>
-        </p:nvSpPr>
-        <p:spPr>
-          <a:xfrm>
-            <a:off x="3703320" y="1920240"/>
-            <a:ext cx="1280160" cy="1280160"/>
-          </a:xfrm>
-          <a:prstGeom prst="rect">
-            <a:avLst/>
-          </a:prstGeom>
-          <a:noFill/>
-          <a:ln/>
-        </p:spPr>
-        <p:txBody>
-          <a:bodyPr wrap="square" lIns="0" tIns="0" rIns="0" bIns="0" rtlCol="0" anchor="ctr"/>
-          <a:lstStyle/>
-          <a:p>
-            <a:pPr rtl="1" algn="ctr" indent="0" marL="0">
-              <a:buNone/>
-            </a:pPr>
-            <a:r>
-              <a:rPr lang="ar-SA" altLang="en-US" sz="6600" dirty="0">
-                <a:solidFill>
-                  <a:srgbClr val="16213E"/>
-                </a:solidFill>
-                <a:latin typeface="Arial" pitchFamily="34" charset="0"/>
-                <a:ea typeface="Arial" pitchFamily="34" charset="-122"/>
-                <a:cs typeface="Arial" pitchFamily="34" charset="-120"/>
-              </a:rPr>
-              <a:t>وَٰ</a:t>
-            </a:r>
-            <a:endParaRPr lang="ar-SA" sz="6600" dirty="0"/>
-          </a:p>
-        </p:txBody>
-      </p:sp>
-      <p:sp>
-        <p:nvSpPr>
-          <p:cNvPr id="38" name="R result"/>
-          <p:cNvSpPr txBox="1"/>
-          <p:nvPr/>
-        </p:nvSpPr>
-        <p:spPr>
-          <a:xfrm>
-            <a:off x="594360" y="1645920"/>
-            <a:ext cx="2331720" cy="1828800"/>
-          </a:xfrm>
-          <a:prstGeom prst="rect">
-            <a:avLst/>
-          </a:prstGeom>
-          <a:noFill/>
-          <a:ln/>
-        </p:spPr>
-        <p:txBody>
-          <a:bodyPr wrap="square" lIns="0" tIns="0" rIns="0" bIns="0" rtlCol="0" anchor="ctr"/>
-          <a:lstStyle/>
-          <a:p>
-            <a:pPr rtl="1" algn="ctr" indent="0" marL="0">
-              <a:buNone/>
-            </a:pPr>
-            <a:r>
-              <a:rPr lang="ar-SA" altLang="en-US" sz="6600" dirty="0">
-                <a:solidFill>
-                  <a:srgbClr val="16213E"/>
-                </a:solidFill>
-                <a:latin typeface="Arial" pitchFamily="34" charset="0"/>
-                <a:ea typeface="Arial" pitchFamily="34" charset="-122"/>
-                <a:cs typeface="Arial" pitchFamily="34" charset="-120"/>
-              </a:rPr>
-              <a:t>خَبَوَٰ</a:t>
+              <a:t>ا</a:t>
             </a:r>
             <a:endParaRPr lang="ar-SA" sz="6600" dirty="0"/>
           </a:p>
@@ -12304,7 +12374,7 @@
               <a:buNone/>
             </a:pPr>
             <a:r>
-              <a:rPr lang="ar-SA" altLang="en-US" sz="6600" dirty="0">
+              <a:rPr lang="ar-SA" altLang="en-US" sz="6000" dirty="0">
                 <a:solidFill>
                   <a:srgbClr val="16213E"/>
                 </a:solidFill>
@@ -12314,7 +12384,7 @@
               </a:rPr>
               <a:t>ب</a:t>
             </a:r>
-            <a:endParaRPr lang="ar-SA" sz="6600" dirty="0"/>
+            <a:endParaRPr lang="ar-SA" sz="6000" dirty="0"/>
           </a:p>
         </p:txBody>
       </p:sp>
@@ -12340,6 +12410,240 @@
           <a:lstStyle/>
           <a:p>
             <a:pPr rtl="1" algn="ctr" indent="0" marL="0">
+              <a:buNone/>
+            </a:pPr>
+            <a:r>
+              <a:rPr lang="ar-SA" altLang="en-US" sz="6000" dirty="0">
+                <a:solidFill>
+                  <a:srgbClr val="16213E"/>
+                </a:solidFill>
+                <a:latin typeface="Arial" pitchFamily="34" charset="0"/>
+                <a:ea typeface="Arial" pitchFamily="34" charset="-122"/>
+                <a:cs typeface="Arial" pitchFamily="34" charset="-120"/>
+              </a:rPr>
+              <a:t>بَ</a:t>
+            </a:r>
+            <a:endParaRPr lang="ar-SA" sz="6000" dirty="0"/>
+          </a:p>
+        </p:txBody>
+      </p:sp>
+      <p:sp>
+        <p:nvSpPr>
+          <p:cNvPr id="33" name="L2 letter"/>
+          <p:cNvSpPr txBox="1"/>
+          <p:nvPr/>
+        </p:nvSpPr>
+        <p:spPr>
+          <a:xfrm>
+            <a:off x="5486400" y="1920240"/>
+            <a:ext cx="1280160" cy="1280160"/>
+          </a:xfrm>
+          <a:prstGeom prst="rect">
+            <a:avLst/>
+          </a:prstGeom>
+          <a:noFill/>
+          <a:ln/>
+        </p:spPr>
+        <p:txBody>
+          <a:bodyPr wrap="square" lIns="0" tIns="0" rIns="0" bIns="0" rtlCol="0" anchor="ctr"/>
+          <a:lstStyle/>
+          <a:p>
+            <a:pPr rtl="1" algn="ctr" indent="0" marL="0">
+              <a:buNone/>
+            </a:pPr>
+            <a:r>
+              <a:rPr lang="ar-SA" altLang="en-US" sz="6000" dirty="0">
+                <a:solidFill>
+                  <a:srgbClr val="16213E"/>
+                </a:solidFill>
+                <a:latin typeface="Arial" pitchFamily="34" charset="0"/>
+                <a:ea typeface="Arial" pitchFamily="34" charset="-122"/>
+                <a:cs typeface="Arial" pitchFamily="34" charset="-120"/>
+              </a:rPr>
+              <a:t>أ</a:t>
+            </a:r>
+            <a:endParaRPr lang="ar-SA" sz="6000" dirty="0"/>
+          </a:p>
+        </p:txBody>
+      </p:sp>
+      <p:sp>
+        <p:nvSpPr>
+          <p:cNvPr id="34" name="F2 fathah"/>
+          <p:cNvSpPr txBox="1"/>
+          <p:nvPr/>
+        </p:nvSpPr>
+        <p:spPr>
+          <a:xfrm>
+            <a:off x="5486400" y="1920240"/>
+            <a:ext cx="1280160" cy="1280160"/>
+          </a:xfrm>
+          <a:prstGeom prst="rect">
+            <a:avLst/>
+          </a:prstGeom>
+          <a:noFill/>
+          <a:ln/>
+        </p:spPr>
+        <p:txBody>
+          <a:bodyPr wrap="square" lIns="0" tIns="0" rIns="0" bIns="0" rtlCol="0" anchor="ctr"/>
+          <a:lstStyle/>
+          <a:p>
+            <a:pPr rtl="1" algn="ctr" indent="0" marL="0">
+              <a:buNone/>
+            </a:pPr>
+            <a:r>
+              <a:rPr lang="ar-SA" altLang="en-US" sz="6000" dirty="0">
+                <a:solidFill>
+                  <a:srgbClr val="16213E"/>
+                </a:solidFill>
+                <a:latin typeface="Arial" pitchFamily="34" charset="0"/>
+                <a:ea typeface="Arial" pitchFamily="34" charset="-122"/>
+                <a:cs typeface="Arial" pitchFamily="34" charset="-120"/>
+              </a:rPr>
+              <a:t>أَ</a:t>
+            </a:r>
+            <a:endParaRPr lang="ar-SA" sz="6000" dirty="0"/>
+          </a:p>
+        </p:txBody>
+      </p:sp>
+      <p:sp>
+        <p:nvSpPr>
+          <p:cNvPr id="35" name="L3 letter"/>
+          <p:cNvSpPr txBox="1"/>
+          <p:nvPr/>
+        </p:nvSpPr>
+        <p:spPr>
+          <a:xfrm>
+            <a:off x="3933749" y="1920240"/>
+            <a:ext cx="1280160" cy="1280160"/>
+          </a:xfrm>
+          <a:prstGeom prst="rect">
+            <a:avLst/>
+          </a:prstGeom>
+          <a:noFill/>
+          <a:ln/>
+        </p:spPr>
+        <p:txBody>
+          <a:bodyPr wrap="square" lIns="0" tIns="0" rIns="0" bIns="0" rtlCol="0" anchor="ctr"/>
+          <a:lstStyle/>
+          <a:p>
+            <a:pPr rtl="1" algn="ctr" indent="0" marL="0">
+              <a:buNone/>
+            </a:pPr>
+            <a:r>
+              <a:rPr lang="ar-SA" altLang="en-US" sz="6000" dirty="0">
+                <a:solidFill>
+                  <a:srgbClr val="16213E"/>
+                </a:solidFill>
+                <a:latin typeface="Arial" pitchFamily="34" charset="0"/>
+                <a:ea typeface="Arial" pitchFamily="34" charset="-122"/>
+                <a:cs typeface="Arial" pitchFamily="34" charset="-120"/>
+              </a:rPr>
+              <a:t>و</a:t>
+            </a:r>
+            <a:endParaRPr lang="ar-SA" sz="6000" dirty="0"/>
+          </a:p>
+        </p:txBody>
+      </p:sp>
+      <p:sp>
+        <p:nvSpPr>
+          <p:cNvPr id="36" name="F3 fathah"/>
+          <p:cNvSpPr txBox="1"/>
+          <p:nvPr/>
+        </p:nvSpPr>
+        <p:spPr>
+          <a:xfrm>
+            <a:off x="3933749" y="1920240"/>
+            <a:ext cx="1280160" cy="1280160"/>
+          </a:xfrm>
+          <a:prstGeom prst="rect">
+            <a:avLst/>
+          </a:prstGeom>
+          <a:noFill/>
+          <a:ln/>
+        </p:spPr>
+        <p:txBody>
+          <a:bodyPr wrap="square" lIns="0" tIns="0" rIns="0" bIns="0" rtlCol="0" anchor="ctr"/>
+          <a:lstStyle/>
+          <a:p>
+            <a:pPr rtl="1" algn="ctr" indent="0" marL="0">
+              <a:buNone/>
+            </a:pPr>
+            <a:r>
+              <a:rPr lang="ar-SA" altLang="en-US" sz="6000" dirty="0">
+                <a:solidFill>
+                  <a:srgbClr val="16213E"/>
+                </a:solidFill>
+                <a:latin typeface="Arial" pitchFamily="34" charset="0"/>
+                <a:ea typeface="Arial" pitchFamily="34" charset="-122"/>
+                <a:cs typeface="Arial" pitchFamily="34" charset="-120"/>
+              </a:rPr>
+              <a:t>وَ</a:t>
+            </a:r>
+            <a:endParaRPr lang="ar-SA" sz="6000" dirty="0"/>
+          </a:p>
+        </p:txBody>
+      </p:sp>
+      <p:sp>
+        <p:nvSpPr>
+          <p:cNvPr id="37" name="M3 alif"/>
+          <p:cNvSpPr txBox="1"/>
+          <p:nvPr/>
+        </p:nvSpPr>
+        <p:spPr>
+          <a:xfrm>
+            <a:off x="3330245" y="2008251"/>
+            <a:ext cx="1280160" cy="1280160"/>
+          </a:xfrm>
+          <a:prstGeom prst="rect">
+            <a:avLst/>
+          </a:prstGeom>
+          <a:noFill/>
+          <a:ln/>
+        </p:spPr>
+        <p:txBody>
+          <a:bodyPr wrap="square" lIns="0" tIns="0" rIns="0" bIns="0" rtlCol="0" anchor="ctr"/>
+          <a:lstStyle/>
+          <a:p>
+            <a:pPr rtl="1" algn="ctr" indent="0" marL="0">
+              <a:buNone/>
+            </a:pPr>
+            <a:r>
+              <a:rPr lang="ar-SA" altLang="en-US" sz="3900" dirty="0">
+                <a:solidFill>
+                  <a:srgbClr val="16213E"/>
+                </a:solidFill>
+                <a:latin typeface="Arial" pitchFamily="34" charset="0"/>
+                <a:ea typeface="Arial" pitchFamily="34" charset="-122"/>
+                <a:cs typeface="Arial" pitchFamily="34" charset="-120"/>
+              </a:rPr>
+              <a:t>ا</a:t>
+            </a:r>
+            <a:endParaRPr lang="ar-SA" sz="3900" dirty="0"/>
+          </a:p>
+        </p:txBody>
+      </p:sp>
+      <p:sp>
+        <p:nvSpPr>
+          <p:cNvPr id="38" name="R result"/>
+          <p:cNvSpPr txBox="1"/>
+          <p:nvPr/>
+        </p:nvSpPr>
+        <p:spPr>
+          <a:xfrm>
+            <a:off x="594360" y="1645920"/>
+            <a:ext cx="2331720" cy="1828800"/>
+          </a:xfrm>
+          <a:prstGeom prst="rect">
+            <a:avLst/>
+          </a:prstGeom>
+          <a:noFill/>
+          <a:ln/>
+        </p:spPr>
+        <p:txBody>
+          <a:bodyPr wrap="square" lIns="0" tIns="0" rIns="0" bIns="0" rtlCol="0" anchor="ctr"/>
+          <a:lstStyle/>
+          <a:p>
+            <a:pPr algn="ctr" indent="0" marL="0">
               <a:buNone/>
             </a:pPr>
             <a:r>
@@ -12351,38 +12655,13 @@
                 <a:ea typeface="Arial" pitchFamily="34" charset="-122"/>
                 <a:cs typeface="Arial" pitchFamily="34" charset="-120"/>
               </a:rPr>
-              <a:t>بَ</a:t>
+              <a:t>بَأَوَ</a:t>
             </a:r>
-            <a:endParaRPr lang="ar-SA" sz="6600" dirty="0"/>
-          </a:p>
-        </p:txBody>
-      </p:sp>
-      <p:sp>
-        <p:nvSpPr>
-          <p:cNvPr id="33" name="L2 letter"/>
-          <p:cNvSpPr txBox="1"/>
-          <p:nvPr/>
-        </p:nvSpPr>
-        <p:spPr>
-          <a:xfrm>
-            <a:off x="5486400" y="1920240"/>
-            <a:ext cx="1280160" cy="1280160"/>
-          </a:xfrm>
-          <a:prstGeom prst="rect">
-            <a:avLst/>
-          </a:prstGeom>
-          <a:noFill/>
-          <a:ln/>
-        </p:spPr>
-        <p:txBody>
-          <a:bodyPr wrap="square" lIns="0" tIns="0" rIns="0" bIns="0" rtlCol="0" anchor="ctr"/>
-          <a:lstStyle/>
-          <a:p>
-            <a:pPr rtl="1" algn="ctr" indent="0" marL="0">
+            <a:pPr algn="ctr" indent="0" marL="0">
               <a:buNone/>
             </a:pPr>
             <a:r>
-              <a:rPr lang="ar-SA" altLang="en-US" sz="6600" dirty="0">
+              <a:rPr lang="ar-SA" altLang="en-US" sz="4290" dirty="0">
                 <a:solidFill>
                   <a:srgbClr val="16213E"/>
                 </a:solidFill>
@@ -12390,202 +12669,7 @@
                 <a:ea typeface="Arial" pitchFamily="34" charset="-122"/>
                 <a:cs typeface="Arial" pitchFamily="34" charset="-120"/>
               </a:rPr>
-              <a:t>أ</a:t>
-            </a:r>
-            <a:endParaRPr lang="ar-SA" sz="6600" dirty="0"/>
-          </a:p>
-        </p:txBody>
-      </p:sp>
-      <p:sp>
-        <p:nvSpPr>
-          <p:cNvPr id="34" name="F2 fathah"/>
-          <p:cNvSpPr txBox="1"/>
-          <p:nvPr/>
-        </p:nvSpPr>
-        <p:spPr>
-          <a:xfrm>
-            <a:off x="5486400" y="1920240"/>
-            <a:ext cx="1280160" cy="1280160"/>
-          </a:xfrm>
-          <a:prstGeom prst="rect">
-            <a:avLst/>
-          </a:prstGeom>
-          <a:noFill/>
-          <a:ln/>
-        </p:spPr>
-        <p:txBody>
-          <a:bodyPr wrap="square" lIns="0" tIns="0" rIns="0" bIns="0" rtlCol="0" anchor="ctr"/>
-          <a:lstStyle/>
-          <a:p>
-            <a:pPr rtl="1" algn="ctr" indent="0" marL="0">
-              <a:buNone/>
-            </a:pPr>
-            <a:r>
-              <a:rPr lang="ar-SA" altLang="en-US" sz="6600" dirty="0">
-                <a:solidFill>
-                  <a:srgbClr val="16213E"/>
-                </a:solidFill>
-                <a:latin typeface="Arial" pitchFamily="34" charset="0"/>
-                <a:ea typeface="Arial" pitchFamily="34" charset="-122"/>
-                <a:cs typeface="Arial" pitchFamily="34" charset="-120"/>
-              </a:rPr>
-              <a:t>أَ</a:t>
-            </a:r>
-            <a:endParaRPr lang="ar-SA" sz="6600" dirty="0"/>
-          </a:p>
-        </p:txBody>
-      </p:sp>
-      <p:sp>
-        <p:nvSpPr>
-          <p:cNvPr id="35" name="L3 letter"/>
-          <p:cNvSpPr txBox="1"/>
-          <p:nvPr/>
-        </p:nvSpPr>
-        <p:spPr>
-          <a:xfrm>
-            <a:off x="3703320" y="1920240"/>
-            <a:ext cx="1280160" cy="1280160"/>
-          </a:xfrm>
-          <a:prstGeom prst="rect">
-            <a:avLst/>
-          </a:prstGeom>
-          <a:noFill/>
-          <a:ln/>
-        </p:spPr>
-        <p:txBody>
-          <a:bodyPr wrap="square" lIns="0" tIns="0" rIns="0" bIns="0" rtlCol="0" anchor="ctr"/>
-          <a:lstStyle/>
-          <a:p>
-            <a:pPr rtl="1" algn="ctr" indent="0" marL="0">
-              <a:buNone/>
-            </a:pPr>
-            <a:r>
-              <a:rPr lang="ar-SA" altLang="en-US" sz="6600" dirty="0">
-                <a:solidFill>
-                  <a:srgbClr val="16213E"/>
-                </a:solidFill>
-                <a:latin typeface="Arial" pitchFamily="34" charset="0"/>
-                <a:ea typeface="Arial" pitchFamily="34" charset="-122"/>
-                <a:cs typeface="Arial" pitchFamily="34" charset="-120"/>
-              </a:rPr>
-              <a:t>و</a:t>
-            </a:r>
-            <a:endParaRPr lang="ar-SA" sz="6600" dirty="0"/>
-          </a:p>
-        </p:txBody>
-      </p:sp>
-      <p:sp>
-        <p:nvSpPr>
-          <p:cNvPr id="36" name="F3 fathah"/>
-          <p:cNvSpPr txBox="1"/>
-          <p:nvPr/>
-        </p:nvSpPr>
-        <p:spPr>
-          <a:xfrm>
-            <a:off x="3703320" y="1920240"/>
-            <a:ext cx="1280160" cy="1280160"/>
-          </a:xfrm>
-          <a:prstGeom prst="rect">
-            <a:avLst/>
-          </a:prstGeom>
-          <a:noFill/>
-          <a:ln/>
-        </p:spPr>
-        <p:txBody>
-          <a:bodyPr wrap="square" lIns="0" tIns="0" rIns="0" bIns="0" rtlCol="0" anchor="ctr"/>
-          <a:lstStyle/>
-          <a:p>
-            <a:pPr rtl="1" algn="ctr" indent="0" marL="0">
-              <a:buNone/>
-            </a:pPr>
-            <a:r>
-              <a:rPr lang="ar-SA" altLang="en-US" sz="6600" dirty="0">
-                <a:solidFill>
-                  <a:srgbClr val="16213E"/>
-                </a:solidFill>
-                <a:latin typeface="Arial" pitchFamily="34" charset="0"/>
-                <a:ea typeface="Arial" pitchFamily="34" charset="-122"/>
-                <a:cs typeface="Arial" pitchFamily="34" charset="-120"/>
-              </a:rPr>
-              <a:t>وَ</a:t>
-            </a:r>
-            <a:endParaRPr lang="ar-SA" sz="6600" dirty="0"/>
-          </a:p>
-        </p:txBody>
-      </p:sp>
-      <p:sp>
-        <p:nvSpPr>
-          <p:cNvPr id="37" name="M3 dagger"/>
-          <p:cNvSpPr txBox="1"/>
-          <p:nvPr/>
-        </p:nvSpPr>
-        <p:spPr>
-          <a:xfrm>
-            <a:off x="3703320" y="1920240"/>
-            <a:ext cx="1280160" cy="1280160"/>
-          </a:xfrm>
-          <a:prstGeom prst="rect">
-            <a:avLst/>
-          </a:prstGeom>
-          <a:noFill/>
-          <a:ln/>
-        </p:spPr>
-        <p:txBody>
-          <a:bodyPr wrap="square" lIns="0" tIns="0" rIns="0" bIns="0" rtlCol="0" anchor="ctr"/>
-          <a:lstStyle/>
-          <a:p>
-            <a:pPr rtl="1" algn="ctr" indent="0" marL="0">
-              <a:buNone/>
-            </a:pPr>
-            <a:r>
-              <a:rPr lang="ar-SA" altLang="en-US" sz="6600" dirty="0">
-                <a:solidFill>
-                  <a:srgbClr val="16213E"/>
-                </a:solidFill>
-                <a:latin typeface="Arial" pitchFamily="34" charset="0"/>
-                <a:ea typeface="Arial" pitchFamily="34" charset="-122"/>
-                <a:cs typeface="Arial" pitchFamily="34" charset="-120"/>
-              </a:rPr>
-              <a:t>وَٰ</a:t>
-            </a:r>
-            <a:endParaRPr lang="ar-SA" sz="6600" dirty="0"/>
-          </a:p>
-        </p:txBody>
-      </p:sp>
-      <p:sp>
-        <p:nvSpPr>
-          <p:cNvPr id="38" name="R result"/>
-          <p:cNvSpPr txBox="1"/>
-          <p:nvPr/>
-        </p:nvSpPr>
-        <p:spPr>
-          <a:xfrm>
-            <a:off x="594360" y="1645920"/>
-            <a:ext cx="2331720" cy="1828800"/>
-          </a:xfrm>
-          <a:prstGeom prst="rect">
-            <a:avLst/>
-          </a:prstGeom>
-          <a:noFill/>
-          <a:ln/>
-        </p:spPr>
-        <p:txBody>
-          <a:bodyPr wrap="square" lIns="0" tIns="0" rIns="0" bIns="0" rtlCol="0" anchor="ctr"/>
-          <a:lstStyle/>
-          <a:p>
-            <a:pPr rtl="1" algn="ctr" indent="0" marL="0">
-              <a:buNone/>
-            </a:pPr>
-            <a:r>
-              <a:rPr lang="ar-SA" altLang="en-US" sz="6600" dirty="0">
-                <a:solidFill>
-                  <a:srgbClr val="16213E"/>
-                </a:solidFill>
-                <a:latin typeface="Arial" pitchFamily="34" charset="0"/>
-                <a:ea typeface="Arial" pitchFamily="34" charset="-122"/>
-                <a:cs typeface="Arial" pitchFamily="34" charset="-120"/>
-              </a:rPr>
-              <a:t>بَأَوَٰ</a:t>
+              <a:t>ا</a:t>
             </a:r>
             <a:endParaRPr lang="ar-SA" sz="6600" dirty="0"/>
           </a:p>
@@ -13955,7 +14039,7 @@
               <a:buNone/>
             </a:pPr>
             <a:r>
-              <a:rPr lang="ar-SA" altLang="en-US" sz="9000" dirty="0">
+              <a:rPr lang="ar-SA" altLang="en-US" sz="8400" dirty="0">
                 <a:solidFill>
                   <a:srgbClr val="16213E"/>
                 </a:solidFill>
@@ -13965,7 +14049,7 @@
               </a:rPr>
               <a:t>أ</a:t>
             </a:r>
-            <a:endParaRPr lang="ar-SA" sz="9000" dirty="0"/>
+            <a:endParaRPr lang="ar-SA" sz="8400" dirty="0"/>
           </a:p>
         </p:txBody>
       </p:sp>
@@ -13991,6 +14075,162 @@
           <a:lstStyle/>
           <a:p>
             <a:pPr rtl="1" algn="ctr" indent="0" marL="0">
+              <a:buNone/>
+            </a:pPr>
+            <a:r>
+              <a:rPr lang="ar-SA" altLang="en-US" sz="8400" dirty="0">
+                <a:solidFill>
+                  <a:srgbClr val="16213E"/>
+                </a:solidFill>
+                <a:latin typeface="Arial" pitchFamily="34" charset="0"/>
+                <a:ea typeface="Arial" pitchFamily="34" charset="-122"/>
+                <a:cs typeface="Arial" pitchFamily="34" charset="-120"/>
+              </a:rPr>
+              <a:t>أَ</a:t>
+            </a:r>
+            <a:endParaRPr lang="ar-SA" sz="8400" dirty="0"/>
+          </a:p>
+        </p:txBody>
+      </p:sp>
+      <p:sp>
+        <p:nvSpPr>
+          <p:cNvPr id="31" name="L2 letter"/>
+          <p:cNvSpPr txBox="1"/>
+          <p:nvPr/>
+        </p:nvSpPr>
+        <p:spPr>
+          <a:xfrm>
+            <a:off x="4666000" y="1691640"/>
+            <a:ext cx="1737360" cy="1737360"/>
+          </a:xfrm>
+          <a:prstGeom prst="rect">
+            <a:avLst/>
+          </a:prstGeom>
+          <a:noFill/>
+          <a:ln/>
+        </p:spPr>
+        <p:txBody>
+          <a:bodyPr wrap="square" lIns="0" tIns="0" rIns="0" bIns="0" rtlCol="0" anchor="ctr"/>
+          <a:lstStyle/>
+          <a:p>
+            <a:pPr rtl="1" algn="ctr" indent="0" marL="0">
+              <a:buNone/>
+            </a:pPr>
+            <a:r>
+              <a:rPr lang="ar-SA" altLang="en-US" sz="8400" dirty="0">
+                <a:solidFill>
+                  <a:srgbClr val="16213E"/>
+                </a:solidFill>
+                <a:latin typeface="Arial" pitchFamily="34" charset="0"/>
+                <a:ea typeface="Arial" pitchFamily="34" charset="-122"/>
+                <a:cs typeface="Arial" pitchFamily="34" charset="-120"/>
+              </a:rPr>
+              <a:t>و</a:t>
+            </a:r>
+            <a:endParaRPr lang="ar-SA" sz="8400" dirty="0"/>
+          </a:p>
+        </p:txBody>
+      </p:sp>
+      <p:sp>
+        <p:nvSpPr>
+          <p:cNvPr id="32" name="F2 fathah"/>
+          <p:cNvSpPr txBox="1"/>
+          <p:nvPr/>
+        </p:nvSpPr>
+        <p:spPr>
+          <a:xfrm>
+            <a:off x="4666000" y="1691640"/>
+            <a:ext cx="1737360" cy="1737360"/>
+          </a:xfrm>
+          <a:prstGeom prst="rect">
+            <a:avLst/>
+          </a:prstGeom>
+          <a:noFill/>
+          <a:ln/>
+        </p:spPr>
+        <p:txBody>
+          <a:bodyPr wrap="square" lIns="0" tIns="0" rIns="0" bIns="0" rtlCol="0" anchor="ctr"/>
+          <a:lstStyle/>
+          <a:p>
+            <a:pPr rtl="1" algn="ctr" indent="0" marL="0">
+              <a:buNone/>
+            </a:pPr>
+            <a:r>
+              <a:rPr lang="ar-SA" altLang="en-US" sz="8400" dirty="0">
+                <a:solidFill>
+                  <a:srgbClr val="16213E"/>
+                </a:solidFill>
+                <a:latin typeface="Arial" pitchFamily="34" charset="0"/>
+                <a:ea typeface="Arial" pitchFamily="34" charset="-122"/>
+                <a:cs typeface="Arial" pitchFamily="34" charset="-120"/>
+              </a:rPr>
+              <a:t>وَ</a:t>
+            </a:r>
+            <a:endParaRPr lang="ar-SA" sz="8400" dirty="0"/>
+          </a:p>
+        </p:txBody>
+      </p:sp>
+      <p:sp>
+        <p:nvSpPr>
+          <p:cNvPr id="33" name="M2 alif"/>
+          <p:cNvSpPr txBox="1"/>
+          <p:nvPr/>
+        </p:nvSpPr>
+        <p:spPr>
+          <a:xfrm>
+            <a:off x="3821095" y="1814855"/>
+            <a:ext cx="1737360" cy="1737360"/>
+          </a:xfrm>
+          <a:prstGeom prst="rect">
+            <a:avLst/>
+          </a:prstGeom>
+          <a:noFill/>
+          <a:ln/>
+        </p:spPr>
+        <p:txBody>
+          <a:bodyPr wrap="square" lIns="0" tIns="0" rIns="0" bIns="0" rtlCol="0" anchor="ctr"/>
+          <a:lstStyle/>
+          <a:p>
+            <a:pPr rtl="1" algn="ctr" indent="0" marL="0">
+              <a:buNone/>
+            </a:pPr>
+            <a:r>
+              <a:rPr lang="ar-SA" altLang="en-US" sz="5460" dirty="0">
+                <a:solidFill>
+                  <a:srgbClr val="16213E"/>
+                </a:solidFill>
+                <a:latin typeface="Arial" pitchFamily="34" charset="0"/>
+                <a:ea typeface="Arial" pitchFamily="34" charset="-122"/>
+                <a:cs typeface="Arial" pitchFamily="34" charset="-120"/>
+              </a:rPr>
+              <a:t>ا</a:t>
+            </a:r>
+            <a:endParaRPr lang="ar-SA" sz="5460" dirty="0"/>
+          </a:p>
+        </p:txBody>
+      </p:sp>
+      <p:sp>
+        <p:nvSpPr>
+          <p:cNvPr id="34" name="R result"/>
+          <p:cNvSpPr txBox="1"/>
+          <p:nvPr/>
+        </p:nvSpPr>
+        <p:spPr>
+          <a:xfrm>
+            <a:off x="685800" y="1554480"/>
+            <a:ext cx="2743200" cy="2011680"/>
+          </a:xfrm>
+          <a:prstGeom prst="rect">
+            <a:avLst/>
+          </a:prstGeom>
+          <a:noFill/>
+          <a:ln/>
+        </p:spPr>
+        <p:txBody>
+          <a:bodyPr wrap="square" lIns="0" tIns="0" rIns="0" bIns="0" rtlCol="0" anchor="ctr"/>
+          <a:lstStyle/>
+          <a:p>
+            <a:pPr algn="ctr" indent="0" marL="0">
               <a:buNone/>
             </a:pPr>
             <a:r>
@@ -14002,38 +14242,13 @@
                 <a:ea typeface="Arial" pitchFamily="34" charset="-122"/>
                 <a:cs typeface="Arial" pitchFamily="34" charset="-120"/>
               </a:rPr>
-              <a:t>أَ</a:t>
+              <a:t>أَوَ</a:t>
             </a:r>
-            <a:endParaRPr lang="ar-SA" sz="9000" dirty="0"/>
-          </a:p>
-        </p:txBody>
-      </p:sp>
-      <p:sp>
-        <p:nvSpPr>
-          <p:cNvPr id="31" name="L2 letter"/>
-          <p:cNvSpPr txBox="1"/>
-          <p:nvPr/>
-        </p:nvSpPr>
-        <p:spPr>
-          <a:xfrm>
-            <a:off x="4343400" y="1691640"/>
-            <a:ext cx="1737360" cy="1737360"/>
-          </a:xfrm>
-          <a:prstGeom prst="rect">
-            <a:avLst/>
-          </a:prstGeom>
-          <a:noFill/>
-          <a:ln/>
-        </p:spPr>
-        <p:txBody>
-          <a:bodyPr wrap="square" lIns="0" tIns="0" rIns="0" bIns="0" rtlCol="0" anchor="ctr"/>
-          <a:lstStyle/>
-          <a:p>
-            <a:pPr rtl="1" algn="ctr" indent="0" marL="0">
+            <a:pPr algn="ctr" indent="0" marL="0">
               <a:buNone/>
             </a:pPr>
             <a:r>
-              <a:rPr lang="ar-SA" altLang="en-US" sz="9000" dirty="0">
+              <a:rPr lang="ar-SA" altLang="en-US" sz="5850" dirty="0">
                 <a:solidFill>
                   <a:srgbClr val="16213E"/>
                 </a:solidFill>
@@ -14041,124 +14256,7 @@
                 <a:ea typeface="Arial" pitchFamily="34" charset="-122"/>
                 <a:cs typeface="Arial" pitchFamily="34" charset="-120"/>
               </a:rPr>
-              <a:t>و</a:t>
-            </a:r>
-            <a:endParaRPr lang="ar-SA" sz="9000" dirty="0"/>
-          </a:p>
-        </p:txBody>
-      </p:sp>
-      <p:sp>
-        <p:nvSpPr>
-          <p:cNvPr id="32" name="F2 fathah"/>
-          <p:cNvSpPr txBox="1"/>
-          <p:nvPr/>
-        </p:nvSpPr>
-        <p:spPr>
-          <a:xfrm>
-            <a:off x="4343400" y="1691640"/>
-            <a:ext cx="1737360" cy="1737360"/>
-          </a:xfrm>
-          <a:prstGeom prst="rect">
-            <a:avLst/>
-          </a:prstGeom>
-          <a:noFill/>
-          <a:ln/>
-        </p:spPr>
-        <p:txBody>
-          <a:bodyPr wrap="square" lIns="0" tIns="0" rIns="0" bIns="0" rtlCol="0" anchor="ctr"/>
-          <a:lstStyle/>
-          <a:p>
-            <a:pPr rtl="1" algn="ctr" indent="0" marL="0">
-              <a:buNone/>
-            </a:pPr>
-            <a:r>
-              <a:rPr lang="ar-SA" altLang="en-US" sz="9000" dirty="0">
-                <a:solidFill>
-                  <a:srgbClr val="16213E"/>
-                </a:solidFill>
-                <a:latin typeface="Arial" pitchFamily="34" charset="0"/>
-                <a:ea typeface="Arial" pitchFamily="34" charset="-122"/>
-                <a:cs typeface="Arial" pitchFamily="34" charset="-120"/>
-              </a:rPr>
-              <a:t>وَ</a:t>
-            </a:r>
-            <a:endParaRPr lang="ar-SA" sz="9000" dirty="0"/>
-          </a:p>
-        </p:txBody>
-      </p:sp>
-      <p:sp>
-        <p:nvSpPr>
-          <p:cNvPr id="33" name="M2 dagger"/>
-          <p:cNvSpPr txBox="1"/>
-          <p:nvPr/>
-        </p:nvSpPr>
-        <p:spPr>
-          <a:xfrm>
-            <a:off x="4343400" y="1691640"/>
-            <a:ext cx="1737360" cy="1737360"/>
-          </a:xfrm>
-          <a:prstGeom prst="rect">
-            <a:avLst/>
-          </a:prstGeom>
-          <a:noFill/>
-          <a:ln/>
-        </p:spPr>
-        <p:txBody>
-          <a:bodyPr wrap="square" lIns="0" tIns="0" rIns="0" bIns="0" rtlCol="0" anchor="ctr"/>
-          <a:lstStyle/>
-          <a:p>
-            <a:pPr rtl="1" algn="ctr" indent="0" marL="0">
-              <a:buNone/>
-            </a:pPr>
-            <a:r>
-              <a:rPr lang="ar-SA" altLang="en-US" sz="9000" dirty="0">
-                <a:solidFill>
-                  <a:srgbClr val="16213E"/>
-                </a:solidFill>
-                <a:latin typeface="Arial" pitchFamily="34" charset="0"/>
-                <a:ea typeface="Arial" pitchFamily="34" charset="-122"/>
-                <a:cs typeface="Arial" pitchFamily="34" charset="-120"/>
-              </a:rPr>
-              <a:t>وَٰ</a:t>
-            </a:r>
-            <a:endParaRPr lang="ar-SA" sz="9000" dirty="0"/>
-          </a:p>
-        </p:txBody>
-      </p:sp>
-      <p:sp>
-        <p:nvSpPr>
-          <p:cNvPr id="34" name="R result"/>
-          <p:cNvSpPr txBox="1"/>
-          <p:nvPr/>
-        </p:nvSpPr>
-        <p:spPr>
-          <a:xfrm>
-            <a:off x="685800" y="1554480"/>
-            <a:ext cx="2743200" cy="2011680"/>
-          </a:xfrm>
-          <a:prstGeom prst="rect">
-            <a:avLst/>
-          </a:prstGeom>
-          <a:noFill/>
-          <a:ln/>
-        </p:spPr>
-        <p:txBody>
-          <a:bodyPr wrap="square" lIns="0" tIns="0" rIns="0" bIns="0" rtlCol="0" anchor="ctr"/>
-          <a:lstStyle/>
-          <a:p>
-            <a:pPr rtl="1" algn="ctr" indent="0" marL="0">
-              <a:buNone/>
-            </a:pPr>
-            <a:r>
-              <a:rPr lang="ar-SA" altLang="en-US" sz="9000" dirty="0">
-                <a:solidFill>
-                  <a:srgbClr val="16213E"/>
-                </a:solidFill>
-                <a:latin typeface="Arial" pitchFamily="34" charset="0"/>
-                <a:ea typeface="Arial" pitchFamily="34" charset="-122"/>
-                <a:cs typeface="Arial" pitchFamily="34" charset="-120"/>
-              </a:rPr>
-              <a:t>أَوَٰ</a:t>
+              <a:t>ا</a:t>
             </a:r>
             <a:endParaRPr lang="ar-SA" sz="9000" dirty="0"/>
           </a:p>
@@ -15366,7 +15464,7 @@
               <a:buNone/>
             </a:pPr>
             <a:r>
-              <a:rPr lang="ar-SA" altLang="en-US" sz="9000" dirty="0">
+              <a:rPr lang="ar-SA" altLang="en-US" sz="8400" dirty="0">
                 <a:solidFill>
                   <a:srgbClr val="16213E"/>
                 </a:solidFill>
@@ -15376,7 +15474,7 @@
               </a:rPr>
               <a:t>ب</a:t>
             </a:r>
-            <a:endParaRPr lang="ar-SA" sz="9000" dirty="0"/>
+            <a:endParaRPr lang="ar-SA" sz="8400" dirty="0"/>
           </a:p>
         </p:txBody>
       </p:sp>
@@ -15402,6 +15500,162 @@
           <a:lstStyle/>
           <a:p>
             <a:pPr rtl="1" algn="ctr" indent="0" marL="0">
+              <a:buNone/>
+            </a:pPr>
+            <a:r>
+              <a:rPr lang="ar-SA" altLang="en-US" sz="8400" dirty="0">
+                <a:solidFill>
+                  <a:srgbClr val="16213E"/>
+                </a:solidFill>
+                <a:latin typeface="Arial" pitchFamily="34" charset="0"/>
+                <a:ea typeface="Arial" pitchFamily="34" charset="-122"/>
+                <a:cs typeface="Arial" pitchFamily="34" charset="-120"/>
+              </a:rPr>
+              <a:t>بَ</a:t>
+            </a:r>
+            <a:endParaRPr lang="ar-SA" sz="8400" dirty="0"/>
+          </a:p>
+        </p:txBody>
+      </p:sp>
+      <p:sp>
+        <p:nvSpPr>
+          <p:cNvPr id="31" name="L2 letter"/>
+          <p:cNvSpPr txBox="1"/>
+          <p:nvPr/>
+        </p:nvSpPr>
+        <p:spPr>
+          <a:xfrm>
+            <a:off x="4666000" y="1691640"/>
+            <a:ext cx="1737360" cy="1737360"/>
+          </a:xfrm>
+          <a:prstGeom prst="rect">
+            <a:avLst/>
+          </a:prstGeom>
+          <a:noFill/>
+          <a:ln/>
+        </p:spPr>
+        <p:txBody>
+          <a:bodyPr wrap="square" lIns="0" tIns="0" rIns="0" bIns="0" rtlCol="0" anchor="ctr"/>
+          <a:lstStyle/>
+          <a:p>
+            <a:pPr rtl="1" algn="ctr" indent="0" marL="0">
+              <a:buNone/>
+            </a:pPr>
+            <a:r>
+              <a:rPr lang="ar-SA" altLang="en-US" sz="8400" dirty="0">
+                <a:solidFill>
+                  <a:srgbClr val="16213E"/>
+                </a:solidFill>
+                <a:latin typeface="Arial" pitchFamily="34" charset="0"/>
+                <a:ea typeface="Arial" pitchFamily="34" charset="-122"/>
+                <a:cs typeface="Arial" pitchFamily="34" charset="-120"/>
+              </a:rPr>
+              <a:t>و</a:t>
+            </a:r>
+            <a:endParaRPr lang="ar-SA" sz="8400" dirty="0"/>
+          </a:p>
+        </p:txBody>
+      </p:sp>
+      <p:sp>
+        <p:nvSpPr>
+          <p:cNvPr id="32" name="F2 fathah"/>
+          <p:cNvSpPr txBox="1"/>
+          <p:nvPr/>
+        </p:nvSpPr>
+        <p:spPr>
+          <a:xfrm>
+            <a:off x="4666000" y="1691640"/>
+            <a:ext cx="1737360" cy="1737360"/>
+          </a:xfrm>
+          <a:prstGeom prst="rect">
+            <a:avLst/>
+          </a:prstGeom>
+          <a:noFill/>
+          <a:ln/>
+        </p:spPr>
+        <p:txBody>
+          <a:bodyPr wrap="square" lIns="0" tIns="0" rIns="0" bIns="0" rtlCol="0" anchor="ctr"/>
+          <a:lstStyle/>
+          <a:p>
+            <a:pPr rtl="1" algn="ctr" indent="0" marL="0">
+              <a:buNone/>
+            </a:pPr>
+            <a:r>
+              <a:rPr lang="ar-SA" altLang="en-US" sz="8400" dirty="0">
+                <a:solidFill>
+                  <a:srgbClr val="16213E"/>
+                </a:solidFill>
+                <a:latin typeface="Arial" pitchFamily="34" charset="0"/>
+                <a:ea typeface="Arial" pitchFamily="34" charset="-122"/>
+                <a:cs typeface="Arial" pitchFamily="34" charset="-120"/>
+              </a:rPr>
+              <a:t>وَ</a:t>
+            </a:r>
+            <a:endParaRPr lang="ar-SA" sz="8400" dirty="0"/>
+          </a:p>
+        </p:txBody>
+      </p:sp>
+      <p:sp>
+        <p:nvSpPr>
+          <p:cNvPr id="33" name="M2 alif"/>
+          <p:cNvSpPr txBox="1"/>
+          <p:nvPr/>
+        </p:nvSpPr>
+        <p:spPr>
+          <a:xfrm>
+            <a:off x="3821095" y="1814855"/>
+            <a:ext cx="1737360" cy="1737360"/>
+          </a:xfrm>
+          <a:prstGeom prst="rect">
+            <a:avLst/>
+          </a:prstGeom>
+          <a:noFill/>
+          <a:ln/>
+        </p:spPr>
+        <p:txBody>
+          <a:bodyPr wrap="square" lIns="0" tIns="0" rIns="0" bIns="0" rtlCol="0" anchor="ctr"/>
+          <a:lstStyle/>
+          <a:p>
+            <a:pPr rtl="1" algn="ctr" indent="0" marL="0">
+              <a:buNone/>
+            </a:pPr>
+            <a:r>
+              <a:rPr lang="ar-SA" altLang="en-US" sz="5460" dirty="0">
+                <a:solidFill>
+                  <a:srgbClr val="16213E"/>
+                </a:solidFill>
+                <a:latin typeface="Arial" pitchFamily="34" charset="0"/>
+                <a:ea typeface="Arial" pitchFamily="34" charset="-122"/>
+                <a:cs typeface="Arial" pitchFamily="34" charset="-120"/>
+              </a:rPr>
+              <a:t>ا</a:t>
+            </a:r>
+            <a:endParaRPr lang="ar-SA" sz="5460" dirty="0"/>
+          </a:p>
+        </p:txBody>
+      </p:sp>
+      <p:sp>
+        <p:nvSpPr>
+          <p:cNvPr id="34" name="R result"/>
+          <p:cNvSpPr txBox="1"/>
+          <p:nvPr/>
+        </p:nvSpPr>
+        <p:spPr>
+          <a:xfrm>
+            <a:off x="685800" y="1554480"/>
+            <a:ext cx="2743200" cy="2011680"/>
+          </a:xfrm>
+          <a:prstGeom prst="rect">
+            <a:avLst/>
+          </a:prstGeom>
+          <a:noFill/>
+          <a:ln/>
+        </p:spPr>
+        <p:txBody>
+          <a:bodyPr wrap="square" lIns="0" tIns="0" rIns="0" bIns="0" rtlCol="0" anchor="ctr"/>
+          <a:lstStyle/>
+          <a:p>
+            <a:pPr algn="ctr" indent="0" marL="0">
               <a:buNone/>
             </a:pPr>
             <a:r>
@@ -15413,38 +15667,13 @@
                 <a:ea typeface="Arial" pitchFamily="34" charset="-122"/>
                 <a:cs typeface="Arial" pitchFamily="34" charset="-120"/>
               </a:rPr>
-              <a:t>بَ</a:t>
+              <a:t>بَوَ</a:t>
             </a:r>
-            <a:endParaRPr lang="ar-SA" sz="9000" dirty="0"/>
-          </a:p>
-        </p:txBody>
-      </p:sp>
-      <p:sp>
-        <p:nvSpPr>
-          <p:cNvPr id="31" name="L2 letter"/>
-          <p:cNvSpPr txBox="1"/>
-          <p:nvPr/>
-        </p:nvSpPr>
-        <p:spPr>
-          <a:xfrm>
-            <a:off x="4343400" y="1691640"/>
-            <a:ext cx="1737360" cy="1737360"/>
-          </a:xfrm>
-          <a:prstGeom prst="rect">
-            <a:avLst/>
-          </a:prstGeom>
-          <a:noFill/>
-          <a:ln/>
-        </p:spPr>
-        <p:txBody>
-          <a:bodyPr wrap="square" lIns="0" tIns="0" rIns="0" bIns="0" rtlCol="0" anchor="ctr"/>
-          <a:lstStyle/>
-          <a:p>
-            <a:pPr rtl="1" algn="ctr" indent="0" marL="0">
+            <a:pPr algn="ctr" indent="0" marL="0">
               <a:buNone/>
             </a:pPr>
             <a:r>
-              <a:rPr lang="ar-SA" altLang="en-US" sz="9000" dirty="0">
+              <a:rPr lang="ar-SA" altLang="en-US" sz="5850" dirty="0">
                 <a:solidFill>
                   <a:srgbClr val="16213E"/>
                 </a:solidFill>
@@ -15452,124 +15681,7 @@
                 <a:ea typeface="Arial" pitchFamily="34" charset="-122"/>
                 <a:cs typeface="Arial" pitchFamily="34" charset="-120"/>
               </a:rPr>
-              <a:t>و</a:t>
-            </a:r>
-            <a:endParaRPr lang="ar-SA" sz="9000" dirty="0"/>
-          </a:p>
-        </p:txBody>
-      </p:sp>
-      <p:sp>
-        <p:nvSpPr>
-          <p:cNvPr id="32" name="F2 fathah"/>
-          <p:cNvSpPr txBox="1"/>
-          <p:nvPr/>
-        </p:nvSpPr>
-        <p:spPr>
-          <a:xfrm>
-            <a:off x="4343400" y="1691640"/>
-            <a:ext cx="1737360" cy="1737360"/>
-          </a:xfrm>
-          <a:prstGeom prst="rect">
-            <a:avLst/>
-          </a:prstGeom>
-          <a:noFill/>
-          <a:ln/>
-        </p:spPr>
-        <p:txBody>
-          <a:bodyPr wrap="square" lIns="0" tIns="0" rIns="0" bIns="0" rtlCol="0" anchor="ctr"/>
-          <a:lstStyle/>
-          <a:p>
-            <a:pPr rtl="1" algn="ctr" indent="0" marL="0">
-              <a:buNone/>
-            </a:pPr>
-            <a:r>
-              <a:rPr lang="ar-SA" altLang="en-US" sz="9000" dirty="0">
-                <a:solidFill>
-                  <a:srgbClr val="16213E"/>
-                </a:solidFill>
-                <a:latin typeface="Arial" pitchFamily="34" charset="0"/>
-                <a:ea typeface="Arial" pitchFamily="34" charset="-122"/>
-                <a:cs typeface="Arial" pitchFamily="34" charset="-120"/>
-              </a:rPr>
-              <a:t>وَ</a:t>
-            </a:r>
-            <a:endParaRPr lang="ar-SA" sz="9000" dirty="0"/>
-          </a:p>
-        </p:txBody>
-      </p:sp>
-      <p:sp>
-        <p:nvSpPr>
-          <p:cNvPr id="33" name="M2 dagger"/>
-          <p:cNvSpPr txBox="1"/>
-          <p:nvPr/>
-        </p:nvSpPr>
-        <p:spPr>
-          <a:xfrm>
-            <a:off x="4343400" y="1691640"/>
-            <a:ext cx="1737360" cy="1737360"/>
-          </a:xfrm>
-          <a:prstGeom prst="rect">
-            <a:avLst/>
-          </a:prstGeom>
-          <a:noFill/>
-          <a:ln/>
-        </p:spPr>
-        <p:txBody>
-          <a:bodyPr wrap="square" lIns="0" tIns="0" rIns="0" bIns="0" rtlCol="0" anchor="ctr"/>
-          <a:lstStyle/>
-          <a:p>
-            <a:pPr rtl="1" algn="ctr" indent="0" marL="0">
-              <a:buNone/>
-            </a:pPr>
-            <a:r>
-              <a:rPr lang="ar-SA" altLang="en-US" sz="9000" dirty="0">
-                <a:solidFill>
-                  <a:srgbClr val="16213E"/>
-                </a:solidFill>
-                <a:latin typeface="Arial" pitchFamily="34" charset="0"/>
-                <a:ea typeface="Arial" pitchFamily="34" charset="-122"/>
-                <a:cs typeface="Arial" pitchFamily="34" charset="-120"/>
-              </a:rPr>
-              <a:t>وَٰ</a:t>
-            </a:r>
-            <a:endParaRPr lang="ar-SA" sz="9000" dirty="0"/>
-          </a:p>
-        </p:txBody>
-      </p:sp>
-      <p:sp>
-        <p:nvSpPr>
-          <p:cNvPr id="34" name="R result"/>
-          <p:cNvSpPr txBox="1"/>
-          <p:nvPr/>
-        </p:nvSpPr>
-        <p:spPr>
-          <a:xfrm>
-            <a:off x="685800" y="1554480"/>
-            <a:ext cx="2743200" cy="2011680"/>
-          </a:xfrm>
-          <a:prstGeom prst="rect">
-            <a:avLst/>
-          </a:prstGeom>
-          <a:noFill/>
-          <a:ln/>
-        </p:spPr>
-        <p:txBody>
-          <a:bodyPr wrap="square" lIns="0" tIns="0" rIns="0" bIns="0" rtlCol="0" anchor="ctr"/>
-          <a:lstStyle/>
-          <a:p>
-            <a:pPr rtl="1" algn="ctr" indent="0" marL="0">
-              <a:buNone/>
-            </a:pPr>
-            <a:r>
-              <a:rPr lang="ar-SA" altLang="en-US" sz="9000" dirty="0">
-                <a:solidFill>
-                  <a:srgbClr val="16213E"/>
-                </a:solidFill>
-                <a:latin typeface="Arial" pitchFamily="34" charset="0"/>
-                <a:ea typeface="Arial" pitchFamily="34" charset="-122"/>
-                <a:cs typeface="Arial" pitchFamily="34" charset="-120"/>
-              </a:rPr>
-              <a:t>بَوَٰ</a:t>
+              <a:t>ا</a:t>
             </a:r>
             <a:endParaRPr lang="ar-SA" sz="9000" dirty="0"/>
           </a:p>
@@ -16777,7 +16889,7 @@
               <a:buNone/>
             </a:pPr>
             <a:r>
-              <a:rPr lang="ar-SA" altLang="en-US" sz="9000" dirty="0">
+              <a:rPr lang="ar-SA" altLang="en-US" sz="8400" dirty="0">
                 <a:solidFill>
                   <a:srgbClr val="16213E"/>
                 </a:solidFill>
@@ -16787,7 +16899,7 @@
               </a:rPr>
               <a:t>ت</a:t>
             </a:r>
-            <a:endParaRPr lang="ar-SA" sz="9000" dirty="0"/>
+            <a:endParaRPr lang="ar-SA" sz="8400" dirty="0"/>
           </a:p>
         </p:txBody>
       </p:sp>
@@ -16813,6 +16925,162 @@
           <a:lstStyle/>
           <a:p>
             <a:pPr rtl="1" algn="ctr" indent="0" marL="0">
+              <a:buNone/>
+            </a:pPr>
+            <a:r>
+              <a:rPr lang="ar-SA" altLang="en-US" sz="8400" dirty="0">
+                <a:solidFill>
+                  <a:srgbClr val="16213E"/>
+                </a:solidFill>
+                <a:latin typeface="Arial" pitchFamily="34" charset="0"/>
+                <a:ea typeface="Arial" pitchFamily="34" charset="-122"/>
+                <a:cs typeface="Arial" pitchFamily="34" charset="-120"/>
+              </a:rPr>
+              <a:t>تَ</a:t>
+            </a:r>
+            <a:endParaRPr lang="ar-SA" sz="8400" dirty="0"/>
+          </a:p>
+        </p:txBody>
+      </p:sp>
+      <p:sp>
+        <p:nvSpPr>
+          <p:cNvPr id="31" name="L2 letter"/>
+          <p:cNvSpPr txBox="1"/>
+          <p:nvPr/>
+        </p:nvSpPr>
+        <p:spPr>
+          <a:xfrm>
+            <a:off x="4666000" y="1691640"/>
+            <a:ext cx="1737360" cy="1737360"/>
+          </a:xfrm>
+          <a:prstGeom prst="rect">
+            <a:avLst/>
+          </a:prstGeom>
+          <a:noFill/>
+          <a:ln/>
+        </p:spPr>
+        <p:txBody>
+          <a:bodyPr wrap="square" lIns="0" tIns="0" rIns="0" bIns="0" rtlCol="0" anchor="ctr"/>
+          <a:lstStyle/>
+          <a:p>
+            <a:pPr rtl="1" algn="ctr" indent="0" marL="0">
+              <a:buNone/>
+            </a:pPr>
+            <a:r>
+              <a:rPr lang="ar-SA" altLang="en-US" sz="8400" dirty="0">
+                <a:solidFill>
+                  <a:srgbClr val="16213E"/>
+                </a:solidFill>
+                <a:latin typeface="Arial" pitchFamily="34" charset="0"/>
+                <a:ea typeface="Arial" pitchFamily="34" charset="-122"/>
+                <a:cs typeface="Arial" pitchFamily="34" charset="-120"/>
+              </a:rPr>
+              <a:t>و</a:t>
+            </a:r>
+            <a:endParaRPr lang="ar-SA" sz="8400" dirty="0"/>
+          </a:p>
+        </p:txBody>
+      </p:sp>
+      <p:sp>
+        <p:nvSpPr>
+          <p:cNvPr id="32" name="F2 fathah"/>
+          <p:cNvSpPr txBox="1"/>
+          <p:nvPr/>
+        </p:nvSpPr>
+        <p:spPr>
+          <a:xfrm>
+            <a:off x="4666000" y="1691640"/>
+            <a:ext cx="1737360" cy="1737360"/>
+          </a:xfrm>
+          <a:prstGeom prst="rect">
+            <a:avLst/>
+          </a:prstGeom>
+          <a:noFill/>
+          <a:ln/>
+        </p:spPr>
+        <p:txBody>
+          <a:bodyPr wrap="square" lIns="0" tIns="0" rIns="0" bIns="0" rtlCol="0" anchor="ctr"/>
+          <a:lstStyle/>
+          <a:p>
+            <a:pPr rtl="1" algn="ctr" indent="0" marL="0">
+              <a:buNone/>
+            </a:pPr>
+            <a:r>
+              <a:rPr lang="ar-SA" altLang="en-US" sz="8400" dirty="0">
+                <a:solidFill>
+                  <a:srgbClr val="16213E"/>
+                </a:solidFill>
+                <a:latin typeface="Arial" pitchFamily="34" charset="0"/>
+                <a:ea typeface="Arial" pitchFamily="34" charset="-122"/>
+                <a:cs typeface="Arial" pitchFamily="34" charset="-120"/>
+              </a:rPr>
+              <a:t>وَ</a:t>
+            </a:r>
+            <a:endParaRPr lang="ar-SA" sz="8400" dirty="0"/>
+          </a:p>
+        </p:txBody>
+      </p:sp>
+      <p:sp>
+        <p:nvSpPr>
+          <p:cNvPr id="33" name="M2 alif"/>
+          <p:cNvSpPr txBox="1"/>
+          <p:nvPr/>
+        </p:nvSpPr>
+        <p:spPr>
+          <a:xfrm>
+            <a:off x="3821095" y="1814855"/>
+            <a:ext cx="1737360" cy="1737360"/>
+          </a:xfrm>
+          <a:prstGeom prst="rect">
+            <a:avLst/>
+          </a:prstGeom>
+          <a:noFill/>
+          <a:ln/>
+        </p:spPr>
+        <p:txBody>
+          <a:bodyPr wrap="square" lIns="0" tIns="0" rIns="0" bIns="0" rtlCol="0" anchor="ctr"/>
+          <a:lstStyle/>
+          <a:p>
+            <a:pPr rtl="1" algn="ctr" indent="0" marL="0">
+              <a:buNone/>
+            </a:pPr>
+            <a:r>
+              <a:rPr lang="ar-SA" altLang="en-US" sz="5460" dirty="0">
+                <a:solidFill>
+                  <a:srgbClr val="16213E"/>
+                </a:solidFill>
+                <a:latin typeface="Arial" pitchFamily="34" charset="0"/>
+                <a:ea typeface="Arial" pitchFamily="34" charset="-122"/>
+                <a:cs typeface="Arial" pitchFamily="34" charset="-120"/>
+              </a:rPr>
+              <a:t>ا</a:t>
+            </a:r>
+            <a:endParaRPr lang="ar-SA" sz="5460" dirty="0"/>
+          </a:p>
+        </p:txBody>
+      </p:sp>
+      <p:sp>
+        <p:nvSpPr>
+          <p:cNvPr id="34" name="R result"/>
+          <p:cNvSpPr txBox="1"/>
+          <p:nvPr/>
+        </p:nvSpPr>
+        <p:spPr>
+          <a:xfrm>
+            <a:off x="685800" y="1554480"/>
+            <a:ext cx="2743200" cy="2011680"/>
+          </a:xfrm>
+          <a:prstGeom prst="rect">
+            <a:avLst/>
+          </a:prstGeom>
+          <a:noFill/>
+          <a:ln/>
+        </p:spPr>
+        <p:txBody>
+          <a:bodyPr wrap="square" lIns="0" tIns="0" rIns="0" bIns="0" rtlCol="0" anchor="ctr"/>
+          <a:lstStyle/>
+          <a:p>
+            <a:pPr algn="ctr" indent="0" marL="0">
               <a:buNone/>
             </a:pPr>
             <a:r>
@@ -16824,38 +17092,13 @@
                 <a:ea typeface="Arial" pitchFamily="34" charset="-122"/>
                 <a:cs typeface="Arial" pitchFamily="34" charset="-120"/>
               </a:rPr>
-              <a:t>تَ</a:t>
+              <a:t>تَوَ</a:t>
             </a:r>
-            <a:endParaRPr lang="ar-SA" sz="9000" dirty="0"/>
-          </a:p>
-        </p:txBody>
-      </p:sp>
-      <p:sp>
-        <p:nvSpPr>
-          <p:cNvPr id="31" name="L2 letter"/>
-          <p:cNvSpPr txBox="1"/>
-          <p:nvPr/>
-        </p:nvSpPr>
-        <p:spPr>
-          <a:xfrm>
-            <a:off x="4343400" y="1691640"/>
-            <a:ext cx="1737360" cy="1737360"/>
-          </a:xfrm>
-          <a:prstGeom prst="rect">
-            <a:avLst/>
-          </a:prstGeom>
-          <a:noFill/>
-          <a:ln/>
-        </p:spPr>
-        <p:txBody>
-          <a:bodyPr wrap="square" lIns="0" tIns="0" rIns="0" bIns="0" rtlCol="0" anchor="ctr"/>
-          <a:lstStyle/>
-          <a:p>
-            <a:pPr rtl="1" algn="ctr" indent="0" marL="0">
+            <a:pPr algn="ctr" indent="0" marL="0">
               <a:buNone/>
             </a:pPr>
             <a:r>
-              <a:rPr lang="ar-SA" altLang="en-US" sz="9000" dirty="0">
+              <a:rPr lang="ar-SA" altLang="en-US" sz="5850" dirty="0">
                 <a:solidFill>
                   <a:srgbClr val="16213E"/>
                 </a:solidFill>
@@ -16863,124 +17106,7 @@
                 <a:ea typeface="Arial" pitchFamily="34" charset="-122"/>
                 <a:cs typeface="Arial" pitchFamily="34" charset="-120"/>
               </a:rPr>
-              <a:t>و</a:t>
-            </a:r>
-            <a:endParaRPr lang="ar-SA" sz="9000" dirty="0"/>
-          </a:p>
-        </p:txBody>
-      </p:sp>
-      <p:sp>
-        <p:nvSpPr>
-          <p:cNvPr id="32" name="F2 fathah"/>
-          <p:cNvSpPr txBox="1"/>
-          <p:nvPr/>
-        </p:nvSpPr>
-        <p:spPr>
-          <a:xfrm>
-            <a:off x="4343400" y="1691640"/>
-            <a:ext cx="1737360" cy="1737360"/>
-          </a:xfrm>
-          <a:prstGeom prst="rect">
-            <a:avLst/>
-          </a:prstGeom>
-          <a:noFill/>
-          <a:ln/>
-        </p:spPr>
-        <p:txBody>
-          <a:bodyPr wrap="square" lIns="0" tIns="0" rIns="0" bIns="0" rtlCol="0" anchor="ctr"/>
-          <a:lstStyle/>
-          <a:p>
-            <a:pPr rtl="1" algn="ctr" indent="0" marL="0">
-              <a:buNone/>
-            </a:pPr>
-            <a:r>
-              <a:rPr lang="ar-SA" altLang="en-US" sz="9000" dirty="0">
-                <a:solidFill>
-                  <a:srgbClr val="16213E"/>
-                </a:solidFill>
-                <a:latin typeface="Arial" pitchFamily="34" charset="0"/>
-                <a:ea typeface="Arial" pitchFamily="34" charset="-122"/>
-                <a:cs typeface="Arial" pitchFamily="34" charset="-120"/>
-              </a:rPr>
-              <a:t>وَ</a:t>
-            </a:r>
-            <a:endParaRPr lang="ar-SA" sz="9000" dirty="0"/>
-          </a:p>
-        </p:txBody>
-      </p:sp>
-      <p:sp>
-        <p:nvSpPr>
-          <p:cNvPr id="33" name="M2 dagger"/>
-          <p:cNvSpPr txBox="1"/>
-          <p:nvPr/>
-        </p:nvSpPr>
-        <p:spPr>
-          <a:xfrm>
-            <a:off x="4343400" y="1691640"/>
-            <a:ext cx="1737360" cy="1737360"/>
-          </a:xfrm>
-          <a:prstGeom prst="rect">
-            <a:avLst/>
-          </a:prstGeom>
-          <a:noFill/>
-          <a:ln/>
-        </p:spPr>
-        <p:txBody>
-          <a:bodyPr wrap="square" lIns="0" tIns="0" rIns="0" bIns="0" rtlCol="0" anchor="ctr"/>
-          <a:lstStyle/>
-          <a:p>
-            <a:pPr rtl="1" algn="ctr" indent="0" marL="0">
-              <a:buNone/>
-            </a:pPr>
-            <a:r>
-              <a:rPr lang="ar-SA" altLang="en-US" sz="9000" dirty="0">
-                <a:solidFill>
-                  <a:srgbClr val="16213E"/>
-                </a:solidFill>
-                <a:latin typeface="Arial" pitchFamily="34" charset="0"/>
-                <a:ea typeface="Arial" pitchFamily="34" charset="-122"/>
-                <a:cs typeface="Arial" pitchFamily="34" charset="-120"/>
-              </a:rPr>
-              <a:t>وَٰ</a:t>
-            </a:r>
-            <a:endParaRPr lang="ar-SA" sz="9000" dirty="0"/>
-          </a:p>
-        </p:txBody>
-      </p:sp>
-      <p:sp>
-        <p:nvSpPr>
-          <p:cNvPr id="34" name="R result"/>
-          <p:cNvSpPr txBox="1"/>
-          <p:nvPr/>
-        </p:nvSpPr>
-        <p:spPr>
-          <a:xfrm>
-            <a:off x="685800" y="1554480"/>
-            <a:ext cx="2743200" cy="2011680"/>
-          </a:xfrm>
-          <a:prstGeom prst="rect">
-            <a:avLst/>
-          </a:prstGeom>
-          <a:noFill/>
-          <a:ln/>
-        </p:spPr>
-        <p:txBody>
-          <a:bodyPr wrap="square" lIns="0" tIns="0" rIns="0" bIns="0" rtlCol="0" anchor="ctr"/>
-          <a:lstStyle/>
-          <a:p>
-            <a:pPr rtl="1" algn="ctr" indent="0" marL="0">
-              <a:buNone/>
-            </a:pPr>
-            <a:r>
-              <a:rPr lang="ar-SA" altLang="en-US" sz="9000" dirty="0">
-                <a:solidFill>
-                  <a:srgbClr val="16213E"/>
-                </a:solidFill>
-                <a:latin typeface="Arial" pitchFamily="34" charset="0"/>
-                <a:ea typeface="Arial" pitchFamily="34" charset="-122"/>
-                <a:cs typeface="Arial" pitchFamily="34" charset="-120"/>
-              </a:rPr>
-              <a:t>تَوَٰ</a:t>
+              <a:t>ا</a:t>
             </a:r>
             <a:endParaRPr lang="ar-SA" sz="9000" dirty="0"/>
           </a:p>
@@ -18188,7 +18314,7 @@
               <a:buNone/>
             </a:pPr>
             <a:r>
-              <a:rPr lang="ar-SA" altLang="en-US" sz="9000" dirty="0">
+              <a:rPr lang="ar-SA" altLang="en-US" sz="8400" dirty="0">
                 <a:solidFill>
                   <a:srgbClr val="16213E"/>
                 </a:solidFill>
@@ -18198,7 +18324,7 @@
               </a:rPr>
               <a:t>ث</a:t>
             </a:r>
-            <a:endParaRPr lang="ar-SA" sz="9000" dirty="0"/>
+            <a:endParaRPr lang="ar-SA" sz="8400" dirty="0"/>
           </a:p>
         </p:txBody>
       </p:sp>
@@ -18224,6 +18350,162 @@
           <a:lstStyle/>
           <a:p>
             <a:pPr rtl="1" algn="ctr" indent="0" marL="0">
+              <a:buNone/>
+            </a:pPr>
+            <a:r>
+              <a:rPr lang="ar-SA" altLang="en-US" sz="8400" dirty="0">
+                <a:solidFill>
+                  <a:srgbClr val="16213E"/>
+                </a:solidFill>
+                <a:latin typeface="Arial" pitchFamily="34" charset="0"/>
+                <a:ea typeface="Arial" pitchFamily="34" charset="-122"/>
+                <a:cs typeface="Arial" pitchFamily="34" charset="-120"/>
+              </a:rPr>
+              <a:t>ثَ</a:t>
+            </a:r>
+            <a:endParaRPr lang="ar-SA" sz="8400" dirty="0"/>
+          </a:p>
+        </p:txBody>
+      </p:sp>
+      <p:sp>
+        <p:nvSpPr>
+          <p:cNvPr id="31" name="L2 letter"/>
+          <p:cNvSpPr txBox="1"/>
+          <p:nvPr/>
+        </p:nvSpPr>
+        <p:spPr>
+          <a:xfrm>
+            <a:off x="4666000" y="1691640"/>
+            <a:ext cx="1737360" cy="1737360"/>
+          </a:xfrm>
+          <a:prstGeom prst="rect">
+            <a:avLst/>
+          </a:prstGeom>
+          <a:noFill/>
+          <a:ln/>
+        </p:spPr>
+        <p:txBody>
+          <a:bodyPr wrap="square" lIns="0" tIns="0" rIns="0" bIns="0" rtlCol="0" anchor="ctr"/>
+          <a:lstStyle/>
+          <a:p>
+            <a:pPr rtl="1" algn="ctr" indent="0" marL="0">
+              <a:buNone/>
+            </a:pPr>
+            <a:r>
+              <a:rPr lang="ar-SA" altLang="en-US" sz="8400" dirty="0">
+                <a:solidFill>
+                  <a:srgbClr val="16213E"/>
+                </a:solidFill>
+                <a:latin typeface="Arial" pitchFamily="34" charset="0"/>
+                <a:ea typeface="Arial" pitchFamily="34" charset="-122"/>
+                <a:cs typeface="Arial" pitchFamily="34" charset="-120"/>
+              </a:rPr>
+              <a:t>و</a:t>
+            </a:r>
+            <a:endParaRPr lang="ar-SA" sz="8400" dirty="0"/>
+          </a:p>
+        </p:txBody>
+      </p:sp>
+      <p:sp>
+        <p:nvSpPr>
+          <p:cNvPr id="32" name="F2 fathah"/>
+          <p:cNvSpPr txBox="1"/>
+          <p:nvPr/>
+        </p:nvSpPr>
+        <p:spPr>
+          <a:xfrm>
+            <a:off x="4666000" y="1691640"/>
+            <a:ext cx="1737360" cy="1737360"/>
+          </a:xfrm>
+          <a:prstGeom prst="rect">
+            <a:avLst/>
+          </a:prstGeom>
+          <a:noFill/>
+          <a:ln/>
+        </p:spPr>
+        <p:txBody>
+          <a:bodyPr wrap="square" lIns="0" tIns="0" rIns="0" bIns="0" rtlCol="0" anchor="ctr"/>
+          <a:lstStyle/>
+          <a:p>
+            <a:pPr rtl="1" algn="ctr" indent="0" marL="0">
+              <a:buNone/>
+            </a:pPr>
+            <a:r>
+              <a:rPr lang="ar-SA" altLang="en-US" sz="8400" dirty="0">
+                <a:solidFill>
+                  <a:srgbClr val="16213E"/>
+                </a:solidFill>
+                <a:latin typeface="Arial" pitchFamily="34" charset="0"/>
+                <a:ea typeface="Arial" pitchFamily="34" charset="-122"/>
+                <a:cs typeface="Arial" pitchFamily="34" charset="-120"/>
+              </a:rPr>
+              <a:t>وَ</a:t>
+            </a:r>
+            <a:endParaRPr lang="ar-SA" sz="8400" dirty="0"/>
+          </a:p>
+        </p:txBody>
+      </p:sp>
+      <p:sp>
+        <p:nvSpPr>
+          <p:cNvPr id="33" name="M2 alif"/>
+          <p:cNvSpPr txBox="1"/>
+          <p:nvPr/>
+        </p:nvSpPr>
+        <p:spPr>
+          <a:xfrm>
+            <a:off x="3821095" y="1814855"/>
+            <a:ext cx="1737360" cy="1737360"/>
+          </a:xfrm>
+          <a:prstGeom prst="rect">
+            <a:avLst/>
+          </a:prstGeom>
+          <a:noFill/>
+          <a:ln/>
+        </p:spPr>
+        <p:txBody>
+          <a:bodyPr wrap="square" lIns="0" tIns="0" rIns="0" bIns="0" rtlCol="0" anchor="ctr"/>
+          <a:lstStyle/>
+          <a:p>
+            <a:pPr rtl="1" algn="ctr" indent="0" marL="0">
+              <a:buNone/>
+            </a:pPr>
+            <a:r>
+              <a:rPr lang="ar-SA" altLang="en-US" sz="5460" dirty="0">
+                <a:solidFill>
+                  <a:srgbClr val="16213E"/>
+                </a:solidFill>
+                <a:latin typeface="Arial" pitchFamily="34" charset="0"/>
+                <a:ea typeface="Arial" pitchFamily="34" charset="-122"/>
+                <a:cs typeface="Arial" pitchFamily="34" charset="-120"/>
+              </a:rPr>
+              <a:t>ا</a:t>
+            </a:r>
+            <a:endParaRPr lang="ar-SA" sz="5460" dirty="0"/>
+          </a:p>
+        </p:txBody>
+      </p:sp>
+      <p:sp>
+        <p:nvSpPr>
+          <p:cNvPr id="34" name="R result"/>
+          <p:cNvSpPr txBox="1"/>
+          <p:nvPr/>
+        </p:nvSpPr>
+        <p:spPr>
+          <a:xfrm>
+            <a:off x="685800" y="1554480"/>
+            <a:ext cx="2743200" cy="2011680"/>
+          </a:xfrm>
+          <a:prstGeom prst="rect">
+            <a:avLst/>
+          </a:prstGeom>
+          <a:noFill/>
+          <a:ln/>
+        </p:spPr>
+        <p:txBody>
+          <a:bodyPr wrap="square" lIns="0" tIns="0" rIns="0" bIns="0" rtlCol="0" anchor="ctr"/>
+          <a:lstStyle/>
+          <a:p>
+            <a:pPr algn="ctr" indent="0" marL="0">
               <a:buNone/>
             </a:pPr>
             <a:r>
@@ -18235,38 +18517,13 @@
                 <a:ea typeface="Arial" pitchFamily="34" charset="-122"/>
                 <a:cs typeface="Arial" pitchFamily="34" charset="-120"/>
               </a:rPr>
-              <a:t>ثَ</a:t>
+              <a:t>ثَوَ</a:t>
             </a:r>
-            <a:endParaRPr lang="ar-SA" sz="9000" dirty="0"/>
-          </a:p>
-        </p:txBody>
-      </p:sp>
-      <p:sp>
-        <p:nvSpPr>
-          <p:cNvPr id="31" name="L2 letter"/>
-          <p:cNvSpPr txBox="1"/>
-          <p:nvPr/>
-        </p:nvSpPr>
-        <p:spPr>
-          <a:xfrm>
-            <a:off x="4343400" y="1691640"/>
-            <a:ext cx="1737360" cy="1737360"/>
-          </a:xfrm>
-          <a:prstGeom prst="rect">
-            <a:avLst/>
-          </a:prstGeom>
-          <a:noFill/>
-          <a:ln/>
-        </p:spPr>
-        <p:txBody>
-          <a:bodyPr wrap="square" lIns="0" tIns="0" rIns="0" bIns="0" rtlCol="0" anchor="ctr"/>
-          <a:lstStyle/>
-          <a:p>
-            <a:pPr rtl="1" algn="ctr" indent="0" marL="0">
+            <a:pPr algn="ctr" indent="0" marL="0">
               <a:buNone/>
             </a:pPr>
             <a:r>
-              <a:rPr lang="ar-SA" altLang="en-US" sz="9000" dirty="0">
+              <a:rPr lang="ar-SA" altLang="en-US" sz="5850" dirty="0">
                 <a:solidFill>
                   <a:srgbClr val="16213E"/>
                 </a:solidFill>
@@ -18274,124 +18531,7 @@
                 <a:ea typeface="Arial" pitchFamily="34" charset="-122"/>
                 <a:cs typeface="Arial" pitchFamily="34" charset="-120"/>
               </a:rPr>
-              <a:t>و</a:t>
-            </a:r>
-            <a:endParaRPr lang="ar-SA" sz="9000" dirty="0"/>
-          </a:p>
-        </p:txBody>
-      </p:sp>
-      <p:sp>
-        <p:nvSpPr>
-          <p:cNvPr id="32" name="F2 fathah"/>
-          <p:cNvSpPr txBox="1"/>
-          <p:nvPr/>
-        </p:nvSpPr>
-        <p:spPr>
-          <a:xfrm>
-            <a:off x="4343400" y="1691640"/>
-            <a:ext cx="1737360" cy="1737360"/>
-          </a:xfrm>
-          <a:prstGeom prst="rect">
-            <a:avLst/>
-          </a:prstGeom>
-          <a:noFill/>
-          <a:ln/>
-        </p:spPr>
-        <p:txBody>
-          <a:bodyPr wrap="square" lIns="0" tIns="0" rIns="0" bIns="0" rtlCol="0" anchor="ctr"/>
-          <a:lstStyle/>
-          <a:p>
-            <a:pPr rtl="1" algn="ctr" indent="0" marL="0">
-              <a:buNone/>
-            </a:pPr>
-            <a:r>
-              <a:rPr lang="ar-SA" altLang="en-US" sz="9000" dirty="0">
-                <a:solidFill>
-                  <a:srgbClr val="16213E"/>
-                </a:solidFill>
-                <a:latin typeface="Arial" pitchFamily="34" charset="0"/>
-                <a:ea typeface="Arial" pitchFamily="34" charset="-122"/>
-                <a:cs typeface="Arial" pitchFamily="34" charset="-120"/>
-              </a:rPr>
-              <a:t>وَ</a:t>
-            </a:r>
-            <a:endParaRPr lang="ar-SA" sz="9000" dirty="0"/>
-          </a:p>
-        </p:txBody>
-      </p:sp>
-      <p:sp>
-        <p:nvSpPr>
-          <p:cNvPr id="33" name="M2 dagger"/>
-          <p:cNvSpPr txBox="1"/>
-          <p:nvPr/>
-        </p:nvSpPr>
-        <p:spPr>
-          <a:xfrm>
-            <a:off x="4343400" y="1691640"/>
-            <a:ext cx="1737360" cy="1737360"/>
-          </a:xfrm>
-          <a:prstGeom prst="rect">
-            <a:avLst/>
-          </a:prstGeom>
-          <a:noFill/>
-          <a:ln/>
-        </p:spPr>
-        <p:txBody>
-          <a:bodyPr wrap="square" lIns="0" tIns="0" rIns="0" bIns="0" rtlCol="0" anchor="ctr"/>
-          <a:lstStyle/>
-          <a:p>
-            <a:pPr rtl="1" algn="ctr" indent="0" marL="0">
-              <a:buNone/>
-            </a:pPr>
-            <a:r>
-              <a:rPr lang="ar-SA" altLang="en-US" sz="9000" dirty="0">
-                <a:solidFill>
-                  <a:srgbClr val="16213E"/>
-                </a:solidFill>
-                <a:latin typeface="Arial" pitchFamily="34" charset="0"/>
-                <a:ea typeface="Arial" pitchFamily="34" charset="-122"/>
-                <a:cs typeface="Arial" pitchFamily="34" charset="-120"/>
-              </a:rPr>
-              <a:t>وَٰ</a:t>
-            </a:r>
-            <a:endParaRPr lang="ar-SA" sz="9000" dirty="0"/>
-          </a:p>
-        </p:txBody>
-      </p:sp>
-      <p:sp>
-        <p:nvSpPr>
-          <p:cNvPr id="34" name="R result"/>
-          <p:cNvSpPr txBox="1"/>
-          <p:nvPr/>
-        </p:nvSpPr>
-        <p:spPr>
-          <a:xfrm>
-            <a:off x="685800" y="1554480"/>
-            <a:ext cx="2743200" cy="2011680"/>
-          </a:xfrm>
-          <a:prstGeom prst="rect">
-            <a:avLst/>
-          </a:prstGeom>
-          <a:noFill/>
-          <a:ln/>
-        </p:spPr>
-        <p:txBody>
-          <a:bodyPr wrap="square" lIns="0" tIns="0" rIns="0" bIns="0" rtlCol="0" anchor="ctr"/>
-          <a:lstStyle/>
-          <a:p>
-            <a:pPr rtl="1" algn="ctr" indent="0" marL="0">
-              <a:buNone/>
-            </a:pPr>
-            <a:r>
-              <a:rPr lang="ar-SA" altLang="en-US" sz="9000" dirty="0">
-                <a:solidFill>
-                  <a:srgbClr val="16213E"/>
-                </a:solidFill>
-                <a:latin typeface="Arial" pitchFamily="34" charset="0"/>
-                <a:ea typeface="Arial" pitchFamily="34" charset="-122"/>
-                <a:cs typeface="Arial" pitchFamily="34" charset="-120"/>
-              </a:rPr>
-              <a:t>ثَوَٰ</a:t>
+              <a:t>ا</a:t>
             </a:r>
             <a:endParaRPr lang="ar-SA" sz="9000" dirty="0"/>
           </a:p>
@@ -19599,7 +19739,7 @@
               <a:buNone/>
             </a:pPr>
             <a:r>
-              <a:rPr lang="ar-SA" altLang="en-US" sz="9000" dirty="0">
+              <a:rPr lang="ar-SA" altLang="en-US" sz="8400" dirty="0">
                 <a:solidFill>
                   <a:srgbClr val="16213E"/>
                 </a:solidFill>
@@ -19609,7 +19749,7 @@
               </a:rPr>
               <a:t>ج</a:t>
             </a:r>
-            <a:endParaRPr lang="ar-SA" sz="9000" dirty="0"/>
+            <a:endParaRPr lang="ar-SA" sz="8400" dirty="0"/>
           </a:p>
         </p:txBody>
       </p:sp>
@@ -19635,6 +19775,162 @@
           <a:lstStyle/>
           <a:p>
             <a:pPr rtl="1" algn="ctr" indent="0" marL="0">
+              <a:buNone/>
+            </a:pPr>
+            <a:r>
+              <a:rPr lang="ar-SA" altLang="en-US" sz="8400" dirty="0">
+                <a:solidFill>
+                  <a:srgbClr val="16213E"/>
+                </a:solidFill>
+                <a:latin typeface="Arial" pitchFamily="34" charset="0"/>
+                <a:ea typeface="Arial" pitchFamily="34" charset="-122"/>
+                <a:cs typeface="Arial" pitchFamily="34" charset="-120"/>
+              </a:rPr>
+              <a:t>جَ</a:t>
+            </a:r>
+            <a:endParaRPr lang="ar-SA" sz="8400" dirty="0"/>
+          </a:p>
+        </p:txBody>
+      </p:sp>
+      <p:sp>
+        <p:nvSpPr>
+          <p:cNvPr id="31" name="L2 letter"/>
+          <p:cNvSpPr txBox="1"/>
+          <p:nvPr/>
+        </p:nvSpPr>
+        <p:spPr>
+          <a:xfrm>
+            <a:off x="4666000" y="1691640"/>
+            <a:ext cx="1737360" cy="1737360"/>
+          </a:xfrm>
+          <a:prstGeom prst="rect">
+            <a:avLst/>
+          </a:prstGeom>
+          <a:noFill/>
+          <a:ln/>
+        </p:spPr>
+        <p:txBody>
+          <a:bodyPr wrap="square" lIns="0" tIns="0" rIns="0" bIns="0" rtlCol="0" anchor="ctr"/>
+          <a:lstStyle/>
+          <a:p>
+            <a:pPr rtl="1" algn="ctr" indent="0" marL="0">
+              <a:buNone/>
+            </a:pPr>
+            <a:r>
+              <a:rPr lang="ar-SA" altLang="en-US" sz="8400" dirty="0">
+                <a:solidFill>
+                  <a:srgbClr val="16213E"/>
+                </a:solidFill>
+                <a:latin typeface="Arial" pitchFamily="34" charset="0"/>
+                <a:ea typeface="Arial" pitchFamily="34" charset="-122"/>
+                <a:cs typeface="Arial" pitchFamily="34" charset="-120"/>
+              </a:rPr>
+              <a:t>و</a:t>
+            </a:r>
+            <a:endParaRPr lang="ar-SA" sz="8400" dirty="0"/>
+          </a:p>
+        </p:txBody>
+      </p:sp>
+      <p:sp>
+        <p:nvSpPr>
+          <p:cNvPr id="32" name="F2 fathah"/>
+          <p:cNvSpPr txBox="1"/>
+          <p:nvPr/>
+        </p:nvSpPr>
+        <p:spPr>
+          <a:xfrm>
+            <a:off x="4666000" y="1691640"/>
+            <a:ext cx="1737360" cy="1737360"/>
+          </a:xfrm>
+          <a:prstGeom prst="rect">
+            <a:avLst/>
+          </a:prstGeom>
+          <a:noFill/>
+          <a:ln/>
+        </p:spPr>
+        <p:txBody>
+          <a:bodyPr wrap="square" lIns="0" tIns="0" rIns="0" bIns="0" rtlCol="0" anchor="ctr"/>
+          <a:lstStyle/>
+          <a:p>
+            <a:pPr rtl="1" algn="ctr" indent="0" marL="0">
+              <a:buNone/>
+            </a:pPr>
+            <a:r>
+              <a:rPr lang="ar-SA" altLang="en-US" sz="8400" dirty="0">
+                <a:solidFill>
+                  <a:srgbClr val="16213E"/>
+                </a:solidFill>
+                <a:latin typeface="Arial" pitchFamily="34" charset="0"/>
+                <a:ea typeface="Arial" pitchFamily="34" charset="-122"/>
+                <a:cs typeface="Arial" pitchFamily="34" charset="-120"/>
+              </a:rPr>
+              <a:t>وَ</a:t>
+            </a:r>
+            <a:endParaRPr lang="ar-SA" sz="8400" dirty="0"/>
+          </a:p>
+        </p:txBody>
+      </p:sp>
+      <p:sp>
+        <p:nvSpPr>
+          <p:cNvPr id="33" name="M2 alif"/>
+          <p:cNvSpPr txBox="1"/>
+          <p:nvPr/>
+        </p:nvSpPr>
+        <p:spPr>
+          <a:xfrm>
+            <a:off x="3821095" y="1814855"/>
+            <a:ext cx="1737360" cy="1737360"/>
+          </a:xfrm>
+          <a:prstGeom prst="rect">
+            <a:avLst/>
+          </a:prstGeom>
+          <a:noFill/>
+          <a:ln/>
+        </p:spPr>
+        <p:txBody>
+          <a:bodyPr wrap="square" lIns="0" tIns="0" rIns="0" bIns="0" rtlCol="0" anchor="ctr"/>
+          <a:lstStyle/>
+          <a:p>
+            <a:pPr rtl="1" algn="ctr" indent="0" marL="0">
+              <a:buNone/>
+            </a:pPr>
+            <a:r>
+              <a:rPr lang="ar-SA" altLang="en-US" sz="5460" dirty="0">
+                <a:solidFill>
+                  <a:srgbClr val="16213E"/>
+                </a:solidFill>
+                <a:latin typeface="Arial" pitchFamily="34" charset="0"/>
+                <a:ea typeface="Arial" pitchFamily="34" charset="-122"/>
+                <a:cs typeface="Arial" pitchFamily="34" charset="-120"/>
+              </a:rPr>
+              <a:t>ا</a:t>
+            </a:r>
+            <a:endParaRPr lang="ar-SA" sz="5460" dirty="0"/>
+          </a:p>
+        </p:txBody>
+      </p:sp>
+      <p:sp>
+        <p:nvSpPr>
+          <p:cNvPr id="34" name="R result"/>
+          <p:cNvSpPr txBox="1"/>
+          <p:nvPr/>
+        </p:nvSpPr>
+        <p:spPr>
+          <a:xfrm>
+            <a:off x="685800" y="1554480"/>
+            <a:ext cx="2743200" cy="2011680"/>
+          </a:xfrm>
+          <a:prstGeom prst="rect">
+            <a:avLst/>
+          </a:prstGeom>
+          <a:noFill/>
+          <a:ln/>
+        </p:spPr>
+        <p:txBody>
+          <a:bodyPr wrap="square" lIns="0" tIns="0" rIns="0" bIns="0" rtlCol="0" anchor="ctr"/>
+          <a:lstStyle/>
+          <a:p>
+            <a:pPr algn="ctr" indent="0" marL="0">
               <a:buNone/>
             </a:pPr>
             <a:r>
@@ -19646,38 +19942,13 @@
                 <a:ea typeface="Arial" pitchFamily="34" charset="-122"/>
                 <a:cs typeface="Arial" pitchFamily="34" charset="-120"/>
               </a:rPr>
-              <a:t>جَ</a:t>
+              <a:t>جَوَ</a:t>
             </a:r>
-            <a:endParaRPr lang="ar-SA" sz="9000" dirty="0"/>
-          </a:p>
-        </p:txBody>
-      </p:sp>
-      <p:sp>
-        <p:nvSpPr>
-          <p:cNvPr id="31" name="L2 letter"/>
-          <p:cNvSpPr txBox="1"/>
-          <p:nvPr/>
-        </p:nvSpPr>
-        <p:spPr>
-          <a:xfrm>
-            <a:off x="4343400" y="1691640"/>
-            <a:ext cx="1737360" cy="1737360"/>
-          </a:xfrm>
-          <a:prstGeom prst="rect">
-            <a:avLst/>
-          </a:prstGeom>
-          <a:noFill/>
-          <a:ln/>
-        </p:spPr>
-        <p:txBody>
-          <a:bodyPr wrap="square" lIns="0" tIns="0" rIns="0" bIns="0" rtlCol="0" anchor="ctr"/>
-          <a:lstStyle/>
-          <a:p>
-            <a:pPr rtl="1" algn="ctr" indent="0" marL="0">
+            <a:pPr algn="ctr" indent="0" marL="0">
               <a:buNone/>
             </a:pPr>
             <a:r>
-              <a:rPr lang="ar-SA" altLang="en-US" sz="9000" dirty="0">
+              <a:rPr lang="ar-SA" altLang="en-US" sz="5850" dirty="0">
                 <a:solidFill>
                   <a:srgbClr val="16213E"/>
                 </a:solidFill>
@@ -19685,124 +19956,7 @@
                 <a:ea typeface="Arial" pitchFamily="34" charset="-122"/>
                 <a:cs typeface="Arial" pitchFamily="34" charset="-120"/>
               </a:rPr>
-              <a:t>و</a:t>
-            </a:r>
-            <a:endParaRPr lang="ar-SA" sz="9000" dirty="0"/>
-          </a:p>
-        </p:txBody>
-      </p:sp>
-      <p:sp>
-        <p:nvSpPr>
-          <p:cNvPr id="32" name="F2 fathah"/>
-          <p:cNvSpPr txBox="1"/>
-          <p:nvPr/>
-        </p:nvSpPr>
-        <p:spPr>
-          <a:xfrm>
-            <a:off x="4343400" y="1691640"/>
-            <a:ext cx="1737360" cy="1737360"/>
-          </a:xfrm>
-          <a:prstGeom prst="rect">
-            <a:avLst/>
-          </a:prstGeom>
-          <a:noFill/>
-          <a:ln/>
-        </p:spPr>
-        <p:txBody>
-          <a:bodyPr wrap="square" lIns="0" tIns="0" rIns="0" bIns="0" rtlCol="0" anchor="ctr"/>
-          <a:lstStyle/>
-          <a:p>
-            <a:pPr rtl="1" algn="ctr" indent="0" marL="0">
-              <a:buNone/>
-            </a:pPr>
-            <a:r>
-              <a:rPr lang="ar-SA" altLang="en-US" sz="9000" dirty="0">
-                <a:solidFill>
-                  <a:srgbClr val="16213E"/>
-                </a:solidFill>
-                <a:latin typeface="Arial" pitchFamily="34" charset="0"/>
-                <a:ea typeface="Arial" pitchFamily="34" charset="-122"/>
-                <a:cs typeface="Arial" pitchFamily="34" charset="-120"/>
-              </a:rPr>
-              <a:t>وَ</a:t>
-            </a:r>
-            <a:endParaRPr lang="ar-SA" sz="9000" dirty="0"/>
-          </a:p>
-        </p:txBody>
-      </p:sp>
-      <p:sp>
-        <p:nvSpPr>
-          <p:cNvPr id="33" name="M2 dagger"/>
-          <p:cNvSpPr txBox="1"/>
-          <p:nvPr/>
-        </p:nvSpPr>
-        <p:spPr>
-          <a:xfrm>
-            <a:off x="4343400" y="1691640"/>
-            <a:ext cx="1737360" cy="1737360"/>
-          </a:xfrm>
-          <a:prstGeom prst="rect">
-            <a:avLst/>
-          </a:prstGeom>
-          <a:noFill/>
-          <a:ln/>
-        </p:spPr>
-        <p:txBody>
-          <a:bodyPr wrap="square" lIns="0" tIns="0" rIns="0" bIns="0" rtlCol="0" anchor="ctr"/>
-          <a:lstStyle/>
-          <a:p>
-            <a:pPr rtl="1" algn="ctr" indent="0" marL="0">
-              <a:buNone/>
-            </a:pPr>
-            <a:r>
-              <a:rPr lang="ar-SA" altLang="en-US" sz="9000" dirty="0">
-                <a:solidFill>
-                  <a:srgbClr val="16213E"/>
-                </a:solidFill>
-                <a:latin typeface="Arial" pitchFamily="34" charset="0"/>
-                <a:ea typeface="Arial" pitchFamily="34" charset="-122"/>
-                <a:cs typeface="Arial" pitchFamily="34" charset="-120"/>
-              </a:rPr>
-              <a:t>وَٰ</a:t>
-            </a:r>
-            <a:endParaRPr lang="ar-SA" sz="9000" dirty="0"/>
-          </a:p>
-        </p:txBody>
-      </p:sp>
-      <p:sp>
-        <p:nvSpPr>
-          <p:cNvPr id="34" name="R result"/>
-          <p:cNvSpPr txBox="1"/>
-          <p:nvPr/>
-        </p:nvSpPr>
-        <p:spPr>
-          <a:xfrm>
-            <a:off x="685800" y="1554480"/>
-            <a:ext cx="2743200" cy="2011680"/>
-          </a:xfrm>
-          <a:prstGeom prst="rect">
-            <a:avLst/>
-          </a:prstGeom>
-          <a:noFill/>
-          <a:ln/>
-        </p:spPr>
-        <p:txBody>
-          <a:bodyPr wrap="square" lIns="0" tIns="0" rIns="0" bIns="0" rtlCol="0" anchor="ctr"/>
-          <a:lstStyle/>
-          <a:p>
-            <a:pPr rtl="1" algn="ctr" indent="0" marL="0">
-              <a:buNone/>
-            </a:pPr>
-            <a:r>
-              <a:rPr lang="ar-SA" altLang="en-US" sz="9000" dirty="0">
-                <a:solidFill>
-                  <a:srgbClr val="16213E"/>
-                </a:solidFill>
-                <a:latin typeface="Arial" pitchFamily="34" charset="0"/>
-                <a:ea typeface="Arial" pitchFamily="34" charset="-122"/>
-                <a:cs typeface="Arial" pitchFamily="34" charset="-120"/>
-              </a:rPr>
-              <a:t>جَوَٰ</a:t>
+              <a:t>ا</a:t>
             </a:r>
             <a:endParaRPr lang="ar-SA" sz="9000" dirty="0"/>
           </a:p>
@@ -21010,7 +21164,7 @@
               <a:buNone/>
             </a:pPr>
             <a:r>
-              <a:rPr lang="ar-SA" altLang="en-US" sz="9000" dirty="0">
+              <a:rPr lang="ar-SA" altLang="en-US" sz="8400" dirty="0">
                 <a:solidFill>
                   <a:srgbClr val="16213E"/>
                 </a:solidFill>
@@ -21020,7 +21174,7 @@
               </a:rPr>
               <a:t>ح</a:t>
             </a:r>
-            <a:endParaRPr lang="ar-SA" sz="9000" dirty="0"/>
+            <a:endParaRPr lang="ar-SA" sz="8400" dirty="0"/>
           </a:p>
         </p:txBody>
       </p:sp>
@@ -21046,6 +21200,162 @@
           <a:lstStyle/>
           <a:p>
             <a:pPr rtl="1" algn="ctr" indent="0" marL="0">
+              <a:buNone/>
+            </a:pPr>
+            <a:r>
+              <a:rPr lang="ar-SA" altLang="en-US" sz="8400" dirty="0">
+                <a:solidFill>
+                  <a:srgbClr val="16213E"/>
+                </a:solidFill>
+                <a:latin typeface="Arial" pitchFamily="34" charset="0"/>
+                <a:ea typeface="Arial" pitchFamily="34" charset="-122"/>
+                <a:cs typeface="Arial" pitchFamily="34" charset="-120"/>
+              </a:rPr>
+              <a:t>حَ</a:t>
+            </a:r>
+            <a:endParaRPr lang="ar-SA" sz="8400" dirty="0"/>
+          </a:p>
+        </p:txBody>
+      </p:sp>
+      <p:sp>
+        <p:nvSpPr>
+          <p:cNvPr id="31" name="L2 letter"/>
+          <p:cNvSpPr txBox="1"/>
+          <p:nvPr/>
+        </p:nvSpPr>
+        <p:spPr>
+          <a:xfrm>
+            <a:off x="4666000" y="1691640"/>
+            <a:ext cx="1737360" cy="1737360"/>
+          </a:xfrm>
+          <a:prstGeom prst="rect">
+            <a:avLst/>
+          </a:prstGeom>
+          <a:noFill/>
+          <a:ln/>
+        </p:spPr>
+        <p:txBody>
+          <a:bodyPr wrap="square" lIns="0" tIns="0" rIns="0" bIns="0" rtlCol="0" anchor="ctr"/>
+          <a:lstStyle/>
+          <a:p>
+            <a:pPr rtl="1" algn="ctr" indent="0" marL="0">
+              <a:buNone/>
+            </a:pPr>
+            <a:r>
+              <a:rPr lang="ar-SA" altLang="en-US" sz="8400" dirty="0">
+                <a:solidFill>
+                  <a:srgbClr val="16213E"/>
+                </a:solidFill>
+                <a:latin typeface="Arial" pitchFamily="34" charset="0"/>
+                <a:ea typeface="Arial" pitchFamily="34" charset="-122"/>
+                <a:cs typeface="Arial" pitchFamily="34" charset="-120"/>
+              </a:rPr>
+              <a:t>و</a:t>
+            </a:r>
+            <a:endParaRPr lang="ar-SA" sz="8400" dirty="0"/>
+          </a:p>
+        </p:txBody>
+      </p:sp>
+      <p:sp>
+        <p:nvSpPr>
+          <p:cNvPr id="32" name="F2 fathah"/>
+          <p:cNvSpPr txBox="1"/>
+          <p:nvPr/>
+        </p:nvSpPr>
+        <p:spPr>
+          <a:xfrm>
+            <a:off x="4666000" y="1691640"/>
+            <a:ext cx="1737360" cy="1737360"/>
+          </a:xfrm>
+          <a:prstGeom prst="rect">
+            <a:avLst/>
+          </a:prstGeom>
+          <a:noFill/>
+          <a:ln/>
+        </p:spPr>
+        <p:txBody>
+          <a:bodyPr wrap="square" lIns="0" tIns="0" rIns="0" bIns="0" rtlCol="0" anchor="ctr"/>
+          <a:lstStyle/>
+          <a:p>
+            <a:pPr rtl="1" algn="ctr" indent="0" marL="0">
+              <a:buNone/>
+            </a:pPr>
+            <a:r>
+              <a:rPr lang="ar-SA" altLang="en-US" sz="8400" dirty="0">
+                <a:solidFill>
+                  <a:srgbClr val="16213E"/>
+                </a:solidFill>
+                <a:latin typeface="Arial" pitchFamily="34" charset="0"/>
+                <a:ea typeface="Arial" pitchFamily="34" charset="-122"/>
+                <a:cs typeface="Arial" pitchFamily="34" charset="-120"/>
+              </a:rPr>
+              <a:t>وَ</a:t>
+            </a:r>
+            <a:endParaRPr lang="ar-SA" sz="8400" dirty="0"/>
+          </a:p>
+        </p:txBody>
+      </p:sp>
+      <p:sp>
+        <p:nvSpPr>
+          <p:cNvPr id="33" name="M2 alif"/>
+          <p:cNvSpPr txBox="1"/>
+          <p:nvPr/>
+        </p:nvSpPr>
+        <p:spPr>
+          <a:xfrm>
+            <a:off x="3821095" y="1814855"/>
+            <a:ext cx="1737360" cy="1737360"/>
+          </a:xfrm>
+          <a:prstGeom prst="rect">
+            <a:avLst/>
+          </a:prstGeom>
+          <a:noFill/>
+          <a:ln/>
+        </p:spPr>
+        <p:txBody>
+          <a:bodyPr wrap="square" lIns="0" tIns="0" rIns="0" bIns="0" rtlCol="0" anchor="ctr"/>
+          <a:lstStyle/>
+          <a:p>
+            <a:pPr rtl="1" algn="ctr" indent="0" marL="0">
+              <a:buNone/>
+            </a:pPr>
+            <a:r>
+              <a:rPr lang="ar-SA" altLang="en-US" sz="5460" dirty="0">
+                <a:solidFill>
+                  <a:srgbClr val="16213E"/>
+                </a:solidFill>
+                <a:latin typeface="Arial" pitchFamily="34" charset="0"/>
+                <a:ea typeface="Arial" pitchFamily="34" charset="-122"/>
+                <a:cs typeface="Arial" pitchFamily="34" charset="-120"/>
+              </a:rPr>
+              <a:t>ا</a:t>
+            </a:r>
+            <a:endParaRPr lang="ar-SA" sz="5460" dirty="0"/>
+          </a:p>
+        </p:txBody>
+      </p:sp>
+      <p:sp>
+        <p:nvSpPr>
+          <p:cNvPr id="34" name="R result"/>
+          <p:cNvSpPr txBox="1"/>
+          <p:nvPr/>
+        </p:nvSpPr>
+        <p:spPr>
+          <a:xfrm>
+            <a:off x="685800" y="1554480"/>
+            <a:ext cx="2743200" cy="2011680"/>
+          </a:xfrm>
+          <a:prstGeom prst="rect">
+            <a:avLst/>
+          </a:prstGeom>
+          <a:noFill/>
+          <a:ln/>
+        </p:spPr>
+        <p:txBody>
+          <a:bodyPr wrap="square" lIns="0" tIns="0" rIns="0" bIns="0" rtlCol="0" anchor="ctr"/>
+          <a:lstStyle/>
+          <a:p>
+            <a:pPr algn="ctr" indent="0" marL="0">
               <a:buNone/>
             </a:pPr>
             <a:r>
@@ -21057,38 +21367,13 @@
                 <a:ea typeface="Arial" pitchFamily="34" charset="-122"/>
                 <a:cs typeface="Arial" pitchFamily="34" charset="-120"/>
               </a:rPr>
-              <a:t>حَ</a:t>
+              <a:t>حَوَ</a:t>
             </a:r>
-            <a:endParaRPr lang="ar-SA" sz="9000" dirty="0"/>
-          </a:p>
-        </p:txBody>
-      </p:sp>
-      <p:sp>
-        <p:nvSpPr>
-          <p:cNvPr id="31" name="L2 letter"/>
-          <p:cNvSpPr txBox="1"/>
-          <p:nvPr/>
-        </p:nvSpPr>
-        <p:spPr>
-          <a:xfrm>
-            <a:off x="4343400" y="1691640"/>
-            <a:ext cx="1737360" cy="1737360"/>
-          </a:xfrm>
-          <a:prstGeom prst="rect">
-            <a:avLst/>
-          </a:prstGeom>
-          <a:noFill/>
-          <a:ln/>
-        </p:spPr>
-        <p:txBody>
-          <a:bodyPr wrap="square" lIns="0" tIns="0" rIns="0" bIns="0" rtlCol="0" anchor="ctr"/>
-          <a:lstStyle/>
-          <a:p>
-            <a:pPr rtl="1" algn="ctr" indent="0" marL="0">
+            <a:pPr algn="ctr" indent="0" marL="0">
               <a:buNone/>
             </a:pPr>
             <a:r>
-              <a:rPr lang="ar-SA" altLang="en-US" sz="9000" dirty="0">
+              <a:rPr lang="ar-SA" altLang="en-US" sz="5850" dirty="0">
                 <a:solidFill>
                   <a:srgbClr val="16213E"/>
                 </a:solidFill>
@@ -21096,124 +21381,7 @@
                 <a:ea typeface="Arial" pitchFamily="34" charset="-122"/>
                 <a:cs typeface="Arial" pitchFamily="34" charset="-120"/>
               </a:rPr>
-              <a:t>و</a:t>
-            </a:r>
-            <a:endParaRPr lang="ar-SA" sz="9000" dirty="0"/>
-          </a:p>
-        </p:txBody>
-      </p:sp>
-      <p:sp>
-        <p:nvSpPr>
-          <p:cNvPr id="32" name="F2 fathah"/>
-          <p:cNvSpPr txBox="1"/>
-          <p:nvPr/>
-        </p:nvSpPr>
-        <p:spPr>
-          <a:xfrm>
-            <a:off x="4343400" y="1691640"/>
-            <a:ext cx="1737360" cy="1737360"/>
-          </a:xfrm>
-          <a:prstGeom prst="rect">
-            <a:avLst/>
-          </a:prstGeom>
-          <a:noFill/>
-          <a:ln/>
-        </p:spPr>
-        <p:txBody>
-          <a:bodyPr wrap="square" lIns="0" tIns="0" rIns="0" bIns="0" rtlCol="0" anchor="ctr"/>
-          <a:lstStyle/>
-          <a:p>
-            <a:pPr rtl="1" algn="ctr" indent="0" marL="0">
-              <a:buNone/>
-            </a:pPr>
-            <a:r>
-              <a:rPr lang="ar-SA" altLang="en-US" sz="9000" dirty="0">
-                <a:solidFill>
-                  <a:srgbClr val="16213E"/>
-                </a:solidFill>
-                <a:latin typeface="Arial" pitchFamily="34" charset="0"/>
-                <a:ea typeface="Arial" pitchFamily="34" charset="-122"/>
-                <a:cs typeface="Arial" pitchFamily="34" charset="-120"/>
-              </a:rPr>
-              <a:t>وَ</a:t>
-            </a:r>
-            <a:endParaRPr lang="ar-SA" sz="9000" dirty="0"/>
-          </a:p>
-        </p:txBody>
-      </p:sp>
-      <p:sp>
-        <p:nvSpPr>
-          <p:cNvPr id="33" name="M2 dagger"/>
-          <p:cNvSpPr txBox="1"/>
-          <p:nvPr/>
-        </p:nvSpPr>
-        <p:spPr>
-          <a:xfrm>
-            <a:off x="4343400" y="1691640"/>
-            <a:ext cx="1737360" cy="1737360"/>
-          </a:xfrm>
-          <a:prstGeom prst="rect">
-            <a:avLst/>
-          </a:prstGeom>
-          <a:noFill/>
-          <a:ln/>
-        </p:spPr>
-        <p:txBody>
-          <a:bodyPr wrap="square" lIns="0" tIns="0" rIns="0" bIns="0" rtlCol="0" anchor="ctr"/>
-          <a:lstStyle/>
-          <a:p>
-            <a:pPr rtl="1" algn="ctr" indent="0" marL="0">
-              <a:buNone/>
-            </a:pPr>
-            <a:r>
-              <a:rPr lang="ar-SA" altLang="en-US" sz="9000" dirty="0">
-                <a:solidFill>
-                  <a:srgbClr val="16213E"/>
-                </a:solidFill>
-                <a:latin typeface="Arial" pitchFamily="34" charset="0"/>
-                <a:ea typeface="Arial" pitchFamily="34" charset="-122"/>
-                <a:cs typeface="Arial" pitchFamily="34" charset="-120"/>
-              </a:rPr>
-              <a:t>وَٰ</a:t>
-            </a:r>
-            <a:endParaRPr lang="ar-SA" sz="9000" dirty="0"/>
-          </a:p>
-        </p:txBody>
-      </p:sp>
-      <p:sp>
-        <p:nvSpPr>
-          <p:cNvPr id="34" name="R result"/>
-          <p:cNvSpPr txBox="1"/>
-          <p:nvPr/>
-        </p:nvSpPr>
-        <p:spPr>
-          <a:xfrm>
-            <a:off x="685800" y="1554480"/>
-            <a:ext cx="2743200" cy="2011680"/>
-          </a:xfrm>
-          <a:prstGeom prst="rect">
-            <a:avLst/>
-          </a:prstGeom>
-          <a:noFill/>
-          <a:ln/>
-        </p:spPr>
-        <p:txBody>
-          <a:bodyPr wrap="square" lIns="0" tIns="0" rIns="0" bIns="0" rtlCol="0" anchor="ctr"/>
-          <a:lstStyle/>
-          <a:p>
-            <a:pPr rtl="1" algn="ctr" indent="0" marL="0">
-              <a:buNone/>
-            </a:pPr>
-            <a:r>
-              <a:rPr lang="ar-SA" altLang="en-US" sz="9000" dirty="0">
-                <a:solidFill>
-                  <a:srgbClr val="16213E"/>
-                </a:solidFill>
-                <a:latin typeface="Arial" pitchFamily="34" charset="0"/>
-                <a:ea typeface="Arial" pitchFamily="34" charset="-122"/>
-                <a:cs typeface="Arial" pitchFamily="34" charset="-120"/>
-              </a:rPr>
-              <a:t>حَوَٰ</a:t>
+              <a:t>ا</a:t>
             </a:r>
             <a:endParaRPr lang="ar-SA" sz="9000" dirty="0"/>
           </a:p>
@@ -22421,7 +22589,7 @@
               <a:buNone/>
             </a:pPr>
             <a:r>
-              <a:rPr lang="ar-SA" altLang="en-US" sz="9000" dirty="0">
+              <a:rPr lang="ar-SA" altLang="en-US" sz="8400" dirty="0">
                 <a:solidFill>
                   <a:srgbClr val="16213E"/>
                 </a:solidFill>
@@ -22431,7 +22599,7 @@
               </a:rPr>
               <a:t>خ</a:t>
             </a:r>
-            <a:endParaRPr lang="ar-SA" sz="9000" dirty="0"/>
+            <a:endParaRPr lang="ar-SA" sz="8400" dirty="0"/>
           </a:p>
         </p:txBody>
       </p:sp>
@@ -22457,6 +22625,162 @@
           <a:lstStyle/>
           <a:p>
             <a:pPr rtl="1" algn="ctr" indent="0" marL="0">
+              <a:buNone/>
+            </a:pPr>
+            <a:r>
+              <a:rPr lang="ar-SA" altLang="en-US" sz="8400" dirty="0">
+                <a:solidFill>
+                  <a:srgbClr val="16213E"/>
+                </a:solidFill>
+                <a:latin typeface="Arial" pitchFamily="34" charset="0"/>
+                <a:ea typeface="Arial" pitchFamily="34" charset="-122"/>
+                <a:cs typeface="Arial" pitchFamily="34" charset="-120"/>
+              </a:rPr>
+              <a:t>خَ</a:t>
+            </a:r>
+            <a:endParaRPr lang="ar-SA" sz="8400" dirty="0"/>
+          </a:p>
+        </p:txBody>
+      </p:sp>
+      <p:sp>
+        <p:nvSpPr>
+          <p:cNvPr id="31" name="L2 letter"/>
+          <p:cNvSpPr txBox="1"/>
+          <p:nvPr/>
+        </p:nvSpPr>
+        <p:spPr>
+          <a:xfrm>
+            <a:off x="4666000" y="1691640"/>
+            <a:ext cx="1737360" cy="1737360"/>
+          </a:xfrm>
+          <a:prstGeom prst="rect">
+            <a:avLst/>
+          </a:prstGeom>
+          <a:noFill/>
+          <a:ln/>
+        </p:spPr>
+        <p:txBody>
+          <a:bodyPr wrap="square" lIns="0" tIns="0" rIns="0" bIns="0" rtlCol="0" anchor="ctr"/>
+          <a:lstStyle/>
+          <a:p>
+            <a:pPr rtl="1" algn="ctr" indent="0" marL="0">
+              <a:buNone/>
+            </a:pPr>
+            <a:r>
+              <a:rPr lang="ar-SA" altLang="en-US" sz="8400" dirty="0">
+                <a:solidFill>
+                  <a:srgbClr val="16213E"/>
+                </a:solidFill>
+                <a:latin typeface="Arial" pitchFamily="34" charset="0"/>
+                <a:ea typeface="Arial" pitchFamily="34" charset="-122"/>
+                <a:cs typeface="Arial" pitchFamily="34" charset="-120"/>
+              </a:rPr>
+              <a:t>و</a:t>
+            </a:r>
+            <a:endParaRPr lang="ar-SA" sz="8400" dirty="0"/>
+          </a:p>
+        </p:txBody>
+      </p:sp>
+      <p:sp>
+        <p:nvSpPr>
+          <p:cNvPr id="32" name="F2 fathah"/>
+          <p:cNvSpPr txBox="1"/>
+          <p:nvPr/>
+        </p:nvSpPr>
+        <p:spPr>
+          <a:xfrm>
+            <a:off x="4666000" y="1691640"/>
+            <a:ext cx="1737360" cy="1737360"/>
+          </a:xfrm>
+          <a:prstGeom prst="rect">
+            <a:avLst/>
+          </a:prstGeom>
+          <a:noFill/>
+          <a:ln/>
+        </p:spPr>
+        <p:txBody>
+          <a:bodyPr wrap="square" lIns="0" tIns="0" rIns="0" bIns="0" rtlCol="0" anchor="ctr"/>
+          <a:lstStyle/>
+          <a:p>
+            <a:pPr rtl="1" algn="ctr" indent="0" marL="0">
+              <a:buNone/>
+            </a:pPr>
+            <a:r>
+              <a:rPr lang="ar-SA" altLang="en-US" sz="8400" dirty="0">
+                <a:solidFill>
+                  <a:srgbClr val="16213E"/>
+                </a:solidFill>
+                <a:latin typeface="Arial" pitchFamily="34" charset="0"/>
+                <a:ea typeface="Arial" pitchFamily="34" charset="-122"/>
+                <a:cs typeface="Arial" pitchFamily="34" charset="-120"/>
+              </a:rPr>
+              <a:t>وَ</a:t>
+            </a:r>
+            <a:endParaRPr lang="ar-SA" sz="8400" dirty="0"/>
+          </a:p>
+        </p:txBody>
+      </p:sp>
+      <p:sp>
+        <p:nvSpPr>
+          <p:cNvPr id="33" name="M2 alif"/>
+          <p:cNvSpPr txBox="1"/>
+          <p:nvPr/>
+        </p:nvSpPr>
+        <p:spPr>
+          <a:xfrm>
+            <a:off x="3821095" y="1814855"/>
+            <a:ext cx="1737360" cy="1737360"/>
+          </a:xfrm>
+          <a:prstGeom prst="rect">
+            <a:avLst/>
+          </a:prstGeom>
+          <a:noFill/>
+          <a:ln/>
+        </p:spPr>
+        <p:txBody>
+          <a:bodyPr wrap="square" lIns="0" tIns="0" rIns="0" bIns="0" rtlCol="0" anchor="ctr"/>
+          <a:lstStyle/>
+          <a:p>
+            <a:pPr rtl="1" algn="ctr" indent="0" marL="0">
+              <a:buNone/>
+            </a:pPr>
+            <a:r>
+              <a:rPr lang="ar-SA" altLang="en-US" sz="5460" dirty="0">
+                <a:solidFill>
+                  <a:srgbClr val="16213E"/>
+                </a:solidFill>
+                <a:latin typeface="Arial" pitchFamily="34" charset="0"/>
+                <a:ea typeface="Arial" pitchFamily="34" charset="-122"/>
+                <a:cs typeface="Arial" pitchFamily="34" charset="-120"/>
+              </a:rPr>
+              <a:t>ا</a:t>
+            </a:r>
+            <a:endParaRPr lang="ar-SA" sz="5460" dirty="0"/>
+          </a:p>
+        </p:txBody>
+      </p:sp>
+      <p:sp>
+        <p:nvSpPr>
+          <p:cNvPr id="34" name="R result"/>
+          <p:cNvSpPr txBox="1"/>
+          <p:nvPr/>
+        </p:nvSpPr>
+        <p:spPr>
+          <a:xfrm>
+            <a:off x="685800" y="1554480"/>
+            <a:ext cx="2743200" cy="2011680"/>
+          </a:xfrm>
+          <a:prstGeom prst="rect">
+            <a:avLst/>
+          </a:prstGeom>
+          <a:noFill/>
+          <a:ln/>
+        </p:spPr>
+        <p:txBody>
+          <a:bodyPr wrap="square" lIns="0" tIns="0" rIns="0" bIns="0" rtlCol="0" anchor="ctr"/>
+          <a:lstStyle/>
+          <a:p>
+            <a:pPr algn="ctr" indent="0" marL="0">
               <a:buNone/>
             </a:pPr>
             <a:r>
@@ -22468,38 +22792,13 @@
                 <a:ea typeface="Arial" pitchFamily="34" charset="-122"/>
                 <a:cs typeface="Arial" pitchFamily="34" charset="-120"/>
               </a:rPr>
-              <a:t>خَ</a:t>
+              <a:t>خَوَ</a:t>
             </a:r>
-            <a:endParaRPr lang="ar-SA" sz="9000" dirty="0"/>
-          </a:p>
-        </p:txBody>
-      </p:sp>
-      <p:sp>
-        <p:nvSpPr>
-          <p:cNvPr id="31" name="L2 letter"/>
-          <p:cNvSpPr txBox="1"/>
-          <p:nvPr/>
-        </p:nvSpPr>
-        <p:spPr>
-          <a:xfrm>
-            <a:off x="4343400" y="1691640"/>
-            <a:ext cx="1737360" cy="1737360"/>
-          </a:xfrm>
-          <a:prstGeom prst="rect">
-            <a:avLst/>
-          </a:prstGeom>
-          <a:noFill/>
-          <a:ln/>
-        </p:spPr>
-        <p:txBody>
-          <a:bodyPr wrap="square" lIns="0" tIns="0" rIns="0" bIns="0" rtlCol="0" anchor="ctr"/>
-          <a:lstStyle/>
-          <a:p>
-            <a:pPr rtl="1" algn="ctr" indent="0" marL="0">
+            <a:pPr algn="ctr" indent="0" marL="0">
               <a:buNone/>
             </a:pPr>
             <a:r>
-              <a:rPr lang="ar-SA" altLang="en-US" sz="9000" dirty="0">
+              <a:rPr lang="ar-SA" altLang="en-US" sz="5850" dirty="0">
                 <a:solidFill>
                   <a:srgbClr val="16213E"/>
                 </a:solidFill>
@@ -22507,124 +22806,7 @@
                 <a:ea typeface="Arial" pitchFamily="34" charset="-122"/>
                 <a:cs typeface="Arial" pitchFamily="34" charset="-120"/>
               </a:rPr>
-              <a:t>و</a:t>
-            </a:r>
-            <a:endParaRPr lang="ar-SA" sz="9000" dirty="0"/>
-          </a:p>
-        </p:txBody>
-      </p:sp>
-      <p:sp>
-        <p:nvSpPr>
-          <p:cNvPr id="32" name="F2 fathah"/>
-          <p:cNvSpPr txBox="1"/>
-          <p:nvPr/>
-        </p:nvSpPr>
-        <p:spPr>
-          <a:xfrm>
-            <a:off x="4343400" y="1691640"/>
-            <a:ext cx="1737360" cy="1737360"/>
-          </a:xfrm>
-          <a:prstGeom prst="rect">
-            <a:avLst/>
-          </a:prstGeom>
-          <a:noFill/>
-          <a:ln/>
-        </p:spPr>
-        <p:txBody>
-          <a:bodyPr wrap="square" lIns="0" tIns="0" rIns="0" bIns="0" rtlCol="0" anchor="ctr"/>
-          <a:lstStyle/>
-          <a:p>
-            <a:pPr rtl="1" algn="ctr" indent="0" marL="0">
-              <a:buNone/>
-            </a:pPr>
-            <a:r>
-              <a:rPr lang="ar-SA" altLang="en-US" sz="9000" dirty="0">
-                <a:solidFill>
-                  <a:srgbClr val="16213E"/>
-                </a:solidFill>
-                <a:latin typeface="Arial" pitchFamily="34" charset="0"/>
-                <a:ea typeface="Arial" pitchFamily="34" charset="-122"/>
-                <a:cs typeface="Arial" pitchFamily="34" charset="-120"/>
-              </a:rPr>
-              <a:t>وَ</a:t>
-            </a:r>
-            <a:endParaRPr lang="ar-SA" sz="9000" dirty="0"/>
-          </a:p>
-        </p:txBody>
-      </p:sp>
-      <p:sp>
-        <p:nvSpPr>
-          <p:cNvPr id="33" name="M2 dagger"/>
-          <p:cNvSpPr txBox="1"/>
-          <p:nvPr/>
-        </p:nvSpPr>
-        <p:spPr>
-          <a:xfrm>
-            <a:off x="4343400" y="1691640"/>
-            <a:ext cx="1737360" cy="1737360"/>
-          </a:xfrm>
-          <a:prstGeom prst="rect">
-            <a:avLst/>
-          </a:prstGeom>
-          <a:noFill/>
-          <a:ln/>
-        </p:spPr>
-        <p:txBody>
-          <a:bodyPr wrap="square" lIns="0" tIns="0" rIns="0" bIns="0" rtlCol="0" anchor="ctr"/>
-          <a:lstStyle/>
-          <a:p>
-            <a:pPr rtl="1" algn="ctr" indent="0" marL="0">
-              <a:buNone/>
-            </a:pPr>
-            <a:r>
-              <a:rPr lang="ar-SA" altLang="en-US" sz="9000" dirty="0">
-                <a:solidFill>
-                  <a:srgbClr val="16213E"/>
-                </a:solidFill>
-                <a:latin typeface="Arial" pitchFamily="34" charset="0"/>
-                <a:ea typeface="Arial" pitchFamily="34" charset="-122"/>
-                <a:cs typeface="Arial" pitchFamily="34" charset="-120"/>
-              </a:rPr>
-              <a:t>وَٰ</a:t>
-            </a:r>
-            <a:endParaRPr lang="ar-SA" sz="9000" dirty="0"/>
-          </a:p>
-        </p:txBody>
-      </p:sp>
-      <p:sp>
-        <p:nvSpPr>
-          <p:cNvPr id="34" name="R result"/>
-          <p:cNvSpPr txBox="1"/>
-          <p:nvPr/>
-        </p:nvSpPr>
-        <p:spPr>
-          <a:xfrm>
-            <a:off x="685800" y="1554480"/>
-            <a:ext cx="2743200" cy="2011680"/>
-          </a:xfrm>
-          <a:prstGeom prst="rect">
-            <a:avLst/>
-          </a:prstGeom>
-          <a:noFill/>
-          <a:ln/>
-        </p:spPr>
-        <p:txBody>
-          <a:bodyPr wrap="square" lIns="0" tIns="0" rIns="0" bIns="0" rtlCol="0" anchor="ctr"/>
-          <a:lstStyle/>
-          <a:p>
-            <a:pPr rtl="1" algn="ctr" indent="0" marL="0">
-              <a:buNone/>
-            </a:pPr>
-            <a:r>
-              <a:rPr lang="ar-SA" altLang="en-US" sz="9000" dirty="0">
-                <a:solidFill>
-                  <a:srgbClr val="16213E"/>
-                </a:solidFill>
-                <a:latin typeface="Arial" pitchFamily="34" charset="0"/>
-                <a:ea typeface="Arial" pitchFamily="34" charset="-122"/>
-                <a:cs typeface="Arial" pitchFamily="34" charset="-120"/>
-              </a:rPr>
-              <a:t>خَوَٰ</a:t>
+              <a:t>ا</a:t>
             </a:r>
             <a:endParaRPr lang="ar-SA" sz="9000" dirty="0"/>
           </a:p>
@@ -23882,7 +24064,7 @@
               <a:buNone/>
             </a:pPr>
             <a:r>
-              <a:rPr lang="ar-SA" altLang="en-US" sz="6600" dirty="0">
+              <a:rPr lang="ar-SA" altLang="en-US" sz="6000" dirty="0">
                 <a:solidFill>
                   <a:srgbClr val="16213E"/>
                 </a:solidFill>
@@ -23892,7 +24074,7 @@
               </a:rPr>
               <a:t>ب</a:t>
             </a:r>
-            <a:endParaRPr lang="ar-SA" sz="6600" dirty="0"/>
+            <a:endParaRPr lang="ar-SA" sz="6000" dirty="0"/>
           </a:p>
         </p:txBody>
       </p:sp>
@@ -23918,6 +24100,240 @@
           <a:lstStyle/>
           <a:p>
             <a:pPr rtl="1" algn="ctr" indent="0" marL="0">
+              <a:buNone/>
+            </a:pPr>
+            <a:r>
+              <a:rPr lang="ar-SA" altLang="en-US" sz="6000" dirty="0">
+                <a:solidFill>
+                  <a:srgbClr val="16213E"/>
+                </a:solidFill>
+                <a:latin typeface="Arial" pitchFamily="34" charset="0"/>
+                <a:ea typeface="Arial" pitchFamily="34" charset="-122"/>
+                <a:cs typeface="Arial" pitchFamily="34" charset="-120"/>
+              </a:rPr>
+              <a:t>بَ</a:t>
+            </a:r>
+            <a:endParaRPr lang="ar-SA" sz="6000" dirty="0"/>
+          </a:p>
+        </p:txBody>
+      </p:sp>
+      <p:sp>
+        <p:nvSpPr>
+          <p:cNvPr id="33" name="L2 letter"/>
+          <p:cNvSpPr txBox="1"/>
+          <p:nvPr/>
+        </p:nvSpPr>
+        <p:spPr>
+          <a:xfrm>
+            <a:off x="5486400" y="1920240"/>
+            <a:ext cx="1280160" cy="1280160"/>
+          </a:xfrm>
+          <a:prstGeom prst="rect">
+            <a:avLst/>
+          </a:prstGeom>
+          <a:noFill/>
+          <a:ln/>
+        </p:spPr>
+        <p:txBody>
+          <a:bodyPr wrap="square" lIns="0" tIns="0" rIns="0" bIns="0" rtlCol="0" anchor="ctr"/>
+          <a:lstStyle/>
+          <a:p>
+            <a:pPr rtl="1" algn="ctr" indent="0" marL="0">
+              <a:buNone/>
+            </a:pPr>
+            <a:r>
+              <a:rPr lang="ar-SA" altLang="en-US" sz="6000" dirty="0">
+                <a:solidFill>
+                  <a:srgbClr val="16213E"/>
+                </a:solidFill>
+                <a:latin typeface="Arial" pitchFamily="34" charset="0"/>
+                <a:ea typeface="Arial" pitchFamily="34" charset="-122"/>
+                <a:cs typeface="Arial" pitchFamily="34" charset="-120"/>
+              </a:rPr>
+              <a:t>ت</a:t>
+            </a:r>
+            <a:endParaRPr lang="ar-SA" sz="6000" dirty="0"/>
+          </a:p>
+        </p:txBody>
+      </p:sp>
+      <p:sp>
+        <p:nvSpPr>
+          <p:cNvPr id="34" name="F2 fathah"/>
+          <p:cNvSpPr txBox="1"/>
+          <p:nvPr/>
+        </p:nvSpPr>
+        <p:spPr>
+          <a:xfrm>
+            <a:off x="5486400" y="1920240"/>
+            <a:ext cx="1280160" cy="1280160"/>
+          </a:xfrm>
+          <a:prstGeom prst="rect">
+            <a:avLst/>
+          </a:prstGeom>
+          <a:noFill/>
+          <a:ln/>
+        </p:spPr>
+        <p:txBody>
+          <a:bodyPr wrap="square" lIns="0" tIns="0" rIns="0" bIns="0" rtlCol="0" anchor="ctr"/>
+          <a:lstStyle/>
+          <a:p>
+            <a:pPr rtl="1" algn="ctr" indent="0" marL="0">
+              <a:buNone/>
+            </a:pPr>
+            <a:r>
+              <a:rPr lang="ar-SA" altLang="en-US" sz="6000" dirty="0">
+                <a:solidFill>
+                  <a:srgbClr val="16213E"/>
+                </a:solidFill>
+                <a:latin typeface="Arial" pitchFamily="34" charset="0"/>
+                <a:ea typeface="Arial" pitchFamily="34" charset="-122"/>
+                <a:cs typeface="Arial" pitchFamily="34" charset="-120"/>
+              </a:rPr>
+              <a:t>تَ</a:t>
+            </a:r>
+            <a:endParaRPr lang="ar-SA" sz="6000" dirty="0"/>
+          </a:p>
+        </p:txBody>
+      </p:sp>
+      <p:sp>
+        <p:nvSpPr>
+          <p:cNvPr id="35" name="L3 letter"/>
+          <p:cNvSpPr txBox="1"/>
+          <p:nvPr/>
+        </p:nvSpPr>
+        <p:spPr>
+          <a:xfrm>
+            <a:off x="3933749" y="1920240"/>
+            <a:ext cx="1280160" cy="1280160"/>
+          </a:xfrm>
+          <a:prstGeom prst="rect">
+            <a:avLst/>
+          </a:prstGeom>
+          <a:noFill/>
+          <a:ln/>
+        </p:spPr>
+        <p:txBody>
+          <a:bodyPr wrap="square" lIns="0" tIns="0" rIns="0" bIns="0" rtlCol="0" anchor="ctr"/>
+          <a:lstStyle/>
+          <a:p>
+            <a:pPr rtl="1" algn="ctr" indent="0" marL="0">
+              <a:buNone/>
+            </a:pPr>
+            <a:r>
+              <a:rPr lang="ar-SA" altLang="en-US" sz="6000" dirty="0">
+                <a:solidFill>
+                  <a:srgbClr val="16213E"/>
+                </a:solidFill>
+                <a:latin typeface="Arial" pitchFamily="34" charset="0"/>
+                <a:ea typeface="Arial" pitchFamily="34" charset="-122"/>
+                <a:cs typeface="Arial" pitchFamily="34" charset="-120"/>
+              </a:rPr>
+              <a:t>و</a:t>
+            </a:r>
+            <a:endParaRPr lang="ar-SA" sz="6000" dirty="0"/>
+          </a:p>
+        </p:txBody>
+      </p:sp>
+      <p:sp>
+        <p:nvSpPr>
+          <p:cNvPr id="36" name="F3 fathah"/>
+          <p:cNvSpPr txBox="1"/>
+          <p:nvPr/>
+        </p:nvSpPr>
+        <p:spPr>
+          <a:xfrm>
+            <a:off x="3933749" y="1920240"/>
+            <a:ext cx="1280160" cy="1280160"/>
+          </a:xfrm>
+          <a:prstGeom prst="rect">
+            <a:avLst/>
+          </a:prstGeom>
+          <a:noFill/>
+          <a:ln/>
+        </p:spPr>
+        <p:txBody>
+          <a:bodyPr wrap="square" lIns="0" tIns="0" rIns="0" bIns="0" rtlCol="0" anchor="ctr"/>
+          <a:lstStyle/>
+          <a:p>
+            <a:pPr rtl="1" algn="ctr" indent="0" marL="0">
+              <a:buNone/>
+            </a:pPr>
+            <a:r>
+              <a:rPr lang="ar-SA" altLang="en-US" sz="6000" dirty="0">
+                <a:solidFill>
+                  <a:srgbClr val="16213E"/>
+                </a:solidFill>
+                <a:latin typeface="Arial" pitchFamily="34" charset="0"/>
+                <a:ea typeface="Arial" pitchFamily="34" charset="-122"/>
+                <a:cs typeface="Arial" pitchFamily="34" charset="-120"/>
+              </a:rPr>
+              <a:t>وَ</a:t>
+            </a:r>
+            <a:endParaRPr lang="ar-SA" sz="6000" dirty="0"/>
+          </a:p>
+        </p:txBody>
+      </p:sp>
+      <p:sp>
+        <p:nvSpPr>
+          <p:cNvPr id="37" name="M3 alif"/>
+          <p:cNvSpPr txBox="1"/>
+          <p:nvPr/>
+        </p:nvSpPr>
+        <p:spPr>
+          <a:xfrm>
+            <a:off x="3330245" y="2008251"/>
+            <a:ext cx="1280160" cy="1280160"/>
+          </a:xfrm>
+          <a:prstGeom prst="rect">
+            <a:avLst/>
+          </a:prstGeom>
+          <a:noFill/>
+          <a:ln/>
+        </p:spPr>
+        <p:txBody>
+          <a:bodyPr wrap="square" lIns="0" tIns="0" rIns="0" bIns="0" rtlCol="0" anchor="ctr"/>
+          <a:lstStyle/>
+          <a:p>
+            <a:pPr rtl="1" algn="ctr" indent="0" marL="0">
+              <a:buNone/>
+            </a:pPr>
+            <a:r>
+              <a:rPr lang="ar-SA" altLang="en-US" sz="3900" dirty="0">
+                <a:solidFill>
+                  <a:srgbClr val="16213E"/>
+                </a:solidFill>
+                <a:latin typeface="Arial" pitchFamily="34" charset="0"/>
+                <a:ea typeface="Arial" pitchFamily="34" charset="-122"/>
+                <a:cs typeface="Arial" pitchFamily="34" charset="-120"/>
+              </a:rPr>
+              <a:t>ا</a:t>
+            </a:r>
+            <a:endParaRPr lang="ar-SA" sz="3900" dirty="0"/>
+          </a:p>
+        </p:txBody>
+      </p:sp>
+      <p:sp>
+        <p:nvSpPr>
+          <p:cNvPr id="38" name="R result"/>
+          <p:cNvSpPr txBox="1"/>
+          <p:nvPr/>
+        </p:nvSpPr>
+        <p:spPr>
+          <a:xfrm>
+            <a:off x="594360" y="1645920"/>
+            <a:ext cx="2331720" cy="1828800"/>
+          </a:xfrm>
+          <a:prstGeom prst="rect">
+            <a:avLst/>
+          </a:prstGeom>
+          <a:noFill/>
+          <a:ln/>
+        </p:spPr>
+        <p:txBody>
+          <a:bodyPr wrap="square" lIns="0" tIns="0" rIns="0" bIns="0" rtlCol="0" anchor="ctr"/>
+          <a:lstStyle/>
+          <a:p>
+            <a:pPr algn="ctr" indent="0" marL="0">
               <a:buNone/>
             </a:pPr>
             <a:r>
@@ -23929,38 +24345,13 @@
                 <a:ea typeface="Arial" pitchFamily="34" charset="-122"/>
                 <a:cs typeface="Arial" pitchFamily="34" charset="-120"/>
               </a:rPr>
-              <a:t>بَ</a:t>
+              <a:t>بَتَوَ</a:t>
             </a:r>
-            <a:endParaRPr lang="ar-SA" sz="6600" dirty="0"/>
-          </a:p>
-        </p:txBody>
-      </p:sp>
-      <p:sp>
-        <p:nvSpPr>
-          <p:cNvPr id="33" name="L2 letter"/>
-          <p:cNvSpPr txBox="1"/>
-          <p:nvPr/>
-        </p:nvSpPr>
-        <p:spPr>
-          <a:xfrm>
-            <a:off x="5486400" y="1920240"/>
-            <a:ext cx="1280160" cy="1280160"/>
-          </a:xfrm>
-          <a:prstGeom prst="rect">
-            <a:avLst/>
-          </a:prstGeom>
-          <a:noFill/>
-          <a:ln/>
-        </p:spPr>
-        <p:txBody>
-          <a:bodyPr wrap="square" lIns="0" tIns="0" rIns="0" bIns="0" rtlCol="0" anchor="ctr"/>
-          <a:lstStyle/>
-          <a:p>
-            <a:pPr rtl="1" algn="ctr" indent="0" marL="0">
+            <a:pPr algn="ctr" indent="0" marL="0">
               <a:buNone/>
             </a:pPr>
             <a:r>
-              <a:rPr lang="ar-SA" altLang="en-US" sz="6600" dirty="0">
+              <a:rPr lang="ar-SA" altLang="en-US" sz="4290" dirty="0">
                 <a:solidFill>
                   <a:srgbClr val="16213E"/>
                 </a:solidFill>
@@ -23968,202 +24359,7 @@
                 <a:ea typeface="Arial" pitchFamily="34" charset="-122"/>
                 <a:cs typeface="Arial" pitchFamily="34" charset="-120"/>
               </a:rPr>
-              <a:t>ت</a:t>
-            </a:r>
-            <a:endParaRPr lang="ar-SA" sz="6600" dirty="0"/>
-          </a:p>
-        </p:txBody>
-      </p:sp>
-      <p:sp>
-        <p:nvSpPr>
-          <p:cNvPr id="34" name="F2 fathah"/>
-          <p:cNvSpPr txBox="1"/>
-          <p:nvPr/>
-        </p:nvSpPr>
-        <p:spPr>
-          <a:xfrm>
-            <a:off x="5486400" y="1920240"/>
-            <a:ext cx="1280160" cy="1280160"/>
-          </a:xfrm>
-          <a:prstGeom prst="rect">
-            <a:avLst/>
-          </a:prstGeom>
-          <a:noFill/>
-          <a:ln/>
-        </p:spPr>
-        <p:txBody>
-          <a:bodyPr wrap="square" lIns="0" tIns="0" rIns="0" bIns="0" rtlCol="0" anchor="ctr"/>
-          <a:lstStyle/>
-          <a:p>
-            <a:pPr rtl="1" algn="ctr" indent="0" marL="0">
-              <a:buNone/>
-            </a:pPr>
-            <a:r>
-              <a:rPr lang="ar-SA" altLang="en-US" sz="6600" dirty="0">
-                <a:solidFill>
-                  <a:srgbClr val="16213E"/>
-                </a:solidFill>
-                <a:latin typeface="Arial" pitchFamily="34" charset="0"/>
-                <a:ea typeface="Arial" pitchFamily="34" charset="-122"/>
-                <a:cs typeface="Arial" pitchFamily="34" charset="-120"/>
-              </a:rPr>
-              <a:t>تَ</a:t>
-            </a:r>
-            <a:endParaRPr lang="ar-SA" sz="6600" dirty="0"/>
-          </a:p>
-        </p:txBody>
-      </p:sp>
-      <p:sp>
-        <p:nvSpPr>
-          <p:cNvPr id="35" name="L3 letter"/>
-          <p:cNvSpPr txBox="1"/>
-          <p:nvPr/>
-        </p:nvSpPr>
-        <p:spPr>
-          <a:xfrm>
-            <a:off x="3703320" y="1920240"/>
-            <a:ext cx="1280160" cy="1280160"/>
-          </a:xfrm>
-          <a:prstGeom prst="rect">
-            <a:avLst/>
-          </a:prstGeom>
-          <a:noFill/>
-          <a:ln/>
-        </p:spPr>
-        <p:txBody>
-          <a:bodyPr wrap="square" lIns="0" tIns="0" rIns="0" bIns="0" rtlCol="0" anchor="ctr"/>
-          <a:lstStyle/>
-          <a:p>
-            <a:pPr rtl="1" algn="ctr" indent="0" marL="0">
-              <a:buNone/>
-            </a:pPr>
-            <a:r>
-              <a:rPr lang="ar-SA" altLang="en-US" sz="6600" dirty="0">
-                <a:solidFill>
-                  <a:srgbClr val="16213E"/>
-                </a:solidFill>
-                <a:latin typeface="Arial" pitchFamily="34" charset="0"/>
-                <a:ea typeface="Arial" pitchFamily="34" charset="-122"/>
-                <a:cs typeface="Arial" pitchFamily="34" charset="-120"/>
-              </a:rPr>
-              <a:t>و</a:t>
-            </a:r>
-            <a:endParaRPr lang="ar-SA" sz="6600" dirty="0"/>
-          </a:p>
-        </p:txBody>
-      </p:sp>
-      <p:sp>
-        <p:nvSpPr>
-          <p:cNvPr id="36" name="F3 fathah"/>
-          <p:cNvSpPr txBox="1"/>
-          <p:nvPr/>
-        </p:nvSpPr>
-        <p:spPr>
-          <a:xfrm>
-            <a:off x="3703320" y="1920240"/>
-            <a:ext cx="1280160" cy="1280160"/>
-          </a:xfrm>
-          <a:prstGeom prst="rect">
-            <a:avLst/>
-          </a:prstGeom>
-          <a:noFill/>
-          <a:ln/>
-        </p:spPr>
-        <p:txBody>
-          <a:bodyPr wrap="square" lIns="0" tIns="0" rIns="0" bIns="0" rtlCol="0" anchor="ctr"/>
-          <a:lstStyle/>
-          <a:p>
-            <a:pPr rtl="1" algn="ctr" indent="0" marL="0">
-              <a:buNone/>
-            </a:pPr>
-            <a:r>
-              <a:rPr lang="ar-SA" altLang="en-US" sz="6600" dirty="0">
-                <a:solidFill>
-                  <a:srgbClr val="16213E"/>
-                </a:solidFill>
-                <a:latin typeface="Arial" pitchFamily="34" charset="0"/>
-                <a:ea typeface="Arial" pitchFamily="34" charset="-122"/>
-                <a:cs typeface="Arial" pitchFamily="34" charset="-120"/>
-              </a:rPr>
-              <a:t>وَ</a:t>
-            </a:r>
-            <a:endParaRPr lang="ar-SA" sz="6600" dirty="0"/>
-          </a:p>
-        </p:txBody>
-      </p:sp>
-      <p:sp>
-        <p:nvSpPr>
-          <p:cNvPr id="37" name="M3 dagger"/>
-          <p:cNvSpPr txBox="1"/>
-          <p:nvPr/>
-        </p:nvSpPr>
-        <p:spPr>
-          <a:xfrm>
-            <a:off x="3703320" y="1920240"/>
-            <a:ext cx="1280160" cy="1280160"/>
-          </a:xfrm>
-          <a:prstGeom prst="rect">
-            <a:avLst/>
-          </a:prstGeom>
-          <a:noFill/>
-          <a:ln/>
-        </p:spPr>
-        <p:txBody>
-          <a:bodyPr wrap="square" lIns="0" tIns="0" rIns="0" bIns="0" rtlCol="0" anchor="ctr"/>
-          <a:lstStyle/>
-          <a:p>
-            <a:pPr rtl="1" algn="ctr" indent="0" marL="0">
-              <a:buNone/>
-            </a:pPr>
-            <a:r>
-              <a:rPr lang="ar-SA" altLang="en-US" sz="6600" dirty="0">
-                <a:solidFill>
-                  <a:srgbClr val="16213E"/>
-                </a:solidFill>
-                <a:latin typeface="Arial" pitchFamily="34" charset="0"/>
-                <a:ea typeface="Arial" pitchFamily="34" charset="-122"/>
-                <a:cs typeface="Arial" pitchFamily="34" charset="-120"/>
-              </a:rPr>
-              <a:t>وَٰ</a:t>
-            </a:r>
-            <a:endParaRPr lang="ar-SA" sz="6600" dirty="0"/>
-          </a:p>
-        </p:txBody>
-      </p:sp>
-      <p:sp>
-        <p:nvSpPr>
-          <p:cNvPr id="38" name="R result"/>
-          <p:cNvSpPr txBox="1"/>
-          <p:nvPr/>
-        </p:nvSpPr>
-        <p:spPr>
-          <a:xfrm>
-            <a:off x="594360" y="1645920"/>
-            <a:ext cx="2331720" cy="1828800"/>
-          </a:xfrm>
-          <a:prstGeom prst="rect">
-            <a:avLst/>
-          </a:prstGeom>
-          <a:noFill/>
-          <a:ln/>
-        </p:spPr>
-        <p:txBody>
-          <a:bodyPr wrap="square" lIns="0" tIns="0" rIns="0" bIns="0" rtlCol="0" anchor="ctr"/>
-          <a:lstStyle/>
-          <a:p>
-            <a:pPr rtl="1" algn="ctr" indent="0" marL="0">
-              <a:buNone/>
-            </a:pPr>
-            <a:r>
-              <a:rPr lang="ar-SA" altLang="en-US" sz="6600" dirty="0">
-                <a:solidFill>
-                  <a:srgbClr val="16213E"/>
-                </a:solidFill>
-                <a:latin typeface="Arial" pitchFamily="34" charset="0"/>
-                <a:ea typeface="Arial" pitchFamily="34" charset="-122"/>
-                <a:cs typeface="Arial" pitchFamily="34" charset="-120"/>
-              </a:rPr>
-              <a:t>بَتَوَٰ</a:t>
+              <a:t>ا</a:t>
             </a:r>
             <a:endParaRPr lang="ar-SA" sz="6600" dirty="0"/>
           </a:p>

--- a/madd-decks/dagger-alif/15-waw.pptx
+++ b/madd-decks/dagger-alif/15-waw.pptx
@@ -4,6 +4,9 @@
   <p:sldMasterIdLst>
     <p:sldMasterId id="2147483648" r:id="rId1"/>
   </p:sldMasterIdLst>
+  <p:notesMasterIdLst>
+    <p:notesMasterId r:id="rId8"/>
+  </p:notesMasterIdLst>
   <p:sldIdLst>
     <p:sldId id="256" r:id="rId2"/>
     <p:sldId id="257" r:id="rId3"/>
@@ -12,9 +15,6 @@
     <p:sldId id="260" r:id="rId6"/>
     <p:sldId id="261" r:id="rId7"/>
   </p:sldIdLst>
-  <p:notesMasterIdLst>
-    <p:notesMasterId r:id="rId8"/>
-  </p:notesMasterIdLst>
   <p:sldSz cx="9144000" cy="5143500"/>
   <p:notesSz cx="5143500" cy="9144000"/>
   <p:defaultTextStyle>
@@ -3281,9 +3281,6 @@
               </a:rPr>
               <a:t>دَعَوَ</a:t>
             </a:r>
-            <a:pPr algn="ctr" indent="0" marL="0">
-              <a:buNone/>
-            </a:pPr>
             <a:r>
               <a:rPr lang="ar-SA" altLang="en-US" sz="4290" dirty="0">
                 <a:solidFill>
@@ -4996,9 +4993,6 @@
               </a:rPr>
               <a:t>غَزَوَ</a:t>
             </a:r>
-            <a:pPr algn="ctr" indent="0" marL="0">
-              <a:buNone/>
-            </a:pPr>
             <a:r>
               <a:rPr lang="ar-SA" altLang="en-US" sz="4290" dirty="0">
                 <a:solidFill>
@@ -6711,9 +6705,6 @@
               </a:rPr>
               <a:t>وَ</a:t>
             </a:r>
-            <a:pPr algn="ctr" indent="0" marL="0">
-              <a:buNone/>
-            </a:pPr>
             <a:r>
               <a:rPr lang="ar-SA" altLang="en-US" sz="4290" dirty="0">
                 <a:solidFill>
@@ -6725,9 +6716,6 @@
               </a:rPr>
               <a:t>ا</a:t>
             </a:r>
-            <a:pPr algn="ctr" indent="0" marL="0">
-              <a:buNone/>
-            </a:pPr>
             <a:r>
               <a:rPr lang="ar-SA" altLang="en-US" sz="6600" dirty="0">
                 <a:solidFill>
@@ -8440,9 +8428,6 @@
               </a:rPr>
               <a:t>وَ</a:t>
             </a:r>
-            <a:pPr algn="ctr" indent="0" marL="0">
-              <a:buNone/>
-            </a:pPr>
             <a:r>
               <a:rPr lang="ar-SA" altLang="en-US" sz="4290" dirty="0">
                 <a:solidFill>
@@ -8454,9 +8439,6 @@
               </a:rPr>
               <a:t>ا</a:t>
             </a:r>
-            <a:pPr algn="ctr" indent="0" marL="0">
-              <a:buNone/>
-            </a:pPr>
             <a:r>
               <a:rPr lang="ar-SA" altLang="en-US" sz="6600" dirty="0">
                 <a:solidFill>
@@ -10169,9 +10151,6 @@
               </a:rPr>
               <a:t>وَ</a:t>
             </a:r>
-            <a:pPr algn="ctr" indent="0" marL="0">
-              <a:buNone/>
-            </a:pPr>
             <a:r>
               <a:rPr lang="ar-SA" altLang="en-US" sz="4290" dirty="0">
                 <a:solidFill>
@@ -10183,9 +10162,6 @@
               </a:rPr>
               <a:t>ا</a:t>
             </a:r>
-            <a:pPr algn="ctr" indent="0" marL="0">
-              <a:buNone/>
-            </a:pPr>
             <a:r>
               <a:rPr lang="ar-SA" altLang="en-US" sz="6600" dirty="0">
                 <a:solidFill>
